--- a/jsik2026taikai_rev.pptx
+++ b/jsik2026taikai_rev.pptx
@@ -5,29 +5,30 @@
     <p:sldMasterId id="2147483648" r:id="rId1"/>
   </p:sldMasterIdLst>
   <p:notesMasterIdLst>
-    <p:notesMasterId r:id="rId22"/>
+    <p:notesMasterId r:id="rId23"/>
   </p:notesMasterIdLst>
   <p:sldIdLst>
     <p:sldId id="256" r:id="rId2"/>
-    <p:sldId id="296" r:id="rId3"/>
-    <p:sldId id="303" r:id="rId4"/>
-    <p:sldId id="320" r:id="rId5"/>
-    <p:sldId id="321" r:id="rId6"/>
-    <p:sldId id="304" r:id="rId7"/>
-    <p:sldId id="306" r:id="rId8"/>
-    <p:sldId id="313" r:id="rId9"/>
-    <p:sldId id="305" r:id="rId10"/>
-    <p:sldId id="307" r:id="rId11"/>
-    <p:sldId id="318" r:id="rId12"/>
-    <p:sldId id="309" r:id="rId13"/>
-    <p:sldId id="310" r:id="rId14"/>
-    <p:sldId id="308" r:id="rId15"/>
-    <p:sldId id="312" r:id="rId16"/>
-    <p:sldId id="317" r:id="rId17"/>
-    <p:sldId id="314" r:id="rId18"/>
-    <p:sldId id="315" r:id="rId19"/>
-    <p:sldId id="316" r:id="rId20"/>
-    <p:sldId id="319" r:id="rId21"/>
+    <p:sldId id="320" r:id="rId3"/>
+    <p:sldId id="321" r:id="rId4"/>
+    <p:sldId id="304" r:id="rId5"/>
+    <p:sldId id="306" r:id="rId6"/>
+    <p:sldId id="313" r:id="rId7"/>
+    <p:sldId id="305" r:id="rId8"/>
+    <p:sldId id="307" r:id="rId9"/>
+    <p:sldId id="318" r:id="rId10"/>
+    <p:sldId id="309" r:id="rId11"/>
+    <p:sldId id="310" r:id="rId12"/>
+    <p:sldId id="308" r:id="rId13"/>
+    <p:sldId id="312" r:id="rId14"/>
+    <p:sldId id="317" r:id="rId15"/>
+    <p:sldId id="314" r:id="rId16"/>
+    <p:sldId id="315" r:id="rId17"/>
+    <p:sldId id="316" r:id="rId18"/>
+    <p:sldId id="319" r:id="rId19"/>
+    <p:sldId id="322" r:id="rId20"/>
+    <p:sldId id="296" r:id="rId21"/>
+    <p:sldId id="303" r:id="rId22"/>
   </p:sldIdLst>
   <p:sldSz cx="12192000" cy="6858000"/>
   <p:notesSz cx="6858000" cy="9144000"/>
@@ -216,7 +217,7 @@
           <a:p>
             <a:fld id="{21858D78-C21E-6D4A-8EB0-1034401A7884}" type="datetimeFigureOut">
               <a:rPr kumimoji="1" lang="ja-JP" altLang="en-US" smtClean="0"/>
-              <a:t>2026/5/13</a:t>
+              <a:t>2026/5/14</a:t>
             </a:fld>
             <a:endParaRPr kumimoji="1" lang="ja-JP" altLang="en-US"/>
           </a:p>
@@ -580,7 +581,7 @@
           <a:p>
             <a:fld id="{AD21AD6E-4550-3C43-945D-BD5179E945F6}" type="slidenum">
               <a:rPr kumimoji="1" lang="ja-JP" altLang="en-US" smtClean="0"/>
-              <a:t>16</a:t>
+              <a:t>14</a:t>
             </a:fld>
             <a:endParaRPr kumimoji="1" lang="ja-JP" altLang="en-US"/>
           </a:p>
@@ -746,7 +747,7 @@
           <a:p>
             <a:fld id="{716789AD-CAC3-AD41-B5C9-BF5C62A1889D}" type="datetimeFigureOut">
               <a:rPr kumimoji="1" lang="ja-JP" altLang="en-US" smtClean="0"/>
-              <a:t>2026/5/13</a:t>
+              <a:t>2026/5/14</a:t>
             </a:fld>
             <a:endParaRPr kumimoji="1" lang="ja-JP" altLang="en-US"/>
           </a:p>
@@ -976,7 +977,7 @@
           <a:p>
             <a:fld id="{716789AD-CAC3-AD41-B5C9-BF5C62A1889D}" type="datetimeFigureOut">
               <a:rPr kumimoji="1" lang="ja-JP" altLang="en-US" smtClean="0"/>
-              <a:t>2026/5/13</a:t>
+              <a:t>2026/5/14</a:t>
             </a:fld>
             <a:endParaRPr kumimoji="1" lang="ja-JP" altLang="en-US"/>
           </a:p>
@@ -1216,7 +1217,7 @@
           <a:p>
             <a:fld id="{716789AD-CAC3-AD41-B5C9-BF5C62A1889D}" type="datetimeFigureOut">
               <a:rPr kumimoji="1" lang="ja-JP" altLang="en-US" smtClean="0"/>
-              <a:t>2026/5/13</a:t>
+              <a:t>2026/5/14</a:t>
             </a:fld>
             <a:endParaRPr kumimoji="1" lang="ja-JP" altLang="en-US"/>
           </a:p>
@@ -1446,7 +1447,7 @@
           <a:p>
             <a:fld id="{716789AD-CAC3-AD41-B5C9-BF5C62A1889D}" type="datetimeFigureOut">
               <a:rPr kumimoji="1" lang="ja-JP" altLang="en-US" smtClean="0"/>
-              <a:t>2026/5/13</a:t>
+              <a:t>2026/5/14</a:t>
             </a:fld>
             <a:endParaRPr kumimoji="1" lang="ja-JP" altLang="en-US"/>
           </a:p>
@@ -1721,7 +1722,7 @@
           <a:p>
             <a:fld id="{716789AD-CAC3-AD41-B5C9-BF5C62A1889D}" type="datetimeFigureOut">
               <a:rPr kumimoji="1" lang="ja-JP" altLang="en-US" smtClean="0"/>
-              <a:t>2026/5/13</a:t>
+              <a:t>2026/5/14</a:t>
             </a:fld>
             <a:endParaRPr kumimoji="1" lang="ja-JP" altLang="en-US"/>
           </a:p>
@@ -2050,7 +2051,7 @@
           <a:p>
             <a:fld id="{716789AD-CAC3-AD41-B5C9-BF5C62A1889D}" type="datetimeFigureOut">
               <a:rPr kumimoji="1" lang="ja-JP" altLang="en-US" smtClean="0"/>
-              <a:t>2026/5/13</a:t>
+              <a:t>2026/5/14</a:t>
             </a:fld>
             <a:endParaRPr kumimoji="1" lang="ja-JP" altLang="en-US"/>
           </a:p>
@@ -2526,7 +2527,7 @@
           <a:p>
             <a:fld id="{716789AD-CAC3-AD41-B5C9-BF5C62A1889D}" type="datetimeFigureOut">
               <a:rPr kumimoji="1" lang="ja-JP" altLang="en-US" smtClean="0"/>
-              <a:t>2026/5/13</a:t>
+              <a:t>2026/5/14</a:t>
             </a:fld>
             <a:endParaRPr kumimoji="1" lang="ja-JP" altLang="en-US"/>
           </a:p>
@@ -2667,7 +2668,7 @@
           <a:p>
             <a:fld id="{716789AD-CAC3-AD41-B5C9-BF5C62A1889D}" type="datetimeFigureOut">
               <a:rPr kumimoji="1" lang="ja-JP" altLang="en-US" smtClean="0"/>
-              <a:t>2026/5/13</a:t>
+              <a:t>2026/5/14</a:t>
             </a:fld>
             <a:endParaRPr kumimoji="1" lang="ja-JP" altLang="en-US"/>
           </a:p>
@@ -2780,7 +2781,7 @@
           <a:p>
             <a:fld id="{716789AD-CAC3-AD41-B5C9-BF5C62A1889D}" type="datetimeFigureOut">
               <a:rPr kumimoji="1" lang="ja-JP" altLang="en-US" smtClean="0"/>
-              <a:t>2026/5/13</a:t>
+              <a:t>2026/5/14</a:t>
             </a:fld>
             <a:endParaRPr kumimoji="1" lang="ja-JP" altLang="en-US"/>
           </a:p>
@@ -3123,7 +3124,7 @@
           <a:p>
             <a:fld id="{716789AD-CAC3-AD41-B5C9-BF5C62A1889D}" type="datetimeFigureOut">
               <a:rPr kumimoji="1" lang="ja-JP" altLang="en-US" smtClean="0"/>
-              <a:t>2026/5/13</a:t>
+              <a:t>2026/5/14</a:t>
             </a:fld>
             <a:endParaRPr kumimoji="1" lang="ja-JP" altLang="en-US"/>
           </a:p>
@@ -3411,7 +3412,7 @@
           <a:p>
             <a:fld id="{716789AD-CAC3-AD41-B5C9-BF5C62A1889D}" type="datetimeFigureOut">
               <a:rPr kumimoji="1" lang="ja-JP" altLang="en-US" smtClean="0"/>
-              <a:t>2026/5/13</a:t>
+              <a:t>2026/5/14</a:t>
             </a:fld>
             <a:endParaRPr kumimoji="1" lang="ja-JP" altLang="en-US"/>
           </a:p>
@@ -3684,7 +3685,7 @@
           <a:p>
             <a:fld id="{716789AD-CAC3-AD41-B5C9-BF5C62A1889D}" type="datetimeFigureOut">
               <a:rPr kumimoji="1" lang="ja-JP" altLang="en-US" smtClean="0"/>
-              <a:t>2026/5/13</a:t>
+              <a:t>2026/5/14</a:t>
             </a:fld>
             <a:endParaRPr kumimoji="1" lang="ja-JP" altLang="en-US"/>
           </a:p>
@@ -4289,7 +4290,7 @@
               <a:rPr lang="ja-JP" altLang="en-US" sz="2400"/>
               <a:t>国立情報学研究所</a:t>
             </a:r>
-            <a:endParaRPr lang="en-US" altLang="ja-JP" sz="2400"/>
+            <a:endParaRPr lang="en-US" altLang="ja-JP" sz="2400" dirty="0"/>
           </a:p>
           <a:p>
             <a:pPr algn="ctr"/>
@@ -4414,1859 +4415,6 @@
 </file>
 
 <file path=ppt/slides/slide10.xml><?xml version="1.0" encoding="utf-8"?>
-<p:sld xmlns:a="http://schemas.openxmlformats.org/drawingml/2006/main" xmlns:r="http://schemas.openxmlformats.org/officeDocument/2006/relationships" xmlns:p="http://schemas.openxmlformats.org/presentationml/2006/main">
-  <p:cSld>
-    <p:spTree>
-      <p:nvGrpSpPr>
-        <p:cNvPr id="1" name="">
-          <a:extLst>
-            <a:ext uri="{FF2B5EF4-FFF2-40B4-BE49-F238E27FC236}">
-              <a16:creationId xmlns:a16="http://schemas.microsoft.com/office/drawing/2014/main" id="{9B9A69AA-1FF6-E35B-D5AD-EF3CD814455F}"/>
-            </a:ext>
-          </a:extLst>
-        </p:cNvPr>
-        <p:cNvGrpSpPr/>
-        <p:nvPr/>
-      </p:nvGrpSpPr>
-      <p:grpSpPr>
-        <a:xfrm>
-          <a:off x="0" y="0"/>
-          <a:ext cx="0" cy="0"/>
-          <a:chOff x="0" y="0"/>
-          <a:chExt cx="0" cy="0"/>
-        </a:xfrm>
-      </p:grpSpPr>
-      <p:sp>
-        <p:nvSpPr>
-          <p:cNvPr id="2" name="タイトル 1">
-            <a:extLst>
-              <a:ext uri="{FF2B5EF4-FFF2-40B4-BE49-F238E27FC236}">
-                <a16:creationId xmlns:a16="http://schemas.microsoft.com/office/drawing/2014/main" id="{29D666D7-9F06-2E12-DB10-5A1262FC6390}"/>
-              </a:ext>
-            </a:extLst>
-          </p:cNvPr>
-          <p:cNvSpPr>
-            <a:spLocks noGrp="1"/>
-          </p:cNvSpPr>
-          <p:nvPr>
-            <p:ph type="title"/>
-          </p:nvPr>
-        </p:nvSpPr>
-        <p:spPr>
-          <a:xfrm>
-            <a:off x="0" y="1"/>
-            <a:ext cx="12192000" cy="577516"/>
-          </a:xfrm>
-          <a:solidFill>
-            <a:schemeClr val="bg1">
-              <a:lumMod val="85000"/>
-            </a:schemeClr>
-          </a:solidFill>
-        </p:spPr>
-        <p:txBody>
-          <a:bodyPr>
-            <a:normAutofit fontScale="90000"/>
-          </a:bodyPr>
-          <a:lstStyle/>
-          <a:p>
-            <a:r>
-              <a:rPr kumimoji="1" lang="ja-JP" altLang="en-US" sz="3600"/>
-              <a:t>マテリアル・方法（概要）</a:t>
-            </a:r>
-          </a:p>
-        </p:txBody>
-      </p:sp>
-      <p:sp>
-        <p:nvSpPr>
-          <p:cNvPr id="3" name="テキスト ボックス 2">
-            <a:extLst>
-              <a:ext uri="{FF2B5EF4-FFF2-40B4-BE49-F238E27FC236}">
-                <a16:creationId xmlns:a16="http://schemas.microsoft.com/office/drawing/2014/main" id="{6BB50100-A622-8930-2A37-AA9F2F67F023}"/>
-              </a:ext>
-            </a:extLst>
-          </p:cNvPr>
-          <p:cNvSpPr txBox="1"/>
-          <p:nvPr/>
-        </p:nvSpPr>
-        <p:spPr>
-          <a:xfrm>
-            <a:off x="2264575" y="708325"/>
-            <a:ext cx="1364476" cy="369332"/>
-          </a:xfrm>
-          <a:prstGeom prst="rect">
-            <a:avLst/>
-          </a:prstGeom>
-          <a:noFill/>
-          <a:ln>
-            <a:solidFill>
-              <a:schemeClr val="tx1"/>
-            </a:solidFill>
-          </a:ln>
-        </p:spPr>
-        <p:txBody>
-          <a:bodyPr wrap="none" rtlCol="0" anchor="ctr">
-            <a:spAutoFit/>
-          </a:bodyPr>
-          <a:lstStyle/>
-          <a:p>
-            <a:r>
-              <a:rPr kumimoji="1" lang="en-US" altLang="ja-JP" dirty="0"/>
-              <a:t>KAKEN DB</a:t>
-            </a:r>
-            <a:endParaRPr kumimoji="1" lang="ja-JP" altLang="en-US"/>
-          </a:p>
-        </p:txBody>
-      </p:sp>
-      <p:sp>
-        <p:nvSpPr>
-          <p:cNvPr id="4" name="テキスト ボックス 3">
-            <a:extLst>
-              <a:ext uri="{FF2B5EF4-FFF2-40B4-BE49-F238E27FC236}">
-                <a16:creationId xmlns:a16="http://schemas.microsoft.com/office/drawing/2014/main" id="{50B5646A-820F-E60C-8230-4D0E4A410F3A}"/>
-              </a:ext>
-            </a:extLst>
-          </p:cNvPr>
-          <p:cNvSpPr txBox="1"/>
-          <p:nvPr/>
-        </p:nvSpPr>
-        <p:spPr>
-          <a:xfrm>
-            <a:off x="1931151" y="1440873"/>
-            <a:ext cx="2031325" cy="369332"/>
-          </a:xfrm>
-          <a:prstGeom prst="rect">
-            <a:avLst/>
-          </a:prstGeom>
-          <a:noFill/>
-          <a:ln>
-            <a:solidFill>
-              <a:schemeClr val="tx1"/>
-            </a:solidFill>
-          </a:ln>
-        </p:spPr>
-        <p:txBody>
-          <a:bodyPr wrap="none" rtlCol="0" anchor="ctr">
-            <a:spAutoFit/>
-          </a:bodyPr>
-          <a:lstStyle/>
-          <a:p>
-            <a:r>
-              <a:rPr lang="ja-JP" altLang="en-US"/>
-              <a:t>国立大学の報告書</a:t>
-            </a:r>
-            <a:endParaRPr lang="en-US" altLang="ja-JP" dirty="0"/>
-          </a:p>
-        </p:txBody>
-      </p:sp>
-      <p:sp>
-        <p:nvSpPr>
-          <p:cNvPr id="6" name="テキスト ボックス 5">
-            <a:extLst>
-              <a:ext uri="{FF2B5EF4-FFF2-40B4-BE49-F238E27FC236}">
-                <a16:creationId xmlns:a16="http://schemas.microsoft.com/office/drawing/2014/main" id="{4AAEC8DF-7497-1AA4-07B3-498D72BB2882}"/>
-              </a:ext>
-            </a:extLst>
-          </p:cNvPr>
-          <p:cNvSpPr txBox="1"/>
-          <p:nvPr/>
-        </p:nvSpPr>
-        <p:spPr>
-          <a:xfrm>
-            <a:off x="3103267" y="1763449"/>
-            <a:ext cx="1199367" cy="369332"/>
-          </a:xfrm>
-          <a:prstGeom prst="rect">
-            <a:avLst/>
-          </a:prstGeom>
-          <a:noFill/>
-        </p:spPr>
-        <p:txBody>
-          <a:bodyPr wrap="none" rtlCol="0">
-            <a:spAutoFit/>
-          </a:bodyPr>
-          <a:lstStyle/>
-          <a:p>
-            <a:r>
-              <a:rPr kumimoji="1" lang="ja-JP" altLang="en-US"/>
-              <a:t>大学数</a:t>
-            </a:r>
-            <a:r>
-              <a:rPr kumimoji="1" lang="en-US" altLang="ja-JP" dirty="0"/>
-              <a:t>:89</a:t>
-            </a:r>
-            <a:endParaRPr kumimoji="1" lang="ja-JP" altLang="en-US"/>
-          </a:p>
-        </p:txBody>
-      </p:sp>
-      <p:sp>
-        <p:nvSpPr>
-          <p:cNvPr id="7" name="テキスト ボックス 6">
-            <a:extLst>
-              <a:ext uri="{FF2B5EF4-FFF2-40B4-BE49-F238E27FC236}">
-                <a16:creationId xmlns:a16="http://schemas.microsoft.com/office/drawing/2014/main" id="{8E09B076-FFAF-2715-DBD3-50DFFF469A70}"/>
-              </a:ext>
-            </a:extLst>
-          </p:cNvPr>
-          <p:cNvSpPr txBox="1"/>
-          <p:nvPr/>
-        </p:nvSpPr>
-        <p:spPr>
-          <a:xfrm>
-            <a:off x="2559528" y="2173421"/>
-            <a:ext cx="774571" cy="369332"/>
-          </a:xfrm>
-          <a:prstGeom prst="rect">
-            <a:avLst/>
-          </a:prstGeom>
-          <a:noFill/>
-          <a:ln>
-            <a:solidFill>
-              <a:schemeClr val="tx1"/>
-            </a:solidFill>
-          </a:ln>
-        </p:spPr>
-        <p:txBody>
-          <a:bodyPr wrap="none" rtlCol="0" anchor="ctr">
-            <a:spAutoFit/>
-          </a:bodyPr>
-          <a:lstStyle/>
-          <a:p>
-            <a:r>
-              <a:rPr lang="en-US" altLang="ja-JP" dirty="0"/>
-              <a:t>4</a:t>
-            </a:r>
-            <a:r>
-              <a:rPr lang="ja-JP" altLang="en-US"/>
-              <a:t>大学</a:t>
-            </a:r>
-            <a:endParaRPr lang="en-US" altLang="ja-JP" dirty="0"/>
-          </a:p>
-        </p:txBody>
-      </p:sp>
-      <p:sp>
-        <p:nvSpPr>
-          <p:cNvPr id="8" name="テキスト ボックス 7">
-            <a:extLst>
-              <a:ext uri="{FF2B5EF4-FFF2-40B4-BE49-F238E27FC236}">
-                <a16:creationId xmlns:a16="http://schemas.microsoft.com/office/drawing/2014/main" id="{7860D382-58A5-C995-8FE8-E78F8C1B6F65}"/>
-              </a:ext>
-            </a:extLst>
-          </p:cNvPr>
-          <p:cNvSpPr txBox="1"/>
-          <p:nvPr/>
-        </p:nvSpPr>
-        <p:spPr>
-          <a:xfrm>
-            <a:off x="1936761" y="2905969"/>
-            <a:ext cx="2020105" cy="369332"/>
-          </a:xfrm>
-          <a:prstGeom prst="rect">
-            <a:avLst/>
-          </a:prstGeom>
-          <a:noFill/>
-          <a:ln>
-            <a:solidFill>
-              <a:schemeClr val="tx1"/>
-            </a:solidFill>
-          </a:ln>
-        </p:spPr>
-        <p:txBody>
-          <a:bodyPr wrap="none" rtlCol="0" anchor="ctr">
-            <a:spAutoFit/>
-          </a:bodyPr>
-          <a:lstStyle/>
-          <a:p>
-            <a:r>
-              <a:rPr lang="en-US" altLang="ja-JP" dirty="0"/>
-              <a:t>4</a:t>
-            </a:r>
-            <a:r>
-              <a:rPr lang="ja-JP" altLang="en-US"/>
-              <a:t>大学</a:t>
-            </a:r>
-            <a:r>
-              <a:rPr lang="en-US" altLang="ja-JP" dirty="0"/>
-              <a:t> </a:t>
-            </a:r>
-            <a:r>
-              <a:rPr lang="ja-JP" altLang="en-US"/>
-              <a:t>各</a:t>
-            </a:r>
-            <a:r>
-              <a:rPr lang="en-US" altLang="ja-JP" dirty="0"/>
-              <a:t>50</a:t>
-            </a:r>
-            <a:r>
-              <a:rPr lang="ja-JP" altLang="en-US"/>
-              <a:t>報告書</a:t>
-            </a:r>
-            <a:endParaRPr lang="en-US" altLang="ja-JP" dirty="0"/>
-          </a:p>
-        </p:txBody>
-      </p:sp>
-      <p:sp>
-        <p:nvSpPr>
-          <p:cNvPr id="9" name="テキスト ボックス 8">
-            <a:extLst>
-              <a:ext uri="{FF2B5EF4-FFF2-40B4-BE49-F238E27FC236}">
-                <a16:creationId xmlns:a16="http://schemas.microsoft.com/office/drawing/2014/main" id="{F89577F0-2089-00FE-EA03-21ED65B32693}"/>
-              </a:ext>
-            </a:extLst>
-          </p:cNvPr>
-          <p:cNvSpPr txBox="1"/>
-          <p:nvPr/>
-        </p:nvSpPr>
-        <p:spPr>
-          <a:xfrm>
-            <a:off x="892405" y="3638517"/>
-            <a:ext cx="4108817" cy="369332"/>
-          </a:xfrm>
-          <a:prstGeom prst="rect">
-            <a:avLst/>
-          </a:prstGeom>
-          <a:noFill/>
-          <a:ln>
-            <a:solidFill>
-              <a:schemeClr val="tx1"/>
-            </a:solidFill>
-          </a:ln>
-        </p:spPr>
-        <p:txBody>
-          <a:bodyPr wrap="none" rtlCol="0" anchor="ctr">
-            <a:spAutoFit/>
-          </a:bodyPr>
-          <a:lstStyle/>
-          <a:p>
-            <a:r>
-              <a:rPr lang="ja-JP" altLang="en-US" dirty="0"/>
-              <a:t>研究課題名・本文からの地名抽出結果</a:t>
-            </a:r>
-            <a:endParaRPr lang="en-US" altLang="ja-JP" dirty="0"/>
-          </a:p>
-        </p:txBody>
-      </p:sp>
-      <p:sp>
-        <p:nvSpPr>
-          <p:cNvPr id="10" name="テキスト ボックス 9">
-            <a:extLst>
-              <a:ext uri="{FF2B5EF4-FFF2-40B4-BE49-F238E27FC236}">
-                <a16:creationId xmlns:a16="http://schemas.microsoft.com/office/drawing/2014/main" id="{32B48DCF-93FC-2971-C8C3-F07C62E80660}"/>
-              </a:ext>
-            </a:extLst>
-          </p:cNvPr>
-          <p:cNvSpPr txBox="1"/>
-          <p:nvPr/>
-        </p:nvSpPr>
-        <p:spPr>
-          <a:xfrm>
-            <a:off x="784202" y="4371065"/>
-            <a:ext cx="4325223" cy="369332"/>
-          </a:xfrm>
-          <a:prstGeom prst="rect">
-            <a:avLst/>
-          </a:prstGeom>
-          <a:noFill/>
-          <a:ln>
-            <a:solidFill>
-              <a:schemeClr val="tx1"/>
-            </a:solidFill>
-          </a:ln>
-        </p:spPr>
-        <p:txBody>
-          <a:bodyPr wrap="none" rtlCol="0" anchor="ctr">
-            <a:spAutoFit/>
-          </a:bodyPr>
-          <a:lstStyle/>
-          <a:p>
-            <a:r>
-              <a:rPr lang="en-US" altLang="ja-JP" dirty="0"/>
-              <a:t>AI</a:t>
-            </a:r>
-            <a:r>
-              <a:rPr lang="ja-JP" altLang="en-US" dirty="0"/>
-              <a:t>、人による地名抽出に対する判定結果</a:t>
-            </a:r>
-            <a:endParaRPr lang="en-US" altLang="ja-JP" dirty="0"/>
-          </a:p>
-        </p:txBody>
-      </p:sp>
-      <p:sp>
-        <p:nvSpPr>
-          <p:cNvPr id="12" name="テキスト ボックス 11">
-            <a:extLst>
-              <a:ext uri="{FF2B5EF4-FFF2-40B4-BE49-F238E27FC236}">
-                <a16:creationId xmlns:a16="http://schemas.microsoft.com/office/drawing/2014/main" id="{E1C3C056-DB92-8A69-40B4-0B7693A57EB5}"/>
-              </a:ext>
-            </a:extLst>
-          </p:cNvPr>
-          <p:cNvSpPr txBox="1"/>
-          <p:nvPr/>
-        </p:nvSpPr>
-        <p:spPr>
-          <a:xfrm>
-            <a:off x="3103267" y="3213854"/>
-            <a:ext cx="1624163" cy="369332"/>
-          </a:xfrm>
-          <a:prstGeom prst="rect">
-            <a:avLst/>
-          </a:prstGeom>
-          <a:noFill/>
-        </p:spPr>
-        <p:txBody>
-          <a:bodyPr wrap="none" rtlCol="0">
-            <a:spAutoFit/>
-          </a:bodyPr>
-          <a:lstStyle/>
-          <a:p>
-            <a:r>
-              <a:rPr lang="ja-JP" altLang="en-US"/>
-              <a:t>報告書数</a:t>
-            </a:r>
-            <a:r>
-              <a:rPr lang="en-US" altLang="ja-JP" dirty="0"/>
-              <a:t>:</a:t>
-            </a:r>
-            <a:r>
-              <a:rPr kumimoji="1" lang="en-US" altLang="ja-JP" dirty="0"/>
-              <a:t>200 </a:t>
-            </a:r>
-            <a:endParaRPr kumimoji="1" lang="ja-JP" altLang="en-US"/>
-          </a:p>
-        </p:txBody>
-      </p:sp>
-      <p:sp>
-        <p:nvSpPr>
-          <p:cNvPr id="13" name="テキスト ボックス 12">
-            <a:extLst>
-              <a:ext uri="{FF2B5EF4-FFF2-40B4-BE49-F238E27FC236}">
-                <a16:creationId xmlns:a16="http://schemas.microsoft.com/office/drawing/2014/main" id="{69A38594-91FB-000C-4611-09AD2E102CDF}"/>
-              </a:ext>
-            </a:extLst>
-          </p:cNvPr>
-          <p:cNvSpPr txBox="1"/>
-          <p:nvPr/>
-        </p:nvSpPr>
-        <p:spPr>
-          <a:xfrm>
-            <a:off x="1167319" y="5103613"/>
-            <a:ext cx="3558988" cy="369332"/>
-          </a:xfrm>
-          <a:prstGeom prst="rect">
-            <a:avLst/>
-          </a:prstGeom>
-          <a:noFill/>
-          <a:ln>
-            <a:solidFill>
-              <a:schemeClr val="tx1"/>
-            </a:solidFill>
-          </a:ln>
-        </p:spPr>
-        <p:txBody>
-          <a:bodyPr wrap="none" rtlCol="0">
-            <a:spAutoFit/>
-          </a:bodyPr>
-          <a:lstStyle/>
-          <a:p>
-            <a:r>
-              <a:rPr lang="en-US" altLang="ja-JP" dirty="0"/>
-              <a:t>2 AI</a:t>
-            </a:r>
-            <a:r>
-              <a:rPr lang="ja-JP" altLang="en-US" dirty="0"/>
-              <a:t>、</a:t>
-            </a:r>
-            <a:r>
-              <a:rPr lang="en-US" altLang="ja-JP" dirty="0"/>
-              <a:t>3 </a:t>
-            </a:r>
-            <a:r>
-              <a:rPr lang="ja-JP" altLang="en-US" dirty="0"/>
-              <a:t>名による</a:t>
-            </a:r>
-            <a:r>
-              <a:rPr lang="ja-JP" altLang="en-US"/>
-              <a:t>判定結果の選抜</a:t>
-            </a:r>
-            <a:endParaRPr lang="en-US" altLang="ja-JP" dirty="0"/>
-          </a:p>
-        </p:txBody>
-      </p:sp>
-      <p:sp>
-        <p:nvSpPr>
-          <p:cNvPr id="17" name="テキスト ボックス 16">
-            <a:extLst>
-              <a:ext uri="{FF2B5EF4-FFF2-40B4-BE49-F238E27FC236}">
-                <a16:creationId xmlns:a16="http://schemas.microsoft.com/office/drawing/2014/main" id="{0DB18FA9-66C9-A4BF-0B34-3A705D79ED9C}"/>
-              </a:ext>
-            </a:extLst>
-          </p:cNvPr>
-          <p:cNvSpPr txBox="1"/>
-          <p:nvPr/>
-        </p:nvSpPr>
-        <p:spPr>
-          <a:xfrm>
-            <a:off x="3103267" y="4689583"/>
-            <a:ext cx="2175596" cy="369332"/>
-          </a:xfrm>
-          <a:prstGeom prst="rect">
-            <a:avLst/>
-          </a:prstGeom>
-          <a:noFill/>
-        </p:spPr>
-        <p:txBody>
-          <a:bodyPr wrap="none" rtlCol="0">
-            <a:spAutoFit/>
-          </a:bodyPr>
-          <a:lstStyle/>
-          <a:p>
-            <a:r>
-              <a:rPr kumimoji="1" lang="en-US" altLang="ja-JP" dirty="0"/>
-              <a:t>n=1200 </a:t>
-            </a:r>
-            <a:r>
-              <a:rPr kumimoji="1" lang="ja-JP" altLang="en-US" dirty="0"/>
-              <a:t>→</a:t>
-            </a:r>
-            <a:r>
-              <a:rPr kumimoji="1" lang="en-US" altLang="ja-JP" dirty="0"/>
-              <a:t> n=1000</a:t>
-            </a:r>
-            <a:endParaRPr kumimoji="1" lang="ja-JP" altLang="en-US"/>
-          </a:p>
-        </p:txBody>
-      </p:sp>
-      <p:sp>
-        <p:nvSpPr>
-          <p:cNvPr id="18" name="テキスト ボックス 17">
-            <a:extLst>
-              <a:ext uri="{FF2B5EF4-FFF2-40B4-BE49-F238E27FC236}">
-                <a16:creationId xmlns:a16="http://schemas.microsoft.com/office/drawing/2014/main" id="{DC038396-2409-3E57-A5A4-ADDB31A3F81E}"/>
-              </a:ext>
-            </a:extLst>
-          </p:cNvPr>
-          <p:cNvSpPr txBox="1"/>
-          <p:nvPr/>
-        </p:nvSpPr>
-        <p:spPr>
-          <a:xfrm>
-            <a:off x="3103266" y="5422131"/>
-            <a:ext cx="870751" cy="369332"/>
-          </a:xfrm>
-          <a:prstGeom prst="rect">
-            <a:avLst/>
-          </a:prstGeom>
-          <a:noFill/>
-        </p:spPr>
-        <p:txBody>
-          <a:bodyPr wrap="none" rtlCol="0">
-            <a:spAutoFit/>
-          </a:bodyPr>
-          <a:lstStyle/>
-          <a:p>
-            <a:r>
-              <a:rPr kumimoji="1" lang="en-US" altLang="ja-JP" dirty="0"/>
-              <a:t>n=495</a:t>
-            </a:r>
-          </a:p>
-        </p:txBody>
-      </p:sp>
-      <p:sp>
-        <p:nvSpPr>
-          <p:cNvPr id="19" name="テキスト ボックス 18">
-            <a:extLst>
-              <a:ext uri="{FF2B5EF4-FFF2-40B4-BE49-F238E27FC236}">
-                <a16:creationId xmlns:a16="http://schemas.microsoft.com/office/drawing/2014/main" id="{789180A8-A51B-BD41-8770-60FBEF30712F}"/>
-              </a:ext>
-            </a:extLst>
-          </p:cNvPr>
-          <p:cNvSpPr txBox="1"/>
-          <p:nvPr/>
-        </p:nvSpPr>
-        <p:spPr>
-          <a:xfrm>
-            <a:off x="2946813" y="5678743"/>
-            <a:ext cx="3982180" cy="369332"/>
-          </a:xfrm>
-          <a:prstGeom prst="rect">
-            <a:avLst/>
-          </a:prstGeom>
-          <a:noFill/>
-        </p:spPr>
-        <p:txBody>
-          <a:bodyPr wrap="none" rtlCol="0">
-            <a:spAutoFit/>
-          </a:bodyPr>
-          <a:lstStyle/>
-          <a:p>
-            <a:r>
-              <a:rPr lang="ja-JP" altLang="en-US"/>
-              <a:t>（</a:t>
-            </a:r>
-            <a:r>
-              <a:rPr lang="en-US" altLang="ja-JP" dirty="0"/>
-              <a:t>99</a:t>
-            </a:r>
-            <a:r>
-              <a:rPr lang="ja-JP" altLang="en-US"/>
-              <a:t>報告書</a:t>
-            </a:r>
-            <a:r>
-              <a:rPr lang="en-US" altLang="ja-JP" dirty="0"/>
-              <a:t>(</a:t>
-            </a:r>
-            <a:r>
-              <a:rPr lang="ja-JP" altLang="en-US"/>
-              <a:t>判定箇所</a:t>
-            </a:r>
-            <a:r>
-              <a:rPr lang="en-US" altLang="ja-JP" dirty="0"/>
-              <a:t>:415) x 5</a:t>
-            </a:r>
-            <a:r>
-              <a:rPr lang="ja-JP" altLang="en-US"/>
-              <a:t>判定）</a:t>
-            </a:r>
-            <a:endParaRPr kumimoji="1" lang="en-US" altLang="ja-JP" dirty="0"/>
-          </a:p>
-        </p:txBody>
-      </p:sp>
-      <p:cxnSp>
-        <p:nvCxnSpPr>
-          <p:cNvPr id="21" name="直線コネクタ 20">
-            <a:extLst>
-              <a:ext uri="{FF2B5EF4-FFF2-40B4-BE49-F238E27FC236}">
-                <a16:creationId xmlns:a16="http://schemas.microsoft.com/office/drawing/2014/main" id="{30156B95-4ECD-9152-E110-735989CE0A84}"/>
-              </a:ext>
-            </a:extLst>
-          </p:cNvPr>
-          <p:cNvCxnSpPr>
-            <a:stCxn id="3" idx="2"/>
-            <a:endCxn id="4" idx="0"/>
-          </p:cNvCxnSpPr>
-          <p:nvPr/>
-        </p:nvCxnSpPr>
-        <p:spPr>
-          <a:xfrm>
-            <a:off x="2946813" y="1077657"/>
-            <a:ext cx="1" cy="363216"/>
-          </a:xfrm>
-          <a:prstGeom prst="line">
-            <a:avLst/>
-          </a:prstGeom>
-        </p:spPr>
-        <p:style>
-          <a:lnRef idx="2">
-            <a:schemeClr val="dk1"/>
-          </a:lnRef>
-          <a:fillRef idx="0">
-            <a:schemeClr val="dk1"/>
-          </a:fillRef>
-          <a:effectRef idx="1">
-            <a:schemeClr val="dk1"/>
-          </a:effectRef>
-          <a:fontRef idx="minor">
-            <a:schemeClr val="tx1"/>
-          </a:fontRef>
-        </p:style>
-      </p:cxnSp>
-      <p:cxnSp>
-        <p:nvCxnSpPr>
-          <p:cNvPr id="23" name="直線コネクタ 22">
-            <a:extLst>
-              <a:ext uri="{FF2B5EF4-FFF2-40B4-BE49-F238E27FC236}">
-                <a16:creationId xmlns:a16="http://schemas.microsoft.com/office/drawing/2014/main" id="{56F3E1CC-92BA-CA38-599C-064D6BA98C5D}"/>
-              </a:ext>
-            </a:extLst>
-          </p:cNvPr>
-          <p:cNvCxnSpPr>
-            <a:stCxn id="4" idx="2"/>
-            <a:endCxn id="7" idx="0"/>
-          </p:cNvCxnSpPr>
-          <p:nvPr/>
-        </p:nvCxnSpPr>
-        <p:spPr>
-          <a:xfrm>
-            <a:off x="2946814" y="1810205"/>
-            <a:ext cx="0" cy="363216"/>
-          </a:xfrm>
-          <a:prstGeom prst="line">
-            <a:avLst/>
-          </a:prstGeom>
-        </p:spPr>
-        <p:style>
-          <a:lnRef idx="2">
-            <a:schemeClr val="dk1"/>
-          </a:lnRef>
-          <a:fillRef idx="0">
-            <a:schemeClr val="dk1"/>
-          </a:fillRef>
-          <a:effectRef idx="1">
-            <a:schemeClr val="dk1"/>
-          </a:effectRef>
-          <a:fontRef idx="minor">
-            <a:schemeClr val="tx1"/>
-          </a:fontRef>
-        </p:style>
-      </p:cxnSp>
-      <p:cxnSp>
-        <p:nvCxnSpPr>
-          <p:cNvPr id="25" name="直線コネクタ 24">
-            <a:extLst>
-              <a:ext uri="{FF2B5EF4-FFF2-40B4-BE49-F238E27FC236}">
-                <a16:creationId xmlns:a16="http://schemas.microsoft.com/office/drawing/2014/main" id="{49002F55-4D49-BD09-DBCE-6BB2C828947F}"/>
-              </a:ext>
-            </a:extLst>
-          </p:cNvPr>
-          <p:cNvCxnSpPr>
-            <a:stCxn id="7" idx="2"/>
-            <a:endCxn id="8" idx="0"/>
-          </p:cNvCxnSpPr>
-          <p:nvPr/>
-        </p:nvCxnSpPr>
-        <p:spPr>
-          <a:xfrm>
-            <a:off x="2946814" y="2542753"/>
-            <a:ext cx="0" cy="363216"/>
-          </a:xfrm>
-          <a:prstGeom prst="line">
-            <a:avLst/>
-          </a:prstGeom>
-        </p:spPr>
-        <p:style>
-          <a:lnRef idx="2">
-            <a:schemeClr val="dk1"/>
-          </a:lnRef>
-          <a:fillRef idx="0">
-            <a:schemeClr val="dk1"/>
-          </a:fillRef>
-          <a:effectRef idx="1">
-            <a:schemeClr val="dk1"/>
-          </a:effectRef>
-          <a:fontRef idx="minor">
-            <a:schemeClr val="tx1"/>
-          </a:fontRef>
-        </p:style>
-      </p:cxnSp>
-      <p:cxnSp>
-        <p:nvCxnSpPr>
-          <p:cNvPr id="26" name="直線コネクタ 25">
-            <a:extLst>
-              <a:ext uri="{FF2B5EF4-FFF2-40B4-BE49-F238E27FC236}">
-                <a16:creationId xmlns:a16="http://schemas.microsoft.com/office/drawing/2014/main" id="{A3FB6594-FF6C-A8BC-C53A-719D46560A30}"/>
-              </a:ext>
-            </a:extLst>
-          </p:cNvPr>
-          <p:cNvCxnSpPr>
-            <a:cxnSpLocks/>
-            <a:stCxn id="8" idx="2"/>
-            <a:endCxn id="9" idx="0"/>
-          </p:cNvCxnSpPr>
-          <p:nvPr/>
-        </p:nvCxnSpPr>
-        <p:spPr>
-          <a:xfrm>
-            <a:off x="2946814" y="3275301"/>
-            <a:ext cx="0" cy="363216"/>
-          </a:xfrm>
-          <a:prstGeom prst="line">
-            <a:avLst/>
-          </a:prstGeom>
-        </p:spPr>
-        <p:style>
-          <a:lnRef idx="2">
-            <a:schemeClr val="dk1"/>
-          </a:lnRef>
-          <a:fillRef idx="0">
-            <a:schemeClr val="dk1"/>
-          </a:fillRef>
-          <a:effectRef idx="1">
-            <a:schemeClr val="dk1"/>
-          </a:effectRef>
-          <a:fontRef idx="minor">
-            <a:schemeClr val="tx1"/>
-          </a:fontRef>
-        </p:style>
-      </p:cxnSp>
-      <p:cxnSp>
-        <p:nvCxnSpPr>
-          <p:cNvPr id="29" name="直線コネクタ 28">
-            <a:extLst>
-              <a:ext uri="{FF2B5EF4-FFF2-40B4-BE49-F238E27FC236}">
-                <a16:creationId xmlns:a16="http://schemas.microsoft.com/office/drawing/2014/main" id="{80A92EC8-4485-8E05-D2FF-4ACB6682DD13}"/>
-              </a:ext>
-            </a:extLst>
-          </p:cNvPr>
-          <p:cNvCxnSpPr>
-            <a:cxnSpLocks/>
-            <a:stCxn id="9" idx="2"/>
-            <a:endCxn id="10" idx="0"/>
-          </p:cNvCxnSpPr>
-          <p:nvPr/>
-        </p:nvCxnSpPr>
-        <p:spPr>
-          <a:xfrm>
-            <a:off x="2946814" y="4007849"/>
-            <a:ext cx="0" cy="363216"/>
-          </a:xfrm>
-          <a:prstGeom prst="line">
-            <a:avLst/>
-          </a:prstGeom>
-        </p:spPr>
-        <p:style>
-          <a:lnRef idx="2">
-            <a:schemeClr val="dk1"/>
-          </a:lnRef>
-          <a:fillRef idx="0">
-            <a:schemeClr val="dk1"/>
-          </a:fillRef>
-          <a:effectRef idx="1">
-            <a:schemeClr val="dk1"/>
-          </a:effectRef>
-          <a:fontRef idx="minor">
-            <a:schemeClr val="tx1"/>
-          </a:fontRef>
-        </p:style>
-      </p:cxnSp>
-      <p:cxnSp>
-        <p:nvCxnSpPr>
-          <p:cNvPr id="32" name="直線コネクタ 31">
-            <a:extLst>
-              <a:ext uri="{FF2B5EF4-FFF2-40B4-BE49-F238E27FC236}">
-                <a16:creationId xmlns:a16="http://schemas.microsoft.com/office/drawing/2014/main" id="{D1C9201D-8E52-69F1-829D-A5264D734145}"/>
-              </a:ext>
-            </a:extLst>
-          </p:cNvPr>
-          <p:cNvCxnSpPr>
-            <a:cxnSpLocks/>
-            <a:stCxn id="10" idx="2"/>
-            <a:endCxn id="13" idx="0"/>
-          </p:cNvCxnSpPr>
-          <p:nvPr/>
-        </p:nvCxnSpPr>
-        <p:spPr>
-          <a:xfrm flipH="1">
-            <a:off x="2946813" y="4740397"/>
-            <a:ext cx="1" cy="363216"/>
-          </a:xfrm>
-          <a:prstGeom prst="line">
-            <a:avLst/>
-          </a:prstGeom>
-        </p:spPr>
-        <p:style>
-          <a:lnRef idx="2">
-            <a:schemeClr val="dk1"/>
-          </a:lnRef>
-          <a:fillRef idx="0">
-            <a:schemeClr val="dk1"/>
-          </a:fillRef>
-          <a:effectRef idx="1">
-            <a:schemeClr val="dk1"/>
-          </a:effectRef>
-          <a:fontRef idx="minor">
-            <a:schemeClr val="tx1"/>
-          </a:fontRef>
-        </p:style>
-      </p:cxnSp>
-      <p:sp>
-        <p:nvSpPr>
-          <p:cNvPr id="35" name="テキスト ボックス 34">
-            <a:extLst>
-              <a:ext uri="{FF2B5EF4-FFF2-40B4-BE49-F238E27FC236}">
-                <a16:creationId xmlns:a16="http://schemas.microsoft.com/office/drawing/2014/main" id="{29C9CE49-B4EE-88F2-97BF-161E83E4CD9C}"/>
-              </a:ext>
-            </a:extLst>
-          </p:cNvPr>
-          <p:cNvSpPr txBox="1"/>
-          <p:nvPr/>
-        </p:nvSpPr>
-        <p:spPr>
-          <a:xfrm>
-            <a:off x="1301492" y="1868756"/>
-            <a:ext cx="1723549" cy="276999"/>
-          </a:xfrm>
-          <a:prstGeom prst="rect">
-            <a:avLst/>
-          </a:prstGeom>
-          <a:noFill/>
-        </p:spPr>
-        <p:txBody>
-          <a:bodyPr wrap="none" rtlCol="0">
-            <a:spAutoFit/>
-          </a:bodyPr>
-          <a:lstStyle/>
-          <a:p>
-            <a:r>
-              <a:rPr kumimoji="1" lang="ja-JP" altLang="en-US" sz="1200"/>
-              <a:t>ランダムサンプリング</a:t>
-            </a:r>
-          </a:p>
-        </p:txBody>
-      </p:sp>
-      <p:sp>
-        <p:nvSpPr>
-          <p:cNvPr id="36" name="テキスト ボックス 35">
-            <a:extLst>
-              <a:ext uri="{FF2B5EF4-FFF2-40B4-BE49-F238E27FC236}">
-                <a16:creationId xmlns:a16="http://schemas.microsoft.com/office/drawing/2014/main" id="{C6B897F6-20E5-015E-DD53-352FFDEF0FBC}"/>
-              </a:ext>
-            </a:extLst>
-          </p:cNvPr>
-          <p:cNvSpPr txBox="1"/>
-          <p:nvPr/>
-        </p:nvSpPr>
-        <p:spPr>
-          <a:xfrm>
-            <a:off x="1301492" y="2582804"/>
-            <a:ext cx="1723549" cy="276999"/>
-          </a:xfrm>
-          <a:prstGeom prst="rect">
-            <a:avLst/>
-          </a:prstGeom>
-          <a:noFill/>
-        </p:spPr>
-        <p:txBody>
-          <a:bodyPr wrap="none" rtlCol="0">
-            <a:spAutoFit/>
-          </a:bodyPr>
-          <a:lstStyle/>
-          <a:p>
-            <a:r>
-              <a:rPr kumimoji="1" lang="ja-JP" altLang="en-US" sz="1200"/>
-              <a:t>ランダムサンプリング</a:t>
-            </a:r>
-          </a:p>
-        </p:txBody>
-      </p:sp>
-      <p:sp>
-        <p:nvSpPr>
-          <p:cNvPr id="37" name="テキスト ボックス 36">
-            <a:extLst>
-              <a:ext uri="{FF2B5EF4-FFF2-40B4-BE49-F238E27FC236}">
-                <a16:creationId xmlns:a16="http://schemas.microsoft.com/office/drawing/2014/main" id="{C123585A-FEBD-F0DA-5D6F-396CDC39E3B3}"/>
-              </a:ext>
-            </a:extLst>
-          </p:cNvPr>
-          <p:cNvSpPr txBox="1"/>
-          <p:nvPr/>
-        </p:nvSpPr>
-        <p:spPr>
-          <a:xfrm>
-            <a:off x="1917045" y="3333852"/>
-            <a:ext cx="1107996" cy="276999"/>
-          </a:xfrm>
-          <a:prstGeom prst="rect">
-            <a:avLst/>
-          </a:prstGeom>
-          <a:noFill/>
-        </p:spPr>
-        <p:txBody>
-          <a:bodyPr wrap="none" rtlCol="0">
-            <a:spAutoFit/>
-          </a:bodyPr>
-          <a:lstStyle/>
-          <a:p>
-            <a:r>
-              <a:rPr lang="ja-JP" altLang="en-US" sz="1200"/>
-              <a:t>固有表現抽出</a:t>
-            </a:r>
-            <a:endParaRPr kumimoji="1" lang="ja-JP" altLang="en-US" sz="1200"/>
-          </a:p>
-        </p:txBody>
-      </p:sp>
-      <p:sp>
-        <p:nvSpPr>
-          <p:cNvPr id="38" name="テキスト ボックス 37">
-            <a:extLst>
-              <a:ext uri="{FF2B5EF4-FFF2-40B4-BE49-F238E27FC236}">
-                <a16:creationId xmlns:a16="http://schemas.microsoft.com/office/drawing/2014/main" id="{B27C02FB-E947-3DBE-BEEB-E6AE50AC33DC}"/>
-              </a:ext>
-            </a:extLst>
-          </p:cNvPr>
-          <p:cNvSpPr txBox="1"/>
-          <p:nvPr/>
-        </p:nvSpPr>
-        <p:spPr>
-          <a:xfrm>
-            <a:off x="1375346" y="4073642"/>
-            <a:ext cx="1619354" cy="276999"/>
-          </a:xfrm>
-          <a:prstGeom prst="rect">
-            <a:avLst/>
-          </a:prstGeom>
-          <a:noFill/>
-        </p:spPr>
-        <p:txBody>
-          <a:bodyPr wrap="none" rtlCol="0">
-            <a:spAutoFit/>
-          </a:bodyPr>
-          <a:lstStyle/>
-          <a:p>
-            <a:r>
-              <a:rPr kumimoji="1" lang="en-US" altLang="ja-JP" sz="1200" dirty="0"/>
-              <a:t>3 AI</a:t>
-            </a:r>
-            <a:r>
-              <a:rPr kumimoji="1" lang="ja-JP" altLang="en-US" sz="1200"/>
-              <a:t>と</a:t>
-            </a:r>
-            <a:r>
-              <a:rPr kumimoji="1" lang="en-US" altLang="ja-JP" sz="1200" dirty="0"/>
-              <a:t>3</a:t>
-            </a:r>
-            <a:r>
-              <a:rPr kumimoji="1" lang="ja-JP" altLang="en-US" sz="1200"/>
-              <a:t>名による判定</a:t>
-            </a:r>
-          </a:p>
-        </p:txBody>
-      </p:sp>
-      <p:sp>
-        <p:nvSpPr>
-          <p:cNvPr id="39" name="テキスト ボックス 38">
-            <a:extLst>
-              <a:ext uri="{FF2B5EF4-FFF2-40B4-BE49-F238E27FC236}">
-                <a16:creationId xmlns:a16="http://schemas.microsoft.com/office/drawing/2014/main" id="{6C859D4A-5B10-9425-3EF2-3241A55B330C}"/>
-              </a:ext>
-            </a:extLst>
-          </p:cNvPr>
-          <p:cNvSpPr txBox="1"/>
-          <p:nvPr/>
-        </p:nvSpPr>
-        <p:spPr>
-          <a:xfrm>
-            <a:off x="1490647" y="4791014"/>
-            <a:ext cx="1534394" cy="276999"/>
-          </a:xfrm>
-          <a:prstGeom prst="rect">
-            <a:avLst/>
-          </a:prstGeom>
-          <a:noFill/>
-        </p:spPr>
-        <p:txBody>
-          <a:bodyPr wrap="none" rtlCol="0">
-            <a:spAutoFit/>
-          </a:bodyPr>
-          <a:lstStyle/>
-          <a:p>
-            <a:r>
-              <a:rPr lang="en-US" altLang="ja-JP" sz="1200" dirty="0"/>
-              <a:t>1</a:t>
-            </a:r>
-            <a:r>
-              <a:rPr kumimoji="1" lang="en-US" altLang="ja-JP" sz="1200" dirty="0"/>
-              <a:t> AI</a:t>
-            </a:r>
-            <a:r>
-              <a:rPr kumimoji="1" lang="ja-JP" altLang="en-US" sz="1200"/>
-              <a:t>の判定を対象外</a:t>
-            </a:r>
-          </a:p>
-        </p:txBody>
-      </p:sp>
-      <p:sp>
-        <p:nvSpPr>
-          <p:cNvPr id="40" name="テキスト ボックス 39">
-            <a:extLst>
-              <a:ext uri="{FF2B5EF4-FFF2-40B4-BE49-F238E27FC236}">
-                <a16:creationId xmlns:a16="http://schemas.microsoft.com/office/drawing/2014/main" id="{9E908830-F2F3-3057-F8BB-D959F4674191}"/>
-              </a:ext>
-            </a:extLst>
-          </p:cNvPr>
-          <p:cNvSpPr txBox="1"/>
-          <p:nvPr/>
-        </p:nvSpPr>
-        <p:spPr>
-          <a:xfrm>
-            <a:off x="2277399" y="6088715"/>
-            <a:ext cx="1338828" cy="369332"/>
-          </a:xfrm>
-          <a:prstGeom prst="rect">
-            <a:avLst/>
-          </a:prstGeom>
-          <a:noFill/>
-          <a:ln>
-            <a:solidFill>
-              <a:schemeClr val="tx1"/>
-            </a:solidFill>
-          </a:ln>
-        </p:spPr>
-        <p:txBody>
-          <a:bodyPr wrap="none" rtlCol="0">
-            <a:spAutoFit/>
-          </a:bodyPr>
-          <a:lstStyle/>
-          <a:p>
-            <a:r>
-              <a:rPr lang="ja-JP" altLang="en-US" dirty="0"/>
-              <a:t>地名の決定</a:t>
-            </a:r>
-            <a:endParaRPr lang="en-US" altLang="ja-JP" dirty="0"/>
-          </a:p>
-        </p:txBody>
-      </p:sp>
-      <p:cxnSp>
-        <p:nvCxnSpPr>
-          <p:cNvPr id="42" name="直線コネクタ 41">
-            <a:extLst>
-              <a:ext uri="{FF2B5EF4-FFF2-40B4-BE49-F238E27FC236}">
-                <a16:creationId xmlns:a16="http://schemas.microsoft.com/office/drawing/2014/main" id="{295B1CD3-3B9B-D7B5-8EDB-BD5C4216A288}"/>
-              </a:ext>
-            </a:extLst>
-          </p:cNvPr>
-          <p:cNvCxnSpPr>
-            <a:stCxn id="13" idx="2"/>
-            <a:endCxn id="40" idx="0"/>
-          </p:cNvCxnSpPr>
-          <p:nvPr/>
-        </p:nvCxnSpPr>
-        <p:spPr>
-          <a:xfrm>
-            <a:off x="2946813" y="5472945"/>
-            <a:ext cx="0" cy="615770"/>
-          </a:xfrm>
-          <a:prstGeom prst="line">
-            <a:avLst/>
-          </a:prstGeom>
-        </p:spPr>
-        <p:style>
-          <a:lnRef idx="2">
-            <a:schemeClr val="dk1"/>
-          </a:lnRef>
-          <a:fillRef idx="0">
-            <a:schemeClr val="dk1"/>
-          </a:fillRef>
-          <a:effectRef idx="1">
-            <a:schemeClr val="dk1"/>
-          </a:effectRef>
-          <a:fontRef idx="minor">
-            <a:schemeClr val="tx1"/>
-          </a:fontRef>
-        </p:style>
-      </p:cxnSp>
-      <p:sp>
-        <p:nvSpPr>
-          <p:cNvPr id="43" name="テキスト ボックス 42">
-            <a:extLst>
-              <a:ext uri="{FF2B5EF4-FFF2-40B4-BE49-F238E27FC236}">
-                <a16:creationId xmlns:a16="http://schemas.microsoft.com/office/drawing/2014/main" id="{A5FE4797-1CA8-53C0-69E7-FC5ED9495741}"/>
-              </a:ext>
-            </a:extLst>
-          </p:cNvPr>
-          <p:cNvSpPr txBox="1"/>
-          <p:nvPr/>
-        </p:nvSpPr>
-        <p:spPr>
-          <a:xfrm>
-            <a:off x="3602762" y="6340679"/>
-            <a:ext cx="646331" cy="276999"/>
-          </a:xfrm>
-          <a:prstGeom prst="rect">
-            <a:avLst/>
-          </a:prstGeom>
-          <a:noFill/>
-        </p:spPr>
-        <p:txBody>
-          <a:bodyPr wrap="none" rtlCol="0">
-            <a:spAutoFit/>
-          </a:bodyPr>
-          <a:lstStyle/>
-          <a:p>
-            <a:r>
-              <a:rPr kumimoji="1" lang="ja-JP" altLang="en-US" sz="1200"/>
-              <a:t>多数決</a:t>
-            </a:r>
-          </a:p>
-        </p:txBody>
-      </p:sp>
-      <p:sp>
-        <p:nvSpPr>
-          <p:cNvPr id="46" name="テキスト ボックス 45">
-            <a:extLst>
-              <a:ext uri="{FF2B5EF4-FFF2-40B4-BE49-F238E27FC236}">
-                <a16:creationId xmlns:a16="http://schemas.microsoft.com/office/drawing/2014/main" id="{DE99B3DA-7EFF-84DC-119C-EE3965C33116}"/>
-              </a:ext>
-            </a:extLst>
-          </p:cNvPr>
-          <p:cNvSpPr txBox="1"/>
-          <p:nvPr/>
-        </p:nvSpPr>
-        <p:spPr>
-          <a:xfrm>
-            <a:off x="9052559" y="1338244"/>
-            <a:ext cx="2722793" cy="1754326"/>
-          </a:xfrm>
-          <a:prstGeom prst="rect">
-            <a:avLst/>
-          </a:prstGeom>
-          <a:noFill/>
-          <a:ln>
-            <a:solidFill>
-              <a:schemeClr val="dk1"/>
-            </a:solidFill>
-          </a:ln>
-        </p:spPr>
-        <p:txBody>
-          <a:bodyPr wrap="square" rtlCol="0">
-            <a:spAutoFit/>
-          </a:bodyPr>
-          <a:lstStyle/>
-          <a:p>
-            <a:r>
-              <a:rPr lang="ja-JP" altLang="en-US"/>
-              <a:t>判定の差異</a:t>
-            </a:r>
-            <a:endParaRPr kumimoji="1" lang="en-US" altLang="ja-JP" dirty="0"/>
-          </a:p>
-          <a:p>
-            <a:r>
-              <a:rPr lang="ja-JP" altLang="en-US"/>
-              <a:t>・判定者による</a:t>
-            </a:r>
-            <a:endParaRPr lang="en-US" altLang="ja-JP" dirty="0"/>
-          </a:p>
-          <a:p>
-            <a:r>
-              <a:rPr lang="ja-JP" altLang="en-US"/>
-              <a:t>　　・距離行列</a:t>
-            </a:r>
-            <a:endParaRPr lang="en-US" altLang="ja-JP" dirty="0"/>
-          </a:p>
-          <a:p>
-            <a:r>
-              <a:rPr lang="ja-JP" altLang="en-US"/>
-              <a:t>　　・クラスタリング</a:t>
-            </a:r>
-            <a:endParaRPr lang="en-US" altLang="ja-JP" dirty="0"/>
-          </a:p>
-          <a:p>
-            <a:r>
-              <a:rPr kumimoji="1" lang="ja-JP" altLang="en-US"/>
-              <a:t>・大学ごと</a:t>
-            </a:r>
-            <a:endParaRPr kumimoji="1" lang="en-US" altLang="ja-JP" dirty="0"/>
-          </a:p>
-          <a:p>
-            <a:r>
-              <a:rPr lang="ja-JP" altLang="en-US"/>
-              <a:t>　　・検定</a:t>
-            </a:r>
-            <a:endParaRPr kumimoji="1" lang="ja-JP" altLang="en-US"/>
-          </a:p>
-        </p:txBody>
-      </p:sp>
-      <p:sp>
-        <p:nvSpPr>
-          <p:cNvPr id="48" name="テキスト ボックス 47">
-            <a:extLst>
-              <a:ext uri="{FF2B5EF4-FFF2-40B4-BE49-F238E27FC236}">
-                <a16:creationId xmlns:a16="http://schemas.microsoft.com/office/drawing/2014/main" id="{0402A917-F530-F38F-A7F5-55EF0BA1801A}"/>
-              </a:ext>
-            </a:extLst>
-          </p:cNvPr>
-          <p:cNvSpPr txBox="1"/>
-          <p:nvPr/>
-        </p:nvSpPr>
-        <p:spPr>
-          <a:xfrm>
-            <a:off x="9051530" y="4385231"/>
-            <a:ext cx="2723823" cy="923330"/>
-          </a:xfrm>
-          <a:prstGeom prst="rect">
-            <a:avLst/>
-          </a:prstGeom>
-          <a:noFill/>
-          <a:ln>
-            <a:solidFill>
-              <a:schemeClr val="dk1"/>
-            </a:solidFill>
-          </a:ln>
-        </p:spPr>
-        <p:txBody>
-          <a:bodyPr wrap="none" rtlCol="0">
-            <a:spAutoFit/>
-          </a:bodyPr>
-          <a:lstStyle/>
-          <a:p>
-            <a:r>
-              <a:rPr lang="ja-JP" altLang="en-US"/>
-              <a:t>出現（決定）地名の確認</a:t>
-            </a:r>
-            <a:endParaRPr lang="en-US" altLang="ja-JP" dirty="0"/>
-          </a:p>
-          <a:p>
-            <a:r>
-              <a:rPr kumimoji="1" lang="ja-JP" altLang="en-US"/>
-              <a:t>・地名の例</a:t>
-            </a:r>
-            <a:endParaRPr kumimoji="1" lang="en-US" altLang="ja-JP" dirty="0"/>
-          </a:p>
-          <a:p>
-            <a:r>
-              <a:rPr lang="ja-JP" altLang="en-US"/>
-              <a:t>・大学ごとの異なり</a:t>
-            </a:r>
-            <a:endParaRPr kumimoji="1" lang="ja-JP" altLang="en-US"/>
-          </a:p>
-        </p:txBody>
-      </p:sp>
-      <p:cxnSp>
-        <p:nvCxnSpPr>
-          <p:cNvPr id="50" name="カギ線コネクタ 49">
-            <a:extLst>
-              <a:ext uri="{FF2B5EF4-FFF2-40B4-BE49-F238E27FC236}">
-                <a16:creationId xmlns:a16="http://schemas.microsoft.com/office/drawing/2014/main" id="{A28C7C5C-E306-C684-ACDB-E39ACC1F3FAB}"/>
-              </a:ext>
-            </a:extLst>
-          </p:cNvPr>
-          <p:cNvCxnSpPr>
-            <a:cxnSpLocks/>
-            <a:stCxn id="13" idx="3"/>
-            <a:endCxn id="46" idx="1"/>
-          </p:cNvCxnSpPr>
-          <p:nvPr/>
-        </p:nvCxnSpPr>
-        <p:spPr>
-          <a:xfrm flipV="1">
-            <a:off x="4726307" y="2215407"/>
-            <a:ext cx="4326252" cy="3072872"/>
-          </a:xfrm>
-          <a:prstGeom prst="bentConnector3">
-            <a:avLst>
-              <a:gd name="adj1" fmla="val 50000"/>
-            </a:avLst>
-          </a:prstGeom>
-          <a:ln>
-            <a:solidFill>
-              <a:schemeClr val="tx1"/>
-            </a:solidFill>
-          </a:ln>
-        </p:spPr>
-        <p:style>
-          <a:lnRef idx="2">
-            <a:schemeClr val="accent1"/>
-          </a:lnRef>
-          <a:fillRef idx="0">
-            <a:schemeClr val="accent1"/>
-          </a:fillRef>
-          <a:effectRef idx="1">
-            <a:schemeClr val="accent1"/>
-          </a:effectRef>
-          <a:fontRef idx="minor">
-            <a:schemeClr val="tx1"/>
-          </a:fontRef>
-        </p:style>
-      </p:cxnSp>
-      <p:cxnSp>
-        <p:nvCxnSpPr>
-          <p:cNvPr id="52" name="カギ線コネクタ 51">
-            <a:extLst>
-              <a:ext uri="{FF2B5EF4-FFF2-40B4-BE49-F238E27FC236}">
-                <a16:creationId xmlns:a16="http://schemas.microsoft.com/office/drawing/2014/main" id="{6D9D6582-DB29-F9A2-2367-7F6BF897D1FB}"/>
-              </a:ext>
-            </a:extLst>
-          </p:cNvPr>
-          <p:cNvCxnSpPr>
-            <a:stCxn id="40" idx="3"/>
-            <a:endCxn id="48" idx="1"/>
-          </p:cNvCxnSpPr>
-          <p:nvPr/>
-        </p:nvCxnSpPr>
-        <p:spPr>
-          <a:xfrm flipV="1">
-            <a:off x="3616227" y="4846896"/>
-            <a:ext cx="5435303" cy="1426485"/>
-          </a:xfrm>
-          <a:prstGeom prst="bentConnector3">
-            <a:avLst>
-              <a:gd name="adj1" fmla="val 87236"/>
-            </a:avLst>
-          </a:prstGeom>
-          <a:ln>
-            <a:solidFill>
-              <a:schemeClr val="tx1"/>
-            </a:solidFill>
-          </a:ln>
-        </p:spPr>
-        <p:style>
-          <a:lnRef idx="2">
-            <a:schemeClr val="accent1"/>
-          </a:lnRef>
-          <a:fillRef idx="0">
-            <a:schemeClr val="accent1"/>
-          </a:fillRef>
-          <a:effectRef idx="1">
-            <a:schemeClr val="accent1"/>
-          </a:effectRef>
-          <a:fontRef idx="minor">
-            <a:schemeClr val="tx1"/>
-          </a:fontRef>
-        </p:style>
-      </p:cxnSp>
-      <p:sp>
-        <p:nvSpPr>
-          <p:cNvPr id="5" name="テキスト ボックス 4">
-            <a:extLst>
-              <a:ext uri="{FF2B5EF4-FFF2-40B4-BE49-F238E27FC236}">
-                <a16:creationId xmlns:a16="http://schemas.microsoft.com/office/drawing/2014/main" id="{92411725-8F54-F43D-A1EE-674FAF4384B9}"/>
-              </a:ext>
-            </a:extLst>
-          </p:cNvPr>
-          <p:cNvSpPr txBox="1"/>
-          <p:nvPr/>
-        </p:nvSpPr>
-        <p:spPr>
-          <a:xfrm>
-            <a:off x="1455380" y="5515739"/>
-            <a:ext cx="1569660" cy="461665"/>
-          </a:xfrm>
-          <a:prstGeom prst="rect">
-            <a:avLst/>
-          </a:prstGeom>
-          <a:noFill/>
-        </p:spPr>
-        <p:txBody>
-          <a:bodyPr wrap="none" rtlCol="0">
-            <a:spAutoFit/>
-          </a:bodyPr>
-          <a:lstStyle/>
-          <a:p>
-            <a:r>
-              <a:rPr kumimoji="1" lang="ja-JP" altLang="en-US" sz="1200"/>
-              <a:t>コード部分の抽出、</a:t>
-            </a:r>
-            <a:endParaRPr kumimoji="1" lang="en-US" altLang="ja-JP" sz="1200" dirty="0"/>
-          </a:p>
-          <a:p>
-            <a:r>
-              <a:rPr kumimoji="1" lang="en-US" altLang="ja-JP" sz="1200" dirty="0" err="1"/>
-              <a:t>jq</a:t>
-            </a:r>
-            <a:r>
-              <a:rPr kumimoji="1" lang="ja-JP" altLang="en-US" sz="1200"/>
-              <a:t>によるフィルター</a:t>
-            </a:r>
-          </a:p>
-        </p:txBody>
-      </p:sp>
-      <p:sp>
-        <p:nvSpPr>
-          <p:cNvPr id="14" name="テキスト ボックス 13">
-            <a:extLst>
-              <a:ext uri="{FF2B5EF4-FFF2-40B4-BE49-F238E27FC236}">
-                <a16:creationId xmlns:a16="http://schemas.microsoft.com/office/drawing/2014/main" id="{B49311BE-C714-6329-51CC-FF85D8119BDC}"/>
-              </a:ext>
-            </a:extLst>
-          </p:cNvPr>
-          <p:cNvSpPr txBox="1"/>
-          <p:nvPr/>
-        </p:nvSpPr>
-        <p:spPr>
-          <a:xfrm>
-            <a:off x="9654908" y="5324688"/>
-            <a:ext cx="2122697" cy="338554"/>
-          </a:xfrm>
-          <a:prstGeom prst="rect">
-            <a:avLst/>
-          </a:prstGeom>
-          <a:noFill/>
-        </p:spPr>
-        <p:txBody>
-          <a:bodyPr wrap="none" rtlCol="0">
-            <a:spAutoFit/>
-          </a:bodyPr>
-          <a:lstStyle/>
-          <a:p>
-            <a:r>
-              <a:rPr kumimoji="1" lang="ja-JP" altLang="en-US" sz="1600"/>
-              <a:t>地名数</a:t>
-            </a:r>
-            <a:r>
-              <a:rPr kumimoji="1" lang="en-US" altLang="ja-JP" sz="1600" dirty="0"/>
-              <a:t>(</a:t>
-            </a:r>
-            <a:r>
-              <a:rPr lang="ja-JP" altLang="en-US" sz="1600"/>
-              <a:t>ユニーク</a:t>
-            </a:r>
-            <a:r>
-              <a:rPr kumimoji="1" lang="en-US" altLang="ja-JP" sz="1600" dirty="0"/>
-              <a:t>): 99</a:t>
-            </a:r>
-            <a:endParaRPr kumimoji="1" lang="ja-JP" altLang="en-US" sz="1600"/>
-          </a:p>
-        </p:txBody>
-      </p:sp>
-      <p:sp>
-        <p:nvSpPr>
-          <p:cNvPr id="15" name="テキスト ボックス 14">
-            <a:extLst>
-              <a:ext uri="{FF2B5EF4-FFF2-40B4-BE49-F238E27FC236}">
-                <a16:creationId xmlns:a16="http://schemas.microsoft.com/office/drawing/2014/main" id="{874F5013-91B2-5883-A1ED-16F5AE1E67C0}"/>
-              </a:ext>
-            </a:extLst>
-          </p:cNvPr>
-          <p:cNvSpPr txBox="1"/>
-          <p:nvPr/>
-        </p:nvSpPr>
-        <p:spPr>
-          <a:xfrm>
-            <a:off x="9124682" y="3104499"/>
-            <a:ext cx="2646878" cy="338554"/>
-          </a:xfrm>
-          <a:prstGeom prst="rect">
-            <a:avLst/>
-          </a:prstGeom>
-          <a:noFill/>
-        </p:spPr>
-        <p:txBody>
-          <a:bodyPr wrap="none" rtlCol="0">
-            <a:spAutoFit/>
-          </a:bodyPr>
-          <a:lstStyle/>
-          <a:p>
-            <a:r>
-              <a:rPr kumimoji="1" lang="ja-JP" altLang="en-US" sz="1600"/>
-              <a:t>地名候補数</a:t>
-            </a:r>
-            <a:r>
-              <a:rPr kumimoji="1" lang="en-US" altLang="ja-JP" sz="1600" dirty="0"/>
-              <a:t>(</a:t>
-            </a:r>
-            <a:r>
-              <a:rPr lang="ja-JP" altLang="en-US" sz="1600"/>
-              <a:t>ユニーク</a:t>
-            </a:r>
-            <a:r>
-              <a:rPr kumimoji="1" lang="en-US" altLang="ja-JP" sz="1600" dirty="0"/>
-              <a:t>): 141</a:t>
-            </a:r>
-            <a:endParaRPr kumimoji="1" lang="ja-JP" altLang="en-US" sz="1600"/>
-          </a:p>
-        </p:txBody>
-      </p:sp>
-      <p:sp>
-        <p:nvSpPr>
-          <p:cNvPr id="27" name="テキスト ボックス 26">
-            <a:extLst>
-              <a:ext uri="{FF2B5EF4-FFF2-40B4-BE49-F238E27FC236}">
-                <a16:creationId xmlns:a16="http://schemas.microsoft.com/office/drawing/2014/main" id="{9CB31746-755C-0454-679A-07488AFE3972}"/>
-              </a:ext>
-            </a:extLst>
-          </p:cNvPr>
-          <p:cNvSpPr txBox="1"/>
-          <p:nvPr/>
-        </p:nvSpPr>
-        <p:spPr>
-          <a:xfrm>
-            <a:off x="4627491" y="3378450"/>
-            <a:ext cx="851515" cy="338554"/>
-          </a:xfrm>
-          <a:prstGeom prst="rect">
-            <a:avLst/>
-          </a:prstGeom>
-          <a:noFill/>
-        </p:spPr>
-        <p:txBody>
-          <a:bodyPr wrap="none" rtlCol="0">
-            <a:spAutoFit/>
-          </a:bodyPr>
-          <a:lstStyle/>
-          <a:p>
-            <a:r>
-              <a:rPr kumimoji="1" lang="en-US" altLang="ja-JP" sz="1600" b="1" dirty="0" err="1"/>
-              <a:t>mecab</a:t>
-            </a:r>
-            <a:endParaRPr kumimoji="1" lang="ja-JP" altLang="en-US" sz="1600" b="1"/>
-          </a:p>
-        </p:txBody>
-      </p:sp>
-      <p:sp>
-        <p:nvSpPr>
-          <p:cNvPr id="28" name="テキスト ボックス 27">
-            <a:extLst>
-              <a:ext uri="{FF2B5EF4-FFF2-40B4-BE49-F238E27FC236}">
-                <a16:creationId xmlns:a16="http://schemas.microsoft.com/office/drawing/2014/main" id="{36803E7D-B8E9-2CA5-0E54-143269A0D742}"/>
-              </a:ext>
-            </a:extLst>
-          </p:cNvPr>
-          <p:cNvSpPr txBox="1"/>
-          <p:nvPr/>
-        </p:nvSpPr>
-        <p:spPr>
-          <a:xfrm>
-            <a:off x="4562202" y="4125398"/>
-            <a:ext cx="1146468" cy="323165"/>
-          </a:xfrm>
-          <a:prstGeom prst="rect">
-            <a:avLst/>
-          </a:prstGeom>
-          <a:noFill/>
-        </p:spPr>
-        <p:txBody>
-          <a:bodyPr wrap="none" rtlCol="0">
-            <a:spAutoFit/>
-          </a:bodyPr>
-          <a:lstStyle/>
-          <a:p>
-            <a:r>
-              <a:rPr lang="ja-JP" altLang="en-US" sz="1500" b="1"/>
-              <a:t>プロンプト</a:t>
-            </a:r>
-            <a:endParaRPr kumimoji="1" lang="ja-JP" altLang="en-US" sz="1500" b="1"/>
-          </a:p>
-        </p:txBody>
-      </p:sp>
-    </p:spTree>
-    <p:extLst>
-      <p:ext uri="{BB962C8B-B14F-4D97-AF65-F5344CB8AC3E}">
-        <p14:creationId xmlns:p14="http://schemas.microsoft.com/office/powerpoint/2010/main" val="1515609798"/>
-      </p:ext>
-    </p:extLst>
-  </p:cSld>
-  <p:clrMapOvr>
-    <a:masterClrMapping/>
-  </p:clrMapOvr>
-</p:sld>
-</file>
-
-<file path=ppt/slides/slide11.xml><?xml version="1.0" encoding="utf-8"?>
-<p:sld xmlns:a="http://schemas.openxmlformats.org/drawingml/2006/main" xmlns:r="http://schemas.openxmlformats.org/officeDocument/2006/relationships" xmlns:p="http://schemas.openxmlformats.org/presentationml/2006/main">
-  <p:cSld>
-    <p:spTree>
-      <p:nvGrpSpPr>
-        <p:cNvPr id="1" name="">
-          <a:extLst>
-            <a:ext uri="{FF2B5EF4-FFF2-40B4-BE49-F238E27FC236}">
-              <a16:creationId xmlns:a16="http://schemas.microsoft.com/office/drawing/2014/main" id="{45D1EA99-60AA-5390-0D3D-56D4CEB0011F}"/>
-            </a:ext>
-          </a:extLst>
-        </p:cNvPr>
-        <p:cNvGrpSpPr/>
-        <p:nvPr/>
-      </p:nvGrpSpPr>
-      <p:grpSpPr>
-        <a:xfrm>
-          <a:off x="0" y="0"/>
-          <a:ext cx="0" cy="0"/>
-          <a:chOff x="0" y="0"/>
-          <a:chExt cx="0" cy="0"/>
-        </a:xfrm>
-      </p:grpSpPr>
-      <p:sp>
-        <p:nvSpPr>
-          <p:cNvPr id="2" name="タイトル 1">
-            <a:extLst>
-              <a:ext uri="{FF2B5EF4-FFF2-40B4-BE49-F238E27FC236}">
-                <a16:creationId xmlns:a16="http://schemas.microsoft.com/office/drawing/2014/main" id="{5436E73C-C135-9AF7-6D96-1B6566C22C58}"/>
-              </a:ext>
-            </a:extLst>
-          </p:cNvPr>
-          <p:cNvSpPr>
-            <a:spLocks noGrp="1"/>
-          </p:cNvSpPr>
-          <p:nvPr>
-            <p:ph type="title"/>
-          </p:nvPr>
-        </p:nvSpPr>
-        <p:spPr>
-          <a:xfrm>
-            <a:off x="0" y="1"/>
-            <a:ext cx="12192000" cy="577516"/>
-          </a:xfrm>
-          <a:solidFill>
-            <a:schemeClr val="bg1">
-              <a:lumMod val="85000"/>
-            </a:schemeClr>
-          </a:solidFill>
-        </p:spPr>
-        <p:txBody>
-          <a:bodyPr>
-            <a:normAutofit fontScale="90000"/>
-          </a:bodyPr>
-          <a:lstStyle/>
-          <a:p>
-            <a:r>
-              <a:rPr kumimoji="1" lang="ja-JP" altLang="en-US" sz="3600"/>
-              <a:t>マテリアル・方法（</a:t>
-            </a:r>
-            <a:r>
-              <a:rPr kumimoji="1" lang="en-US" altLang="ja-JP" sz="3600"/>
-              <a:t>NER</a:t>
-            </a:r>
-            <a:r>
-              <a:rPr kumimoji="1" lang="ja-JP" altLang="en-US" sz="3600"/>
-              <a:t>）</a:t>
-            </a:r>
-          </a:p>
-        </p:txBody>
-      </p:sp>
-      <p:sp>
-        <p:nvSpPr>
-          <p:cNvPr id="4" name="テキスト ボックス 3">
-            <a:extLst>
-              <a:ext uri="{FF2B5EF4-FFF2-40B4-BE49-F238E27FC236}">
-                <a16:creationId xmlns:a16="http://schemas.microsoft.com/office/drawing/2014/main" id="{5C02DBFA-43A0-570F-85FB-DE2048B43B02}"/>
-              </a:ext>
-            </a:extLst>
-          </p:cNvPr>
-          <p:cNvSpPr txBox="1"/>
-          <p:nvPr/>
-        </p:nvSpPr>
-        <p:spPr>
-          <a:xfrm>
-            <a:off x="0" y="643420"/>
-            <a:ext cx="6705682" cy="2308324"/>
-          </a:xfrm>
-          <a:prstGeom prst="rect">
-            <a:avLst/>
-          </a:prstGeom>
-          <a:noFill/>
-        </p:spPr>
-        <p:txBody>
-          <a:bodyPr wrap="none" rtlCol="0">
-            <a:spAutoFit/>
-          </a:bodyPr>
-          <a:lstStyle/>
-          <a:p>
-            <a:pPr marL="285750" indent="-285750">
-              <a:buFont typeface="Arial" panose="020B0604020202020204" pitchFamily="34" charset="0"/>
-              <a:buChar char="•"/>
-            </a:pPr>
-            <a:r>
-              <a:rPr lang="en-US" altLang="ja-JP"/>
-              <a:t>mecab</a:t>
-            </a:r>
-            <a:r>
-              <a:rPr lang="ja-JP" altLang="en-US"/>
-              <a:t>による形態素解析</a:t>
-            </a:r>
-            <a:endParaRPr lang="en-US" altLang="ja-JP"/>
-          </a:p>
-          <a:p>
-            <a:pPr marL="742950" lvl="1" indent="-285750">
-              <a:buFont typeface="Arial" panose="020B0604020202020204" pitchFamily="34" charset="0"/>
-              <a:buChar char="•"/>
-            </a:pPr>
-            <a:r>
-              <a:rPr kumimoji="1" lang="en-US" altLang="ja-JP"/>
-              <a:t>'</a:t>
-            </a:r>
-            <a:r>
-              <a:rPr kumimoji="1" lang="ja-JP" altLang="en-US"/>
-              <a:t>固有名詞</a:t>
-            </a:r>
-            <a:r>
-              <a:rPr kumimoji="1" lang="en-US" altLang="ja-JP"/>
-              <a:t>'</a:t>
-            </a:r>
-            <a:r>
-              <a:rPr kumimoji="1" lang="ja-JP" altLang="en-US"/>
-              <a:t>、</a:t>
-            </a:r>
-            <a:r>
-              <a:rPr kumimoji="1" lang="en-US" altLang="ja-JP"/>
-              <a:t>'</a:t>
-            </a:r>
-            <a:r>
-              <a:rPr kumimoji="1" lang="ja-JP" altLang="en-US"/>
-              <a:t>地域</a:t>
-            </a:r>
-            <a:r>
-              <a:rPr kumimoji="1" lang="en-US" altLang="ja-JP"/>
-              <a:t>'</a:t>
-            </a:r>
-            <a:r>
-              <a:rPr kumimoji="1" lang="ja-JP" altLang="en-US"/>
-              <a:t>のラベルのあるものを抽出</a:t>
-            </a:r>
-            <a:endParaRPr kumimoji="1" lang="en-US" altLang="ja-JP"/>
-          </a:p>
-          <a:p>
-            <a:pPr marL="742950" lvl="1" indent="-285750">
-              <a:buFont typeface="Arial" panose="020B0604020202020204" pitchFamily="34" charset="0"/>
-              <a:buChar char="•"/>
-            </a:pPr>
-            <a:r>
-              <a:rPr lang="ja-JP" altLang="en-US"/>
-              <a:t>品詞の属性情報を削除し表現部分のみを抽出、リスト化</a:t>
-            </a:r>
-            <a:endParaRPr lang="en-US" altLang="ja-JP"/>
-          </a:p>
-          <a:p>
-            <a:pPr marL="742950" lvl="1" indent="-285750">
-              <a:buFont typeface="Arial" panose="020B0604020202020204" pitchFamily="34" charset="0"/>
-              <a:buChar char="•"/>
-            </a:pPr>
-            <a:r>
-              <a:rPr kumimoji="1" lang="ja-JP" altLang="en-US"/>
-              <a:t>以上を報告書ごとに行う</a:t>
-            </a:r>
-            <a:endParaRPr kumimoji="1" lang="en-US" altLang="ja-JP"/>
-          </a:p>
-          <a:p>
-            <a:pPr marL="285750" indent="-285750">
-              <a:buFont typeface="Arial" panose="020B0604020202020204" pitchFamily="34" charset="0"/>
-              <a:buChar char="•"/>
-            </a:pPr>
-            <a:r>
-              <a:rPr kumimoji="1" lang="ja-JP" altLang="en-US"/>
-              <a:t>作業用ファイルの作成</a:t>
-            </a:r>
-            <a:endParaRPr kumimoji="1" lang="en-US" altLang="ja-JP"/>
-          </a:p>
-          <a:p>
-            <a:pPr marL="742950" lvl="1" indent="-285750">
-              <a:buFont typeface="Arial" panose="020B0604020202020204" pitchFamily="34" charset="0"/>
-              <a:buChar char="•"/>
-            </a:pPr>
-            <a:r>
-              <a:rPr kumimoji="1" lang="ja-JP" altLang="en-US"/>
-              <a:t>報告書のタイトル、本文を抽出</a:t>
-            </a:r>
-            <a:endParaRPr kumimoji="1" lang="en-US" altLang="ja-JP"/>
-          </a:p>
-          <a:p>
-            <a:pPr marL="742950" lvl="1" indent="-285750">
-              <a:buFont typeface="Arial" panose="020B0604020202020204" pitchFamily="34" charset="0"/>
-              <a:buChar char="•"/>
-            </a:pPr>
-            <a:r>
-              <a:rPr lang="en-US" altLang="ja-JP"/>
-              <a:t>NER</a:t>
-            </a:r>
-            <a:r>
-              <a:rPr lang="ja-JP" altLang="en-US"/>
-              <a:t>結果のリストと結合</a:t>
-            </a:r>
-            <a:endParaRPr lang="en-US" altLang="ja-JP"/>
-          </a:p>
-          <a:p>
-            <a:pPr marL="742950" lvl="1" indent="-285750">
-              <a:buFont typeface="Arial" panose="020B0604020202020204" pitchFamily="34" charset="0"/>
-              <a:buChar char="•"/>
-            </a:pPr>
-            <a:r>
-              <a:rPr lang="ja-JP" altLang="en-US"/>
-              <a:t>以上を報告書ごとに行う</a:t>
-            </a:r>
-            <a:endParaRPr lang="en-US" altLang="ja-JP"/>
-          </a:p>
-        </p:txBody>
-      </p:sp>
-    </p:spTree>
-    <p:extLst>
-      <p:ext uri="{BB962C8B-B14F-4D97-AF65-F5344CB8AC3E}">
-        <p14:creationId xmlns:p14="http://schemas.microsoft.com/office/powerpoint/2010/main" val="3715758299"/>
-      </p:ext>
-    </p:extLst>
-  </p:cSld>
-  <p:clrMapOvr>
-    <a:masterClrMapping/>
-  </p:clrMapOvr>
-</p:sld>
-</file>
-
-<file path=ppt/slides/slide12.xml><?xml version="1.0" encoding="utf-8"?>
 <p:sld xmlns:a="http://schemas.openxmlformats.org/drawingml/2006/main" xmlns:r="http://schemas.openxmlformats.org/officeDocument/2006/relationships" xmlns:p="http://schemas.openxmlformats.org/presentationml/2006/main">
   <p:cSld>
     <p:spTree>
@@ -6723,7 +4871,7 @@
 </p:sld>
 </file>
 
-<file path=ppt/slides/slide13.xml><?xml version="1.0" encoding="utf-8"?>
+<file path=ppt/slides/slide11.xml><?xml version="1.0" encoding="utf-8"?>
 <p:sld xmlns:a="http://schemas.openxmlformats.org/drawingml/2006/main" xmlns:r="http://schemas.openxmlformats.org/officeDocument/2006/relationships" xmlns:p="http://schemas.openxmlformats.org/presentationml/2006/main">
   <p:cSld>
     <p:spTree>
@@ -7116,7 +5264,7 @@
 </p:sld>
 </file>
 
-<file path=ppt/slides/slide14.xml><?xml version="1.0" encoding="utf-8"?>
+<file path=ppt/slides/slide12.xml><?xml version="1.0" encoding="utf-8"?>
 <p:sld xmlns:a="http://schemas.openxmlformats.org/drawingml/2006/main" xmlns:r="http://schemas.openxmlformats.org/officeDocument/2006/relationships" xmlns:p="http://schemas.openxmlformats.org/presentationml/2006/main">
   <p:cSld>
     <p:spTree>
@@ -8020,7 +6168,7 @@
 </p:sld>
 </file>
 
-<file path=ppt/slides/slide15.xml><?xml version="1.0" encoding="utf-8"?>
+<file path=ppt/slides/slide13.xml><?xml version="1.0" encoding="utf-8"?>
 <p:sld xmlns:a="http://schemas.openxmlformats.org/drawingml/2006/main" xmlns:r="http://schemas.openxmlformats.org/officeDocument/2006/relationships" xmlns:p="http://schemas.openxmlformats.org/presentationml/2006/main">
   <p:cSld>
     <p:spTree>
@@ -9128,7 +7276,7 @@
 </p:sld>
 </file>
 
-<file path=ppt/slides/slide16.xml><?xml version="1.0" encoding="utf-8"?>
+<file path=ppt/slides/slide14.xml><?xml version="1.0" encoding="utf-8"?>
 <p:sld xmlns:a="http://schemas.openxmlformats.org/drawingml/2006/main" xmlns:r="http://schemas.openxmlformats.org/officeDocument/2006/relationships" xmlns:p="http://schemas.openxmlformats.org/presentationml/2006/main">
   <p:cSld>
     <p:spTree>
@@ -10008,7 +8156,7 @@
 </p:sld>
 </file>
 
-<file path=ppt/slides/slide17.xml><?xml version="1.0" encoding="utf-8"?>
+<file path=ppt/slides/slide15.xml><?xml version="1.0" encoding="utf-8"?>
 <p:sld xmlns:a="http://schemas.openxmlformats.org/drawingml/2006/main" xmlns:r="http://schemas.openxmlformats.org/officeDocument/2006/relationships" xmlns:p="http://schemas.openxmlformats.org/presentationml/2006/main">
   <p:cSld>
     <p:spTree>
@@ -10354,7 +8502,7 @@
 </p:sld>
 </file>
 
-<file path=ppt/slides/slide18.xml><?xml version="1.0" encoding="utf-8"?>
+<file path=ppt/slides/slide16.xml><?xml version="1.0" encoding="utf-8"?>
 <p:sld xmlns:a="http://schemas.openxmlformats.org/drawingml/2006/main" xmlns:r="http://schemas.openxmlformats.org/officeDocument/2006/relationships" xmlns:p="http://schemas.openxmlformats.org/presentationml/2006/main">
   <p:cSld>
     <p:spTree>
@@ -10650,7 +8798,7 @@
 </p:sld>
 </file>
 
-<file path=ppt/slides/slide19.xml><?xml version="1.0" encoding="utf-8"?>
+<file path=ppt/slides/slide17.xml><?xml version="1.0" encoding="utf-8"?>
 <p:sld xmlns:a="http://schemas.openxmlformats.org/drawingml/2006/main" xmlns:r="http://schemas.openxmlformats.org/officeDocument/2006/relationships" xmlns:p="http://schemas.openxmlformats.org/presentationml/2006/main">
   <p:cSld>
     <p:spTree>
@@ -11486,7 +9634,806 @@
 </p:sld>
 </file>
 
+<file path=ppt/slides/slide18.xml><?xml version="1.0" encoding="utf-8"?>
+<p:sld xmlns:a="http://schemas.openxmlformats.org/drawingml/2006/main" xmlns:r="http://schemas.openxmlformats.org/officeDocument/2006/relationships" xmlns:p="http://schemas.openxmlformats.org/presentationml/2006/main">
+  <p:cSld>
+    <p:spTree>
+      <p:nvGrpSpPr>
+        <p:cNvPr id="1" name="">
+          <a:extLst>
+            <a:ext uri="{FF2B5EF4-FFF2-40B4-BE49-F238E27FC236}">
+              <a16:creationId xmlns:a16="http://schemas.microsoft.com/office/drawing/2014/main" id="{88C9DA51-A403-7873-5F7E-B6D6929B0EB2}"/>
+            </a:ext>
+          </a:extLst>
+        </p:cNvPr>
+        <p:cNvGrpSpPr/>
+        <p:nvPr/>
+      </p:nvGrpSpPr>
+      <p:grpSpPr>
+        <a:xfrm>
+          <a:off x="0" y="0"/>
+          <a:ext cx="0" cy="0"/>
+          <a:chOff x="0" y="0"/>
+          <a:chExt cx="0" cy="0"/>
+        </a:xfrm>
+      </p:grpSpPr>
+      <p:sp>
+        <p:nvSpPr>
+          <p:cNvPr id="2" name="タイトル 1">
+            <a:extLst>
+              <a:ext uri="{FF2B5EF4-FFF2-40B4-BE49-F238E27FC236}">
+                <a16:creationId xmlns:a16="http://schemas.microsoft.com/office/drawing/2014/main" id="{3C6B37F8-D551-CB67-7D8F-C28C1E761DA6}"/>
+              </a:ext>
+            </a:extLst>
+          </p:cNvPr>
+          <p:cNvSpPr>
+            <a:spLocks noGrp="1"/>
+          </p:cNvSpPr>
+          <p:nvPr>
+            <p:ph type="title"/>
+          </p:nvPr>
+        </p:nvSpPr>
+        <p:spPr>
+          <a:xfrm>
+            <a:off x="0" y="1"/>
+            <a:ext cx="12192000" cy="577516"/>
+          </a:xfrm>
+          <a:solidFill>
+            <a:schemeClr val="bg1">
+              <a:lumMod val="85000"/>
+            </a:schemeClr>
+          </a:solidFill>
+        </p:spPr>
+        <p:txBody>
+          <a:bodyPr>
+            <a:normAutofit fontScale="90000"/>
+          </a:bodyPr>
+          <a:lstStyle/>
+          <a:p>
+            <a:r>
+              <a:rPr kumimoji="1" lang="ja-JP" altLang="en-US" sz="3600"/>
+              <a:t>まとめ</a:t>
+            </a:r>
+          </a:p>
+        </p:txBody>
+      </p:sp>
+      <p:sp>
+        <p:nvSpPr>
+          <p:cNvPr id="3" name="テキスト ボックス 2">
+            <a:extLst>
+              <a:ext uri="{FF2B5EF4-FFF2-40B4-BE49-F238E27FC236}">
+                <a16:creationId xmlns:a16="http://schemas.microsoft.com/office/drawing/2014/main" id="{ECA3ACB1-7262-E3EE-C4CE-FD8716E60AC9}"/>
+              </a:ext>
+            </a:extLst>
+          </p:cNvPr>
+          <p:cNvSpPr txBox="1"/>
+          <p:nvPr/>
+        </p:nvSpPr>
+        <p:spPr>
+          <a:xfrm>
+            <a:off x="766119" y="816415"/>
+            <a:ext cx="3896497" cy="646331"/>
+          </a:xfrm>
+          <a:prstGeom prst="rect">
+            <a:avLst/>
+          </a:prstGeom>
+          <a:noFill/>
+          <a:ln w="12700">
+            <a:solidFill>
+              <a:schemeClr val="tx1"/>
+            </a:solidFill>
+          </a:ln>
+        </p:spPr>
+        <p:txBody>
+          <a:bodyPr wrap="square" rtlCol="0">
+            <a:spAutoFit/>
+          </a:bodyPr>
+          <a:lstStyle/>
+          <a:p>
+            <a:r>
+              <a:rPr lang="en-US" altLang="ja-JP"/>
+              <a:t>NER</a:t>
+            </a:r>
+            <a:r>
+              <a:rPr lang="ja-JP" altLang="en-US"/>
+              <a:t>と判定との差が大きい</a:t>
+            </a:r>
+            <a:endParaRPr lang="en-US" altLang="ja-JP"/>
+          </a:p>
+          <a:p>
+            <a:pPr marL="285750" indent="-285750">
+              <a:buFont typeface="Arial" panose="020B0604020202020204" pitchFamily="34" charset="0"/>
+              <a:buChar char="•"/>
+            </a:pPr>
+            <a:r>
+              <a:rPr kumimoji="1" lang="en-US" altLang="ja-JP"/>
+              <a:t>7%~34%</a:t>
+            </a:r>
+          </a:p>
+        </p:txBody>
+      </p:sp>
+      <p:sp>
+        <p:nvSpPr>
+          <p:cNvPr id="7" name="テキスト ボックス 6">
+            <a:extLst>
+              <a:ext uri="{FF2B5EF4-FFF2-40B4-BE49-F238E27FC236}">
+                <a16:creationId xmlns:a16="http://schemas.microsoft.com/office/drawing/2014/main" id="{9E2E33CE-9C6A-5290-EC10-6F434CA0EA20}"/>
+              </a:ext>
+            </a:extLst>
+          </p:cNvPr>
+          <p:cNvSpPr txBox="1"/>
+          <p:nvPr/>
+        </p:nvSpPr>
+        <p:spPr>
+          <a:xfrm>
+            <a:off x="6033408" y="824566"/>
+            <a:ext cx="5793112" cy="2585323"/>
+          </a:xfrm>
+          <a:prstGeom prst="rect">
+            <a:avLst/>
+          </a:prstGeom>
+          <a:noFill/>
+        </p:spPr>
+        <p:txBody>
+          <a:bodyPr wrap="square" rtlCol="0">
+            <a:spAutoFit/>
+          </a:bodyPr>
+          <a:lstStyle/>
+          <a:p>
+            <a:r>
+              <a:rPr kumimoji="1" lang="ja-JP" altLang="en-US"/>
+              <a:t>日本語</a:t>
+            </a:r>
+            <a:r>
+              <a:rPr kumimoji="1" lang="en-US" altLang="ja-JP" dirty="0"/>
+              <a:t>NER</a:t>
+            </a:r>
+            <a:r>
+              <a:rPr kumimoji="1" lang="ja-JP" altLang="en-US"/>
+              <a:t>の</a:t>
+            </a:r>
+            <a:r>
+              <a:rPr kumimoji="1" lang="en-US" altLang="ja-JP" dirty="0"/>
+              <a:t>AI</a:t>
+            </a:r>
+            <a:r>
+              <a:rPr kumimoji="1" lang="ja-JP" altLang="en-US"/>
+              <a:t>利用に関して</a:t>
+            </a:r>
+            <a:endParaRPr kumimoji="1" lang="en-US" altLang="ja-JP" dirty="0"/>
+          </a:p>
+          <a:p>
+            <a:pPr marL="285750" indent="-285750">
+              <a:buFont typeface="Arial" panose="020B0604020202020204" pitchFamily="34" charset="0"/>
+              <a:buChar char="•"/>
+            </a:pPr>
+            <a:r>
+              <a:rPr kumimoji="1" lang="ja-JP" altLang="en-US"/>
+              <a:t>形態素解析のみでの解決は難しい場合に対応できる可能性はある</a:t>
+            </a:r>
+            <a:endParaRPr kumimoji="1" lang="en-US" altLang="ja-JP" dirty="0"/>
+          </a:p>
+          <a:p>
+            <a:pPr marL="285750" indent="-285750">
+              <a:buFont typeface="Arial" panose="020B0604020202020204" pitchFamily="34" charset="0"/>
+              <a:buChar char="•"/>
+            </a:pPr>
+            <a:r>
+              <a:rPr lang="ja-JP" altLang="en-US"/>
+              <a:t>非常に細やかなルールの設定とエキスパートとしての訓練が必要であることを示唆している</a:t>
+            </a:r>
+            <a:endParaRPr lang="en-US" altLang="ja-JP" dirty="0"/>
+          </a:p>
+          <a:p>
+            <a:endParaRPr lang="en-US" altLang="ja-JP" dirty="0"/>
+          </a:p>
+          <a:p>
+            <a:r>
+              <a:rPr lang="en-US" altLang="ja-JP" dirty="0"/>
+              <a:t>AI</a:t>
+            </a:r>
+            <a:r>
+              <a:rPr lang="ja-JP" altLang="en-US"/>
+              <a:t>特有の問題</a:t>
+            </a:r>
+          </a:p>
+          <a:p>
+            <a:pPr marL="285750" indent="-285750">
+              <a:buFont typeface="Arial" panose="020B0604020202020204" pitchFamily="34" charset="0"/>
+              <a:buChar char="•"/>
+            </a:pPr>
+            <a:r>
+              <a:rPr kumimoji="1" lang="ja-JP" altLang="en-US"/>
+              <a:t>本研究は、</a:t>
+            </a:r>
+            <a:r>
+              <a:rPr kumimoji="1" lang="en-US" altLang="ja-JP" dirty="0"/>
+              <a:t>AI</a:t>
+            </a:r>
+            <a:r>
+              <a:rPr kumimoji="1" lang="ja-JP" altLang="en-US"/>
+              <a:t>に関しては判定よりも「出力形式」が問題となったケースであった</a:t>
+            </a:r>
+          </a:p>
+        </p:txBody>
+      </p:sp>
+      <p:sp>
+        <p:nvSpPr>
+          <p:cNvPr id="9" name="テキスト ボックス 8">
+            <a:extLst>
+              <a:ext uri="{FF2B5EF4-FFF2-40B4-BE49-F238E27FC236}">
+                <a16:creationId xmlns:a16="http://schemas.microsoft.com/office/drawing/2014/main" id="{E1928388-C9F5-89BD-8736-99A9A7963599}"/>
+              </a:ext>
+            </a:extLst>
+          </p:cNvPr>
+          <p:cNvSpPr txBox="1"/>
+          <p:nvPr/>
+        </p:nvSpPr>
+        <p:spPr>
+          <a:xfrm>
+            <a:off x="766119" y="1701644"/>
+            <a:ext cx="3896497" cy="923330"/>
+          </a:xfrm>
+          <a:prstGeom prst="rect">
+            <a:avLst/>
+          </a:prstGeom>
+          <a:noFill/>
+          <a:ln w="12700">
+            <a:solidFill>
+              <a:schemeClr val="tx1"/>
+            </a:solidFill>
+          </a:ln>
+        </p:spPr>
+        <p:txBody>
+          <a:bodyPr wrap="square" rtlCol="0">
+            <a:spAutoFit/>
+          </a:bodyPr>
+          <a:lstStyle/>
+          <a:p>
+            <a:r>
+              <a:rPr lang="ja-JP" altLang="en-US"/>
+              <a:t>判定（者）間でも差が大きい</a:t>
+            </a:r>
+            <a:endParaRPr lang="en-US" altLang="ja-JP"/>
+          </a:p>
+          <a:p>
+            <a:pPr marL="285750" indent="-285750">
+              <a:buFont typeface="Arial" panose="020B0604020202020204" pitchFamily="34" charset="0"/>
+              <a:buChar char="•"/>
+            </a:pPr>
+            <a:r>
+              <a:rPr lang="ja-JP" altLang="en-US"/>
+              <a:t>最大</a:t>
+            </a:r>
+            <a:r>
+              <a:rPr lang="en-US" altLang="ja-JP"/>
+              <a:t>34%</a:t>
+            </a:r>
+          </a:p>
+          <a:p>
+            <a:pPr marL="285750" indent="-285750">
+              <a:buFont typeface="Arial" panose="020B0604020202020204" pitchFamily="34" charset="0"/>
+              <a:buChar char="•"/>
+            </a:pPr>
+            <a:r>
+              <a:rPr lang="ja-JP" altLang="en-US"/>
+              <a:t>人と人でも</a:t>
+            </a:r>
+            <a:r>
+              <a:rPr lang="en-US" altLang="ja-JP"/>
+              <a:t>7%</a:t>
+            </a:r>
+          </a:p>
+        </p:txBody>
+      </p:sp>
+      <p:sp>
+        <p:nvSpPr>
+          <p:cNvPr id="11" name="テキスト ボックス 10">
+            <a:extLst>
+              <a:ext uri="{FF2B5EF4-FFF2-40B4-BE49-F238E27FC236}">
+                <a16:creationId xmlns:a16="http://schemas.microsoft.com/office/drawing/2014/main" id="{F601E439-4975-999E-D8D5-C26D7DD78E5A}"/>
+              </a:ext>
+            </a:extLst>
+          </p:cNvPr>
+          <p:cNvSpPr txBox="1"/>
+          <p:nvPr/>
+        </p:nvSpPr>
+        <p:spPr>
+          <a:xfrm>
+            <a:off x="766119" y="2863872"/>
+            <a:ext cx="3896496" cy="646331"/>
+          </a:xfrm>
+          <a:prstGeom prst="rect">
+            <a:avLst/>
+          </a:prstGeom>
+          <a:noFill/>
+          <a:ln w="12700">
+            <a:solidFill>
+              <a:schemeClr val="tx1"/>
+            </a:solidFill>
+          </a:ln>
+        </p:spPr>
+        <p:txBody>
+          <a:bodyPr wrap="square" rtlCol="0">
+            <a:spAutoFit/>
+          </a:bodyPr>
+          <a:lstStyle/>
+          <a:p>
+            <a:r>
+              <a:rPr lang="en-US" altLang="ja-JP"/>
+              <a:t>AI</a:t>
+            </a:r>
+            <a:r>
+              <a:rPr lang="ja-JP" altLang="en-US"/>
+              <a:t>の出力形式が課題</a:t>
+            </a:r>
+            <a:endParaRPr lang="en-US" altLang="ja-JP"/>
+          </a:p>
+          <a:p>
+            <a:pPr marL="285750" indent="-285750">
+              <a:buFont typeface="Arial" panose="020B0604020202020204" pitchFamily="34" charset="0"/>
+              <a:buChar char="•"/>
+            </a:pPr>
+            <a:r>
+              <a:rPr lang="ja-JP" altLang="en-US"/>
+              <a:t>最大でも</a:t>
+            </a:r>
+            <a:r>
+              <a:rPr lang="en-US" altLang="ja-JP"/>
+              <a:t>75%</a:t>
+            </a:r>
+            <a:r>
+              <a:rPr lang="ja-JP" altLang="en-US"/>
+              <a:t>の適正率</a:t>
+            </a:r>
+            <a:endParaRPr lang="en-US" altLang="ja-JP"/>
+          </a:p>
+        </p:txBody>
+      </p:sp>
+      <p:sp>
+        <p:nvSpPr>
+          <p:cNvPr id="12" name="テキスト ボックス 11">
+            <a:extLst>
+              <a:ext uri="{FF2B5EF4-FFF2-40B4-BE49-F238E27FC236}">
+                <a16:creationId xmlns:a16="http://schemas.microsoft.com/office/drawing/2014/main" id="{8880220B-4CFD-DE88-C97E-37E5DBC99497}"/>
+              </a:ext>
+            </a:extLst>
+          </p:cNvPr>
+          <p:cNvSpPr txBox="1"/>
+          <p:nvPr/>
+        </p:nvSpPr>
+        <p:spPr>
+          <a:xfrm>
+            <a:off x="766119" y="3749101"/>
+            <a:ext cx="3896496" cy="1200329"/>
+          </a:xfrm>
+          <a:prstGeom prst="rect">
+            <a:avLst/>
+          </a:prstGeom>
+          <a:noFill/>
+          <a:ln w="12700">
+            <a:solidFill>
+              <a:schemeClr val="tx1"/>
+            </a:solidFill>
+          </a:ln>
+        </p:spPr>
+        <p:txBody>
+          <a:bodyPr wrap="square" rtlCol="0">
+            <a:spAutoFit/>
+          </a:bodyPr>
+          <a:lstStyle/>
+          <a:p>
+            <a:r>
+              <a:rPr lang="ja-JP" altLang="en-US"/>
+              <a:t>指標（特徴化）の可能性</a:t>
+            </a:r>
+            <a:endParaRPr lang="en-US" altLang="ja-JP"/>
+          </a:p>
+          <a:p>
+            <a:pPr marL="285750" indent="-285750">
+              <a:buFont typeface="Arial" panose="020B0604020202020204" pitchFamily="34" charset="0"/>
+              <a:buChar char="•"/>
+            </a:pPr>
+            <a:r>
+              <a:rPr lang="ja-JP" altLang="en-US"/>
+              <a:t>地名決定の精度が低いことを考慮しても大学ごとの特徴を捉えているように見える</a:t>
+            </a:r>
+            <a:endParaRPr lang="en-US" altLang="ja-JP"/>
+          </a:p>
+        </p:txBody>
+      </p:sp>
+      <p:sp>
+        <p:nvSpPr>
+          <p:cNvPr id="4" name="テキスト ボックス 3">
+            <a:extLst>
+              <a:ext uri="{FF2B5EF4-FFF2-40B4-BE49-F238E27FC236}">
+                <a16:creationId xmlns:a16="http://schemas.microsoft.com/office/drawing/2014/main" id="{2A1EFCD4-D5E0-2B30-16D3-0C40E7A69E9A}"/>
+              </a:ext>
+            </a:extLst>
+          </p:cNvPr>
+          <p:cNvSpPr txBox="1"/>
+          <p:nvPr/>
+        </p:nvSpPr>
+        <p:spPr>
+          <a:xfrm>
+            <a:off x="766119" y="5188328"/>
+            <a:ext cx="3896496" cy="923330"/>
+          </a:xfrm>
+          <a:prstGeom prst="rect">
+            <a:avLst/>
+          </a:prstGeom>
+          <a:noFill/>
+          <a:ln w="12700">
+            <a:solidFill>
+              <a:schemeClr val="tx1"/>
+            </a:solidFill>
+          </a:ln>
+        </p:spPr>
+        <p:txBody>
+          <a:bodyPr wrap="square" rtlCol="0">
+            <a:spAutoFit/>
+          </a:bodyPr>
+          <a:lstStyle/>
+          <a:p>
+            <a:r>
+              <a:rPr kumimoji="1" lang="ja-JP" altLang="en-US"/>
+              <a:t>本研究の方法では</a:t>
+            </a:r>
+            <a:r>
+              <a:rPr kumimoji="1" lang="en-US" altLang="ja-JP"/>
+              <a:t>NER</a:t>
+            </a:r>
+            <a:r>
+              <a:rPr kumimoji="1" lang="ja-JP" altLang="en-US"/>
+              <a:t>にて抽出されない固有表現のリカバリには対応できない</a:t>
+            </a:r>
+          </a:p>
+        </p:txBody>
+      </p:sp>
+    </p:spTree>
+    <p:extLst>
+      <p:ext uri="{BB962C8B-B14F-4D97-AF65-F5344CB8AC3E}">
+        <p14:creationId xmlns:p14="http://schemas.microsoft.com/office/powerpoint/2010/main" val="1349135157"/>
+      </p:ext>
+    </p:extLst>
+  </p:cSld>
+  <p:clrMapOvr>
+    <a:masterClrMapping/>
+  </p:clrMapOvr>
+</p:sld>
+</file>
+
+<file path=ppt/slides/slide19.xml><?xml version="1.0" encoding="utf-8"?>
+<p:sld xmlns:a="http://schemas.openxmlformats.org/drawingml/2006/main" xmlns:r="http://schemas.openxmlformats.org/officeDocument/2006/relationships" xmlns:p="http://schemas.openxmlformats.org/presentationml/2006/main">
+  <p:cSld>
+    <p:spTree>
+      <p:nvGrpSpPr>
+        <p:cNvPr id="1" name=""/>
+        <p:cNvGrpSpPr/>
+        <p:nvPr/>
+      </p:nvGrpSpPr>
+      <p:grpSpPr>
+        <a:xfrm>
+          <a:off x="0" y="0"/>
+          <a:ext cx="0" cy="0"/>
+          <a:chOff x="0" y="0"/>
+          <a:chExt cx="0" cy="0"/>
+        </a:xfrm>
+      </p:grpSpPr>
+      <p:sp>
+        <p:nvSpPr>
+          <p:cNvPr id="2" name="タイトル 1">
+            <a:extLst>
+              <a:ext uri="{FF2B5EF4-FFF2-40B4-BE49-F238E27FC236}">
+                <a16:creationId xmlns:a16="http://schemas.microsoft.com/office/drawing/2014/main" id="{44C3CAF5-F22B-1677-3DB3-86998CD82432}"/>
+              </a:ext>
+            </a:extLst>
+          </p:cNvPr>
+          <p:cNvSpPr>
+            <a:spLocks noGrp="1"/>
+          </p:cNvSpPr>
+          <p:nvPr>
+            <p:ph type="title"/>
+          </p:nvPr>
+        </p:nvSpPr>
+        <p:spPr>
+          <a:xfrm>
+            <a:off x="838200" y="2766218"/>
+            <a:ext cx="10515600" cy="1325563"/>
+          </a:xfrm>
+        </p:spPr>
+        <p:txBody>
+          <a:bodyPr/>
+          <a:lstStyle/>
+          <a:p>
+            <a:pPr algn="ctr"/>
+            <a:r>
+              <a:rPr kumimoji="1" lang="ja-JP" altLang="en-US"/>
+              <a:t>以下、旧スライド</a:t>
+            </a:r>
+          </a:p>
+        </p:txBody>
+      </p:sp>
+    </p:spTree>
+    <p:extLst>
+      <p:ext uri="{BB962C8B-B14F-4D97-AF65-F5344CB8AC3E}">
+        <p14:creationId xmlns:p14="http://schemas.microsoft.com/office/powerpoint/2010/main" val="4055154059"/>
+      </p:ext>
+    </p:extLst>
+  </p:cSld>
+  <p:clrMapOvr>
+    <a:masterClrMapping/>
+  </p:clrMapOvr>
+</p:sld>
+</file>
+
 <file path=ppt/slides/slide2.xml><?xml version="1.0" encoding="utf-8"?>
+<p:sld xmlns:a="http://schemas.openxmlformats.org/drawingml/2006/main" xmlns:r="http://schemas.openxmlformats.org/officeDocument/2006/relationships" xmlns:p="http://schemas.openxmlformats.org/presentationml/2006/main">
+  <p:cSld>
+    <p:spTree>
+      <p:nvGrpSpPr>
+        <p:cNvPr id="1" name="">
+          <a:extLst>
+            <a:ext uri="{FF2B5EF4-FFF2-40B4-BE49-F238E27FC236}">
+              <a16:creationId xmlns:a16="http://schemas.microsoft.com/office/drawing/2014/main" id="{EFD64894-CE9F-00B8-15E7-F46738BD4690}"/>
+            </a:ext>
+          </a:extLst>
+        </p:cNvPr>
+        <p:cNvGrpSpPr/>
+        <p:nvPr/>
+      </p:nvGrpSpPr>
+      <p:grpSpPr>
+        <a:xfrm>
+          <a:off x="0" y="0"/>
+          <a:ext cx="0" cy="0"/>
+          <a:chOff x="0" y="0"/>
+          <a:chExt cx="0" cy="0"/>
+        </a:xfrm>
+      </p:grpSpPr>
+      <p:sp>
+        <p:nvSpPr>
+          <p:cNvPr id="2" name="タイトル 1">
+            <a:extLst>
+              <a:ext uri="{FF2B5EF4-FFF2-40B4-BE49-F238E27FC236}">
+                <a16:creationId xmlns:a16="http://schemas.microsoft.com/office/drawing/2014/main" id="{820813A6-2A40-7505-3C92-84A0AC349D2B}"/>
+              </a:ext>
+            </a:extLst>
+          </p:cNvPr>
+          <p:cNvSpPr>
+            <a:spLocks noGrp="1"/>
+          </p:cNvSpPr>
+          <p:nvPr>
+            <p:ph type="title"/>
+          </p:nvPr>
+        </p:nvSpPr>
+        <p:spPr>
+          <a:xfrm>
+            <a:off x="0" y="1"/>
+            <a:ext cx="12192000" cy="577516"/>
+          </a:xfrm>
+          <a:solidFill>
+            <a:schemeClr val="bg1">
+              <a:lumMod val="85000"/>
+            </a:schemeClr>
+          </a:solidFill>
+        </p:spPr>
+        <p:txBody>
+          <a:bodyPr>
+            <a:normAutofit fontScale="90000"/>
+          </a:bodyPr>
+          <a:lstStyle/>
+          <a:p>
+            <a:r>
+              <a:rPr kumimoji="1" lang="ja-JP" altLang="en-US" sz="3600" dirty="0"/>
+              <a:t>背景（</a:t>
+            </a:r>
+            <a:r>
+              <a:rPr kumimoji="1" lang="en-US" altLang="ja-JP" sz="3600" dirty="0"/>
+              <a:t>1</a:t>
+            </a:r>
+            <a:r>
+              <a:rPr kumimoji="1" lang="ja-JP" altLang="en-US" sz="3600" dirty="0"/>
+              <a:t>）</a:t>
+            </a:r>
+          </a:p>
+        </p:txBody>
+      </p:sp>
+      <p:sp>
+        <p:nvSpPr>
+          <p:cNvPr id="5" name="テキスト ボックス 4">
+            <a:extLst>
+              <a:ext uri="{FF2B5EF4-FFF2-40B4-BE49-F238E27FC236}">
+                <a16:creationId xmlns:a16="http://schemas.microsoft.com/office/drawing/2014/main" id="{FC072985-171F-5D77-276A-30C4206B2E62}"/>
+              </a:ext>
+            </a:extLst>
+          </p:cNvPr>
+          <p:cNvSpPr txBox="1"/>
+          <p:nvPr/>
+        </p:nvSpPr>
+        <p:spPr>
+          <a:xfrm>
+            <a:off x="-1" y="577517"/>
+            <a:ext cx="12192000" cy="6463308"/>
+          </a:xfrm>
+          <a:prstGeom prst="rect">
+            <a:avLst/>
+          </a:prstGeom>
+          <a:noFill/>
+        </p:spPr>
+        <p:txBody>
+          <a:bodyPr wrap="square" rtlCol="0">
+            <a:spAutoFit/>
+          </a:bodyPr>
+          <a:lstStyle/>
+          <a:p>
+            <a:r>
+              <a:rPr lang="ja-JP" altLang="en-US" b="1" dirty="0"/>
+              <a:t>◾️日本の高等教育を取り巻く外部環境</a:t>
+            </a:r>
+            <a:endParaRPr lang="en-US" altLang="ja-JP" b="1" dirty="0"/>
+          </a:p>
+          <a:p>
+            <a:r>
+              <a:rPr lang="ja-JP" altLang="en-US" dirty="0"/>
+              <a:t>・少子化に伴う高等教育入学人口の減少</a:t>
+            </a:r>
+            <a:endParaRPr lang="en-US" altLang="ja-JP" dirty="0"/>
+          </a:p>
+          <a:p>
+            <a:r>
+              <a:rPr lang="ja-JP" altLang="en-US" dirty="0"/>
+              <a:t>・国際的な研究競争力強化の必要性</a:t>
+            </a:r>
+            <a:endParaRPr lang="en-US" altLang="ja-JP" dirty="0"/>
+          </a:p>
+          <a:p>
+            <a:r>
+              <a:rPr lang="ja-JP" altLang="en-US" dirty="0"/>
+              <a:t>・地域における活力の低下</a:t>
+            </a:r>
+            <a:endParaRPr lang="en-US" altLang="ja-JP" dirty="0"/>
+          </a:p>
+          <a:p>
+            <a:endParaRPr lang="en-US" altLang="ja-JP" dirty="0"/>
+          </a:p>
+          <a:p>
+            <a:r>
+              <a:rPr lang="ja-JP" altLang="en-US" b="1" dirty="0"/>
+              <a:t>◾️国の高等教育政策</a:t>
+            </a:r>
+            <a:endParaRPr lang="en-US" altLang="ja-JP" b="1" dirty="0"/>
+          </a:p>
+          <a:p>
+            <a:r>
+              <a:rPr lang="ja-JP" altLang="en-US" dirty="0"/>
+              <a:t>・大学の再編統合による規模縮小</a:t>
+            </a:r>
+            <a:endParaRPr lang="en-US" altLang="ja-JP" dirty="0"/>
+          </a:p>
+          <a:p>
+            <a:r>
+              <a:rPr lang="ja-JP" altLang="en-US" dirty="0"/>
+              <a:t>・大学の機能分化（</a:t>
+            </a:r>
+            <a:r>
+              <a:rPr lang="en-US" altLang="ja-JP" dirty="0"/>
+              <a:t>SGU</a:t>
+            </a:r>
+            <a:r>
+              <a:rPr lang="ja-JP" altLang="en-US" dirty="0"/>
+              <a:t>、地域の知の中核、専門大学）</a:t>
+            </a:r>
+            <a:endParaRPr lang="en-US" altLang="ja-JP" dirty="0"/>
+          </a:p>
+          <a:p>
+            <a:r>
+              <a:rPr lang="ja-JP" altLang="en-US" dirty="0"/>
+              <a:t>によるメリハリある高等教育発展の構想</a:t>
+            </a:r>
+            <a:endParaRPr lang="en-US" altLang="ja-JP" dirty="0"/>
+          </a:p>
+          <a:p>
+            <a:endParaRPr lang="en-US" altLang="ja-JP" dirty="0"/>
+          </a:p>
+          <a:p>
+            <a:r>
+              <a:rPr lang="ja-JP" altLang="en-US" b="1" dirty="0"/>
+              <a:t>◾️大学評価における課題</a:t>
+            </a:r>
+            <a:endParaRPr lang="en-US" altLang="ja-JP" b="1" dirty="0"/>
+          </a:p>
+          <a:p>
+            <a:r>
+              <a:rPr lang="ja-JP" altLang="en-US" dirty="0"/>
+              <a:t>・論文の被引用状況に基づく評価指標の過大視</a:t>
+            </a:r>
+            <a:endParaRPr lang="en-US" altLang="ja-JP" dirty="0"/>
+          </a:p>
+          <a:p>
+            <a:r>
+              <a:rPr lang="ja-JP" altLang="en-US" dirty="0"/>
+              <a:t>・大学の地域力を計量化可能な評価指標の不在</a:t>
+            </a:r>
+            <a:endParaRPr lang="en-US" altLang="ja-JP" dirty="0"/>
+          </a:p>
+          <a:p>
+            <a:r>
+              <a:rPr lang="ja-JP" altLang="en-US" dirty="0"/>
+              <a:t>→結果として、「地域の知の中核」として発展すべき大学を抽出し、評価、資金投下できない。</a:t>
+            </a:r>
+            <a:endParaRPr lang="en-US" altLang="ja-JP" dirty="0"/>
+          </a:p>
+          <a:p>
+            <a:endParaRPr lang="en-US" altLang="ja-JP" dirty="0"/>
+          </a:p>
+          <a:p>
+            <a:r>
+              <a:rPr lang="ja-JP" altLang="en-US" b="1" dirty="0"/>
+              <a:t>◾️鹿児島県の高等教育の現状</a:t>
+            </a:r>
+            <a:endParaRPr lang="en-US" altLang="ja-JP" b="1" dirty="0"/>
+          </a:p>
+          <a:p>
+            <a:r>
+              <a:rPr lang="ja-JP" altLang="en-US" dirty="0"/>
+              <a:t>・県内に６総合大学（国立大２（鹿大、鹿屋体育大）、私立大４）</a:t>
+            </a:r>
+            <a:endParaRPr lang="en-US" altLang="ja-JP" dirty="0"/>
+          </a:p>
+          <a:p>
+            <a:r>
+              <a:rPr lang="ja-JP" altLang="en-US" dirty="0"/>
+              <a:t>・鹿児島大学は、県内唯一の国立総合大学として既に「地域の知の拠点」として機能</a:t>
+            </a:r>
+            <a:endParaRPr lang="en-US" altLang="ja-JP" dirty="0"/>
+          </a:p>
+          <a:p>
+            <a:r>
+              <a:rPr lang="ja-JP" altLang="en-US" dirty="0"/>
+              <a:t>・鹿大教員は、幅広く地域活動や地域に関わる研究を展開</a:t>
+            </a:r>
+            <a:endParaRPr lang="en-US" altLang="ja-JP" dirty="0"/>
+          </a:p>
+          <a:p>
+            <a:r>
+              <a:rPr lang="ja-JP" altLang="en-US" dirty="0"/>
+              <a:t>→ただし、その地域活動は十分に評価されていない。</a:t>
+            </a:r>
+            <a:endParaRPr lang="en-US" altLang="ja-JP" dirty="0"/>
+          </a:p>
+          <a:p>
+            <a:endParaRPr lang="en-US" altLang="ja-JP" dirty="0"/>
+          </a:p>
+          <a:p>
+            <a:r>
+              <a:rPr lang="ja-JP" altLang="en-US" dirty="0"/>
+              <a:t>⇒ </a:t>
+            </a:r>
+            <a:r>
+              <a:rPr lang="ja-JP" altLang="en-US" sz="2000" u="sng" dirty="0"/>
+              <a:t>大学の地域活動の見える化、評価指標の形成が必要</a:t>
+            </a:r>
+            <a:endParaRPr lang="en-US" altLang="ja-JP" sz="2000" u="sng" dirty="0"/>
+          </a:p>
+          <a:p>
+            <a:endParaRPr lang="ja-JP" altLang="en-US" dirty="0"/>
+          </a:p>
+        </p:txBody>
+      </p:sp>
+    </p:spTree>
+    <p:extLst>
+      <p:ext uri="{BB962C8B-B14F-4D97-AF65-F5344CB8AC3E}">
+        <p14:creationId xmlns:p14="http://schemas.microsoft.com/office/powerpoint/2010/main" val="4253336031"/>
+      </p:ext>
+    </p:extLst>
+  </p:cSld>
+  <p:clrMapOvr>
+    <a:masterClrMapping/>
+  </p:clrMapOvr>
+</p:sld>
+</file>
+
+<file path=ppt/slides/slide20.xml><?xml version="1.0" encoding="utf-8"?>
 <p:sld xmlns:a="http://schemas.openxmlformats.org/drawingml/2006/main" xmlns:r="http://schemas.openxmlformats.org/officeDocument/2006/relationships" xmlns:p="http://schemas.openxmlformats.org/presentationml/2006/main">
   <p:cSld>
     <p:spTree>
@@ -11706,7 +10653,7 @@
     </p:spTree>
     <p:extLst>
       <p:ext uri="{BB962C8B-B14F-4D97-AF65-F5344CB8AC3E}">
-        <p14:creationId xmlns:p14="http://schemas.microsoft.com/office/powerpoint/2010/main" val="623107362"/>
+        <p14:creationId xmlns:p14="http://schemas.microsoft.com/office/powerpoint/2010/main" val="2193463348"/>
       </p:ext>
     </p:extLst>
   </p:cSld>
@@ -11716,476 +10663,7 @@
 </p:sld>
 </file>
 
-<file path=ppt/slides/slide20.xml><?xml version="1.0" encoding="utf-8"?>
-<p:sld xmlns:a="http://schemas.openxmlformats.org/drawingml/2006/main" xmlns:r="http://schemas.openxmlformats.org/officeDocument/2006/relationships" xmlns:p="http://schemas.openxmlformats.org/presentationml/2006/main">
-  <p:cSld>
-    <p:spTree>
-      <p:nvGrpSpPr>
-        <p:cNvPr id="1" name="">
-          <a:extLst>
-            <a:ext uri="{FF2B5EF4-FFF2-40B4-BE49-F238E27FC236}">
-              <a16:creationId xmlns:a16="http://schemas.microsoft.com/office/drawing/2014/main" id="{88C9DA51-A403-7873-5F7E-B6D6929B0EB2}"/>
-            </a:ext>
-          </a:extLst>
-        </p:cNvPr>
-        <p:cNvGrpSpPr/>
-        <p:nvPr/>
-      </p:nvGrpSpPr>
-      <p:grpSpPr>
-        <a:xfrm>
-          <a:off x="0" y="0"/>
-          <a:ext cx="0" cy="0"/>
-          <a:chOff x="0" y="0"/>
-          <a:chExt cx="0" cy="0"/>
-        </a:xfrm>
-      </p:grpSpPr>
-      <p:sp>
-        <p:nvSpPr>
-          <p:cNvPr id="2" name="タイトル 1">
-            <a:extLst>
-              <a:ext uri="{FF2B5EF4-FFF2-40B4-BE49-F238E27FC236}">
-                <a16:creationId xmlns:a16="http://schemas.microsoft.com/office/drawing/2014/main" id="{3C6B37F8-D551-CB67-7D8F-C28C1E761DA6}"/>
-              </a:ext>
-            </a:extLst>
-          </p:cNvPr>
-          <p:cNvSpPr>
-            <a:spLocks noGrp="1"/>
-          </p:cNvSpPr>
-          <p:nvPr>
-            <p:ph type="title"/>
-          </p:nvPr>
-        </p:nvSpPr>
-        <p:spPr>
-          <a:xfrm>
-            <a:off x="0" y="1"/>
-            <a:ext cx="12192000" cy="577516"/>
-          </a:xfrm>
-          <a:solidFill>
-            <a:schemeClr val="bg1">
-              <a:lumMod val="85000"/>
-            </a:schemeClr>
-          </a:solidFill>
-        </p:spPr>
-        <p:txBody>
-          <a:bodyPr>
-            <a:normAutofit fontScale="90000"/>
-          </a:bodyPr>
-          <a:lstStyle/>
-          <a:p>
-            <a:r>
-              <a:rPr kumimoji="1" lang="ja-JP" altLang="en-US" sz="3600"/>
-              <a:t>まとめ</a:t>
-            </a:r>
-          </a:p>
-        </p:txBody>
-      </p:sp>
-      <p:sp>
-        <p:nvSpPr>
-          <p:cNvPr id="3" name="テキスト ボックス 2">
-            <a:extLst>
-              <a:ext uri="{FF2B5EF4-FFF2-40B4-BE49-F238E27FC236}">
-                <a16:creationId xmlns:a16="http://schemas.microsoft.com/office/drawing/2014/main" id="{ECA3ACB1-7262-E3EE-C4CE-FD8716E60AC9}"/>
-              </a:ext>
-            </a:extLst>
-          </p:cNvPr>
-          <p:cNvSpPr txBox="1"/>
-          <p:nvPr/>
-        </p:nvSpPr>
-        <p:spPr>
-          <a:xfrm>
-            <a:off x="766119" y="816415"/>
-            <a:ext cx="3896497" cy="646331"/>
-          </a:xfrm>
-          <a:prstGeom prst="rect">
-            <a:avLst/>
-          </a:prstGeom>
-          <a:noFill/>
-          <a:ln w="12700">
-            <a:solidFill>
-              <a:schemeClr val="tx1"/>
-            </a:solidFill>
-          </a:ln>
-        </p:spPr>
-        <p:txBody>
-          <a:bodyPr wrap="square" rtlCol="0">
-            <a:spAutoFit/>
-          </a:bodyPr>
-          <a:lstStyle/>
-          <a:p>
-            <a:r>
-              <a:rPr lang="en-US" altLang="ja-JP"/>
-              <a:t>NER</a:t>
-            </a:r>
-            <a:r>
-              <a:rPr lang="ja-JP" altLang="en-US"/>
-              <a:t>と判定との差が大きい</a:t>
-            </a:r>
-            <a:endParaRPr lang="en-US" altLang="ja-JP"/>
-          </a:p>
-          <a:p>
-            <a:pPr marL="285750" indent="-285750">
-              <a:buFont typeface="Arial" panose="020B0604020202020204" pitchFamily="34" charset="0"/>
-              <a:buChar char="•"/>
-            </a:pPr>
-            <a:r>
-              <a:rPr kumimoji="1" lang="en-US" altLang="ja-JP"/>
-              <a:t>7%~34%</a:t>
-            </a:r>
-          </a:p>
-        </p:txBody>
-      </p:sp>
-      <p:sp>
-        <p:nvSpPr>
-          <p:cNvPr id="7" name="テキスト ボックス 6">
-            <a:extLst>
-              <a:ext uri="{FF2B5EF4-FFF2-40B4-BE49-F238E27FC236}">
-                <a16:creationId xmlns:a16="http://schemas.microsoft.com/office/drawing/2014/main" id="{9E2E33CE-9C6A-5290-EC10-6F434CA0EA20}"/>
-              </a:ext>
-            </a:extLst>
-          </p:cNvPr>
-          <p:cNvSpPr txBox="1"/>
-          <p:nvPr/>
-        </p:nvSpPr>
-        <p:spPr>
-          <a:xfrm>
-            <a:off x="6033408" y="824566"/>
-            <a:ext cx="5793112" cy="2585323"/>
-          </a:xfrm>
-          <a:prstGeom prst="rect">
-            <a:avLst/>
-          </a:prstGeom>
-          <a:noFill/>
-        </p:spPr>
-        <p:txBody>
-          <a:bodyPr wrap="square" rtlCol="0">
-            <a:spAutoFit/>
-          </a:bodyPr>
-          <a:lstStyle/>
-          <a:p>
-            <a:r>
-              <a:rPr kumimoji="1" lang="ja-JP" altLang="en-US"/>
-              <a:t>日本語</a:t>
-            </a:r>
-            <a:r>
-              <a:rPr kumimoji="1" lang="en-US" altLang="ja-JP"/>
-              <a:t>NER</a:t>
-            </a:r>
-            <a:r>
-              <a:rPr kumimoji="1" lang="ja-JP" altLang="en-US"/>
-              <a:t>の</a:t>
-            </a:r>
-            <a:r>
-              <a:rPr kumimoji="1" lang="en-US" altLang="ja-JP"/>
-              <a:t>AI</a:t>
-            </a:r>
-            <a:r>
-              <a:rPr kumimoji="1" lang="ja-JP" altLang="en-US"/>
-              <a:t>利用に関して</a:t>
-            </a:r>
-            <a:endParaRPr kumimoji="1" lang="en-US" altLang="ja-JP"/>
-          </a:p>
-          <a:p>
-            <a:pPr marL="285750" indent="-285750">
-              <a:buFont typeface="Arial" panose="020B0604020202020204" pitchFamily="34" charset="0"/>
-              <a:buChar char="•"/>
-            </a:pPr>
-            <a:r>
-              <a:rPr kumimoji="1" lang="ja-JP" altLang="en-US"/>
-              <a:t>形態素解析のみでの解決は難しい場合に対応できる可能性はある</a:t>
-            </a:r>
-            <a:endParaRPr kumimoji="1" lang="en-US" altLang="ja-JP"/>
-          </a:p>
-          <a:p>
-            <a:pPr marL="285750" indent="-285750">
-              <a:buFont typeface="Arial" panose="020B0604020202020204" pitchFamily="34" charset="0"/>
-              <a:buChar char="•"/>
-            </a:pPr>
-            <a:r>
-              <a:rPr lang="ja-JP" altLang="en-US"/>
-              <a:t>非常に細やかなルールの設定とエキスパートとしての訓練が必要であることを示唆している</a:t>
-            </a:r>
-            <a:endParaRPr lang="en-US" altLang="ja-JP"/>
-          </a:p>
-          <a:p>
-            <a:endParaRPr lang="en-US" altLang="ja-JP"/>
-          </a:p>
-          <a:p>
-            <a:r>
-              <a:rPr lang="en-US" altLang="ja-JP"/>
-              <a:t>AI</a:t>
-            </a:r>
-            <a:r>
-              <a:rPr lang="ja-JP" altLang="en-US"/>
-              <a:t>特有の問題</a:t>
-            </a:r>
-          </a:p>
-          <a:p>
-            <a:pPr marL="285750" indent="-285750">
-              <a:buFont typeface="Arial" panose="020B0604020202020204" pitchFamily="34" charset="0"/>
-              <a:buChar char="•"/>
-            </a:pPr>
-            <a:r>
-              <a:rPr kumimoji="1" lang="ja-JP" altLang="en-US"/>
-              <a:t>本研究は、</a:t>
-            </a:r>
-            <a:r>
-              <a:rPr kumimoji="1" lang="en-US" altLang="ja-JP"/>
-              <a:t>AI</a:t>
-            </a:r>
-            <a:r>
-              <a:rPr kumimoji="1" lang="ja-JP" altLang="en-US"/>
-              <a:t>に関しては判定よりも「出力形式」が問題となったケースであった</a:t>
-            </a:r>
-          </a:p>
-        </p:txBody>
-      </p:sp>
-      <p:sp>
-        <p:nvSpPr>
-          <p:cNvPr id="9" name="テキスト ボックス 8">
-            <a:extLst>
-              <a:ext uri="{FF2B5EF4-FFF2-40B4-BE49-F238E27FC236}">
-                <a16:creationId xmlns:a16="http://schemas.microsoft.com/office/drawing/2014/main" id="{E1928388-C9F5-89BD-8736-99A9A7963599}"/>
-              </a:ext>
-            </a:extLst>
-          </p:cNvPr>
-          <p:cNvSpPr txBox="1"/>
-          <p:nvPr/>
-        </p:nvSpPr>
-        <p:spPr>
-          <a:xfrm>
-            <a:off x="766119" y="1701644"/>
-            <a:ext cx="3896497" cy="923330"/>
-          </a:xfrm>
-          <a:prstGeom prst="rect">
-            <a:avLst/>
-          </a:prstGeom>
-          <a:noFill/>
-          <a:ln w="12700">
-            <a:solidFill>
-              <a:schemeClr val="tx1"/>
-            </a:solidFill>
-          </a:ln>
-        </p:spPr>
-        <p:txBody>
-          <a:bodyPr wrap="square" rtlCol="0">
-            <a:spAutoFit/>
-          </a:bodyPr>
-          <a:lstStyle/>
-          <a:p>
-            <a:r>
-              <a:rPr lang="ja-JP" altLang="en-US"/>
-              <a:t>判定（者）間でも差が大きい</a:t>
-            </a:r>
-            <a:endParaRPr lang="en-US" altLang="ja-JP"/>
-          </a:p>
-          <a:p>
-            <a:pPr marL="285750" indent="-285750">
-              <a:buFont typeface="Arial" panose="020B0604020202020204" pitchFamily="34" charset="0"/>
-              <a:buChar char="•"/>
-            </a:pPr>
-            <a:r>
-              <a:rPr lang="ja-JP" altLang="en-US"/>
-              <a:t>最大</a:t>
-            </a:r>
-            <a:r>
-              <a:rPr lang="en-US" altLang="ja-JP"/>
-              <a:t>34%</a:t>
-            </a:r>
-          </a:p>
-          <a:p>
-            <a:pPr marL="285750" indent="-285750">
-              <a:buFont typeface="Arial" panose="020B0604020202020204" pitchFamily="34" charset="0"/>
-              <a:buChar char="•"/>
-            </a:pPr>
-            <a:r>
-              <a:rPr lang="ja-JP" altLang="en-US"/>
-              <a:t>人と人でも</a:t>
-            </a:r>
-            <a:r>
-              <a:rPr lang="en-US" altLang="ja-JP"/>
-              <a:t>7%</a:t>
-            </a:r>
-          </a:p>
-        </p:txBody>
-      </p:sp>
-      <p:sp>
-        <p:nvSpPr>
-          <p:cNvPr id="11" name="テキスト ボックス 10">
-            <a:extLst>
-              <a:ext uri="{FF2B5EF4-FFF2-40B4-BE49-F238E27FC236}">
-                <a16:creationId xmlns:a16="http://schemas.microsoft.com/office/drawing/2014/main" id="{F601E439-4975-999E-D8D5-C26D7DD78E5A}"/>
-              </a:ext>
-            </a:extLst>
-          </p:cNvPr>
-          <p:cNvSpPr txBox="1"/>
-          <p:nvPr/>
-        </p:nvSpPr>
-        <p:spPr>
-          <a:xfrm>
-            <a:off x="766119" y="2863872"/>
-            <a:ext cx="3896496" cy="646331"/>
-          </a:xfrm>
-          <a:prstGeom prst="rect">
-            <a:avLst/>
-          </a:prstGeom>
-          <a:noFill/>
-          <a:ln w="12700">
-            <a:solidFill>
-              <a:schemeClr val="tx1"/>
-            </a:solidFill>
-          </a:ln>
-        </p:spPr>
-        <p:txBody>
-          <a:bodyPr wrap="square" rtlCol="0">
-            <a:spAutoFit/>
-          </a:bodyPr>
-          <a:lstStyle/>
-          <a:p>
-            <a:r>
-              <a:rPr lang="en-US" altLang="ja-JP"/>
-              <a:t>AI</a:t>
-            </a:r>
-            <a:r>
-              <a:rPr lang="ja-JP" altLang="en-US"/>
-              <a:t>の出力形式が課題</a:t>
-            </a:r>
-            <a:endParaRPr lang="en-US" altLang="ja-JP"/>
-          </a:p>
-          <a:p>
-            <a:pPr marL="285750" indent="-285750">
-              <a:buFont typeface="Arial" panose="020B0604020202020204" pitchFamily="34" charset="0"/>
-              <a:buChar char="•"/>
-            </a:pPr>
-            <a:r>
-              <a:rPr lang="ja-JP" altLang="en-US"/>
-              <a:t>最大でも</a:t>
-            </a:r>
-            <a:r>
-              <a:rPr lang="en-US" altLang="ja-JP"/>
-              <a:t>75%</a:t>
-            </a:r>
-            <a:r>
-              <a:rPr lang="ja-JP" altLang="en-US"/>
-              <a:t>の適正率</a:t>
-            </a:r>
-            <a:endParaRPr lang="en-US" altLang="ja-JP"/>
-          </a:p>
-        </p:txBody>
-      </p:sp>
-      <p:sp>
-        <p:nvSpPr>
-          <p:cNvPr id="12" name="テキスト ボックス 11">
-            <a:extLst>
-              <a:ext uri="{FF2B5EF4-FFF2-40B4-BE49-F238E27FC236}">
-                <a16:creationId xmlns:a16="http://schemas.microsoft.com/office/drawing/2014/main" id="{8880220B-4CFD-DE88-C97E-37E5DBC99497}"/>
-              </a:ext>
-            </a:extLst>
-          </p:cNvPr>
-          <p:cNvSpPr txBox="1"/>
-          <p:nvPr/>
-        </p:nvSpPr>
-        <p:spPr>
-          <a:xfrm>
-            <a:off x="766119" y="3749101"/>
-            <a:ext cx="3896496" cy="1200329"/>
-          </a:xfrm>
-          <a:prstGeom prst="rect">
-            <a:avLst/>
-          </a:prstGeom>
-          <a:noFill/>
-          <a:ln w="12700">
-            <a:solidFill>
-              <a:schemeClr val="tx1"/>
-            </a:solidFill>
-          </a:ln>
-        </p:spPr>
-        <p:txBody>
-          <a:bodyPr wrap="square" rtlCol="0">
-            <a:spAutoFit/>
-          </a:bodyPr>
-          <a:lstStyle/>
-          <a:p>
-            <a:r>
-              <a:rPr lang="ja-JP" altLang="en-US"/>
-              <a:t>指標（特徴化）の可能性</a:t>
-            </a:r>
-            <a:endParaRPr lang="en-US" altLang="ja-JP"/>
-          </a:p>
-          <a:p>
-            <a:pPr marL="285750" indent="-285750">
-              <a:buFont typeface="Arial" panose="020B0604020202020204" pitchFamily="34" charset="0"/>
-              <a:buChar char="•"/>
-            </a:pPr>
-            <a:r>
-              <a:rPr lang="ja-JP" altLang="en-US"/>
-              <a:t>地名決定の精度が低いことを考慮しても大学ごとの特徴を捉えているように見える</a:t>
-            </a:r>
-            <a:endParaRPr lang="en-US" altLang="ja-JP"/>
-          </a:p>
-        </p:txBody>
-      </p:sp>
-      <p:sp>
-        <p:nvSpPr>
-          <p:cNvPr id="4" name="テキスト ボックス 3">
-            <a:extLst>
-              <a:ext uri="{FF2B5EF4-FFF2-40B4-BE49-F238E27FC236}">
-                <a16:creationId xmlns:a16="http://schemas.microsoft.com/office/drawing/2014/main" id="{2A1EFCD4-D5E0-2B30-16D3-0C40E7A69E9A}"/>
-              </a:ext>
-            </a:extLst>
-          </p:cNvPr>
-          <p:cNvSpPr txBox="1"/>
-          <p:nvPr/>
-        </p:nvSpPr>
-        <p:spPr>
-          <a:xfrm>
-            <a:off x="766119" y="5188328"/>
-            <a:ext cx="3896496" cy="923330"/>
-          </a:xfrm>
-          <a:prstGeom prst="rect">
-            <a:avLst/>
-          </a:prstGeom>
-          <a:noFill/>
-          <a:ln w="12700">
-            <a:solidFill>
-              <a:schemeClr val="tx1"/>
-            </a:solidFill>
-          </a:ln>
-        </p:spPr>
-        <p:txBody>
-          <a:bodyPr wrap="square" rtlCol="0">
-            <a:spAutoFit/>
-          </a:bodyPr>
-          <a:lstStyle/>
-          <a:p>
-            <a:r>
-              <a:rPr kumimoji="1" lang="ja-JP" altLang="en-US"/>
-              <a:t>本研究の方法では</a:t>
-            </a:r>
-            <a:r>
-              <a:rPr kumimoji="1" lang="en-US" altLang="ja-JP"/>
-              <a:t>NER</a:t>
-            </a:r>
-            <a:r>
-              <a:rPr kumimoji="1" lang="ja-JP" altLang="en-US"/>
-              <a:t>にて抽出されない固有表現のリカバリには対応できない</a:t>
-            </a:r>
-          </a:p>
-        </p:txBody>
-      </p:sp>
-    </p:spTree>
-    <p:extLst>
-      <p:ext uri="{BB962C8B-B14F-4D97-AF65-F5344CB8AC3E}">
-        <p14:creationId xmlns:p14="http://schemas.microsoft.com/office/powerpoint/2010/main" val="1349135157"/>
-      </p:ext>
-    </p:extLst>
-  </p:cSld>
-  <p:clrMapOvr>
-    <a:masterClrMapping/>
-  </p:clrMapOvr>
-</p:sld>
-</file>
-
-<file path=ppt/slides/slide3.xml><?xml version="1.0" encoding="utf-8"?>
+<file path=ppt/slides/slide21.xml><?xml version="1.0" encoding="utf-8"?>
 <p:sld xmlns:a="http://schemas.openxmlformats.org/drawingml/2006/main" xmlns:r="http://schemas.openxmlformats.org/officeDocument/2006/relationships" xmlns:p="http://schemas.openxmlformats.org/presentationml/2006/main">
   <p:cSld>
     <p:spTree>
@@ -15628,7 +14106,7 @@
     </p:spTree>
     <p:extLst>
       <p:ext uri="{BB962C8B-B14F-4D97-AF65-F5344CB8AC3E}">
-        <p14:creationId xmlns:p14="http://schemas.microsoft.com/office/powerpoint/2010/main" val="418477370"/>
+        <p14:creationId xmlns:p14="http://schemas.microsoft.com/office/powerpoint/2010/main" val="4267467953"/>
       </p:ext>
     </p:extLst>
   </p:cSld>
@@ -15638,273 +14116,7 @@
 </p:sld>
 </file>
 
-<file path=ppt/slides/slide4.xml><?xml version="1.0" encoding="utf-8"?>
-<p:sld xmlns:a="http://schemas.openxmlformats.org/drawingml/2006/main" xmlns:r="http://schemas.openxmlformats.org/officeDocument/2006/relationships" xmlns:p="http://schemas.openxmlformats.org/presentationml/2006/main">
-  <p:cSld>
-    <p:spTree>
-      <p:nvGrpSpPr>
-        <p:cNvPr id="1" name="">
-          <a:extLst>
-            <a:ext uri="{FF2B5EF4-FFF2-40B4-BE49-F238E27FC236}">
-              <a16:creationId xmlns:a16="http://schemas.microsoft.com/office/drawing/2014/main" id="{EFD64894-CE9F-00B8-15E7-F46738BD4690}"/>
-            </a:ext>
-          </a:extLst>
-        </p:cNvPr>
-        <p:cNvGrpSpPr/>
-        <p:nvPr/>
-      </p:nvGrpSpPr>
-      <p:grpSpPr>
-        <a:xfrm>
-          <a:off x="0" y="0"/>
-          <a:ext cx="0" cy="0"/>
-          <a:chOff x="0" y="0"/>
-          <a:chExt cx="0" cy="0"/>
-        </a:xfrm>
-      </p:grpSpPr>
-      <p:sp>
-        <p:nvSpPr>
-          <p:cNvPr id="2" name="タイトル 1">
-            <a:extLst>
-              <a:ext uri="{FF2B5EF4-FFF2-40B4-BE49-F238E27FC236}">
-                <a16:creationId xmlns:a16="http://schemas.microsoft.com/office/drawing/2014/main" id="{820813A6-2A40-7505-3C92-84A0AC349D2B}"/>
-              </a:ext>
-            </a:extLst>
-          </p:cNvPr>
-          <p:cNvSpPr>
-            <a:spLocks noGrp="1"/>
-          </p:cNvSpPr>
-          <p:nvPr>
-            <p:ph type="title"/>
-          </p:nvPr>
-        </p:nvSpPr>
-        <p:spPr>
-          <a:xfrm>
-            <a:off x="0" y="1"/>
-            <a:ext cx="12192000" cy="577516"/>
-          </a:xfrm>
-          <a:solidFill>
-            <a:schemeClr val="bg1">
-              <a:lumMod val="85000"/>
-            </a:schemeClr>
-          </a:solidFill>
-        </p:spPr>
-        <p:txBody>
-          <a:bodyPr>
-            <a:normAutofit fontScale="90000"/>
-          </a:bodyPr>
-          <a:lstStyle/>
-          <a:p>
-            <a:r>
-              <a:rPr kumimoji="1" lang="ja-JP" altLang="en-US" sz="3600" dirty="0"/>
-              <a:t>背景（</a:t>
-            </a:r>
-            <a:r>
-              <a:rPr kumimoji="1" lang="en-US" altLang="ja-JP" sz="3600" dirty="0"/>
-              <a:t>1</a:t>
-            </a:r>
-            <a:r>
-              <a:rPr kumimoji="1" lang="ja-JP" altLang="en-US" sz="3600" dirty="0"/>
-              <a:t>）</a:t>
-            </a:r>
-          </a:p>
-        </p:txBody>
-      </p:sp>
-      <p:sp>
-        <p:nvSpPr>
-          <p:cNvPr id="5" name="テキスト ボックス 4">
-            <a:extLst>
-              <a:ext uri="{FF2B5EF4-FFF2-40B4-BE49-F238E27FC236}">
-                <a16:creationId xmlns:a16="http://schemas.microsoft.com/office/drawing/2014/main" id="{FC072985-171F-5D77-276A-30C4206B2E62}"/>
-              </a:ext>
-            </a:extLst>
-          </p:cNvPr>
-          <p:cNvSpPr txBox="1"/>
-          <p:nvPr/>
-        </p:nvSpPr>
-        <p:spPr>
-          <a:xfrm>
-            <a:off x="-1" y="577517"/>
-            <a:ext cx="12192000" cy="6463308"/>
-          </a:xfrm>
-          <a:prstGeom prst="rect">
-            <a:avLst/>
-          </a:prstGeom>
-          <a:noFill/>
-        </p:spPr>
-        <p:txBody>
-          <a:bodyPr wrap="square" rtlCol="0">
-            <a:spAutoFit/>
-          </a:bodyPr>
-          <a:lstStyle/>
-          <a:p>
-            <a:r>
-              <a:rPr lang="ja-JP" altLang="en-US" b="1" dirty="0"/>
-              <a:t>◾️日本の高等教育を取り巻く外部環境</a:t>
-            </a:r>
-            <a:endParaRPr lang="en-US" altLang="ja-JP" b="1" dirty="0"/>
-          </a:p>
-          <a:p>
-            <a:r>
-              <a:rPr lang="ja-JP" altLang="en-US" dirty="0"/>
-              <a:t>・少子化に伴う高等教育入学人口の減少</a:t>
-            </a:r>
-            <a:endParaRPr lang="en-US" altLang="ja-JP" dirty="0"/>
-          </a:p>
-          <a:p>
-            <a:r>
-              <a:rPr lang="ja-JP" altLang="en-US" dirty="0"/>
-              <a:t>・国際的な研究競争力強化の必要性</a:t>
-            </a:r>
-            <a:endParaRPr lang="en-US" altLang="ja-JP" dirty="0"/>
-          </a:p>
-          <a:p>
-            <a:r>
-              <a:rPr lang="ja-JP" altLang="en-US" dirty="0"/>
-              <a:t>・地域における活力の低下</a:t>
-            </a:r>
-            <a:endParaRPr lang="en-US" altLang="ja-JP" dirty="0"/>
-          </a:p>
-          <a:p>
-            <a:endParaRPr lang="en-US" altLang="ja-JP" dirty="0"/>
-          </a:p>
-          <a:p>
-            <a:r>
-              <a:rPr lang="ja-JP" altLang="en-US" b="1" dirty="0"/>
-              <a:t>◾️国の高等教育政策</a:t>
-            </a:r>
-            <a:endParaRPr lang="en-US" altLang="ja-JP" b="1" dirty="0"/>
-          </a:p>
-          <a:p>
-            <a:r>
-              <a:rPr lang="ja-JP" altLang="en-US" dirty="0"/>
-              <a:t>・大学の再編統合による規模縮小</a:t>
-            </a:r>
-            <a:endParaRPr lang="en-US" altLang="ja-JP" dirty="0"/>
-          </a:p>
-          <a:p>
-            <a:r>
-              <a:rPr lang="ja-JP" altLang="en-US" dirty="0"/>
-              <a:t>・大学の機能分化（</a:t>
-            </a:r>
-            <a:r>
-              <a:rPr lang="en-US" altLang="ja-JP" dirty="0"/>
-              <a:t>SGU</a:t>
-            </a:r>
-            <a:r>
-              <a:rPr lang="ja-JP" altLang="en-US" dirty="0"/>
-              <a:t>、地域の知の中核、専門大学）</a:t>
-            </a:r>
-            <a:endParaRPr lang="en-US" altLang="ja-JP" dirty="0"/>
-          </a:p>
-          <a:p>
-            <a:r>
-              <a:rPr lang="ja-JP" altLang="en-US" dirty="0"/>
-              <a:t>によるメリハリある高等教育発展の構想</a:t>
-            </a:r>
-            <a:endParaRPr lang="en-US" altLang="ja-JP" dirty="0"/>
-          </a:p>
-          <a:p>
-            <a:endParaRPr lang="en-US" altLang="ja-JP" dirty="0"/>
-          </a:p>
-          <a:p>
-            <a:r>
-              <a:rPr lang="ja-JP" altLang="en-US" b="1" dirty="0"/>
-              <a:t>◾️大学評価における課題</a:t>
-            </a:r>
-            <a:endParaRPr lang="en-US" altLang="ja-JP" b="1" dirty="0"/>
-          </a:p>
-          <a:p>
-            <a:r>
-              <a:rPr lang="ja-JP" altLang="en-US" dirty="0"/>
-              <a:t>・論文の被引用状況に基づく評価指標の過大視</a:t>
-            </a:r>
-            <a:endParaRPr lang="en-US" altLang="ja-JP" dirty="0"/>
-          </a:p>
-          <a:p>
-            <a:r>
-              <a:rPr lang="ja-JP" altLang="en-US" dirty="0"/>
-              <a:t>・大学の地域力を計量化可能な評価指標の不在</a:t>
-            </a:r>
-            <a:endParaRPr lang="en-US" altLang="ja-JP" dirty="0"/>
-          </a:p>
-          <a:p>
-            <a:r>
-              <a:rPr lang="ja-JP" altLang="en-US" dirty="0"/>
-              <a:t>→結果として、「地域の知の中核」として発展すべき大学を抽出し、評価、資金投下できない。</a:t>
-            </a:r>
-            <a:endParaRPr lang="en-US" altLang="ja-JP" dirty="0"/>
-          </a:p>
-          <a:p>
-            <a:endParaRPr lang="en-US" altLang="ja-JP" dirty="0"/>
-          </a:p>
-          <a:p>
-            <a:r>
-              <a:rPr lang="ja-JP" altLang="en-US" b="1" dirty="0"/>
-              <a:t>◾️鹿児島県の高等教育の現状</a:t>
-            </a:r>
-            <a:endParaRPr lang="en-US" altLang="ja-JP" b="1" dirty="0"/>
-          </a:p>
-          <a:p>
-            <a:r>
-              <a:rPr lang="ja-JP" altLang="en-US" dirty="0"/>
-              <a:t>・県内に６総合大学（国立大２（鹿大、鹿屋体育大）、私立大４）</a:t>
-            </a:r>
-            <a:endParaRPr lang="en-US" altLang="ja-JP" dirty="0"/>
-          </a:p>
-          <a:p>
-            <a:r>
-              <a:rPr lang="ja-JP" altLang="en-US" dirty="0"/>
-              <a:t>・鹿児島大学は、県内唯一の国立総合大学として既に「地域の知の拠点」として機能</a:t>
-            </a:r>
-            <a:endParaRPr lang="en-US" altLang="ja-JP" dirty="0"/>
-          </a:p>
-          <a:p>
-            <a:r>
-              <a:rPr lang="ja-JP" altLang="en-US" dirty="0"/>
-              <a:t>・鹿大教員は、幅広く地域活動や地域に関わる研究を展開</a:t>
-            </a:r>
-            <a:endParaRPr lang="en-US" altLang="ja-JP" dirty="0"/>
-          </a:p>
-          <a:p>
-            <a:r>
-              <a:rPr lang="ja-JP" altLang="en-US" dirty="0"/>
-              <a:t>→ただし、その地域活動は十分に評価されていない。</a:t>
-            </a:r>
-            <a:endParaRPr lang="en-US" altLang="ja-JP" dirty="0"/>
-          </a:p>
-          <a:p>
-            <a:endParaRPr lang="en-US" altLang="ja-JP" dirty="0"/>
-          </a:p>
-          <a:p>
-            <a:r>
-              <a:rPr lang="ja-JP" altLang="en-US" dirty="0"/>
-              <a:t>⇒ </a:t>
-            </a:r>
-            <a:r>
-              <a:rPr lang="ja-JP" altLang="en-US" sz="2000" u="sng" dirty="0"/>
-              <a:t>大学の地域活動の見える化、評価指標の形成が必要</a:t>
-            </a:r>
-            <a:endParaRPr lang="en-US" altLang="ja-JP" sz="2000" u="sng" dirty="0"/>
-          </a:p>
-          <a:p>
-            <a:endParaRPr lang="ja-JP" altLang="en-US" dirty="0"/>
-          </a:p>
-        </p:txBody>
-      </p:sp>
-    </p:spTree>
-    <p:extLst>
-      <p:ext uri="{BB962C8B-B14F-4D97-AF65-F5344CB8AC3E}">
-        <p14:creationId xmlns:p14="http://schemas.microsoft.com/office/powerpoint/2010/main" val="4253336031"/>
-      </p:ext>
-    </p:extLst>
-  </p:cSld>
-  <p:clrMapOvr>
-    <a:masterClrMapping/>
-  </p:clrMapOvr>
-</p:sld>
-</file>
-
-<file path=ppt/slides/slide5.xml><?xml version="1.0" encoding="utf-8"?>
+<file path=ppt/slides/slide3.xml><?xml version="1.0" encoding="utf-8"?>
 <p:sld xmlns:a="http://schemas.openxmlformats.org/drawingml/2006/main" xmlns:r="http://schemas.openxmlformats.org/officeDocument/2006/relationships" xmlns:p="http://schemas.openxmlformats.org/presentationml/2006/main">
   <p:cSld>
     <p:spTree>
@@ -16071,7 +14283,15 @@
             </a:pPr>
             <a:r>
               <a:rPr lang="ja-JP" altLang="en-US" dirty="0"/>
-              <a:t>十分な精度の出る固有表現抽出手法の確定</a:t>
+              <a:t>十分</a:t>
+            </a:r>
+            <a:r>
+              <a:rPr lang="ja-JP" altLang="en-US"/>
+              <a:t>な精度を持つ固有</a:t>
+            </a:r>
+            <a:r>
+              <a:rPr lang="ja-JP" altLang="en-US" dirty="0"/>
+              <a:t>表現抽出手法の確定</a:t>
             </a:r>
             <a:endParaRPr lang="en-US" altLang="ja-JP" dirty="0"/>
           </a:p>
@@ -16086,28 +14306,48 @@
             <a:endParaRPr lang="en-US" altLang="ja-JP" b="1" dirty="0"/>
           </a:p>
           <a:p>
-            <a:endParaRPr lang="en-US" altLang="ja-JP" b="1" dirty="0"/>
-          </a:p>
-          <a:p>
-            <a:endParaRPr lang="en-US" altLang="ja-JP" b="1" dirty="0"/>
-          </a:p>
-          <a:p>
-            <a:r>
-              <a:rPr lang="ja-JP" altLang="en-US" dirty="0">
-                <a:solidFill>
-                  <a:srgbClr val="FF0000"/>
-                </a:solidFill>
-              </a:rPr>
-              <a:t>（こちらは十分に練られていないので、ご検討下さい。）</a:t>
-            </a:r>
-            <a:endParaRPr lang="en-US" altLang="ja-JP" dirty="0">
-              <a:solidFill>
-                <a:srgbClr val="FF0000"/>
-              </a:solidFill>
-            </a:endParaRPr>
-          </a:p>
-          <a:p>
-            <a:endParaRPr lang="ja-JP" altLang="en-US" dirty="0"/>
+            <a:pPr marL="342900" indent="-342900">
+              <a:buFont typeface="+mj-lt"/>
+              <a:buAutoNum type="arabicPeriod"/>
+            </a:pPr>
+            <a:r>
+              <a:rPr lang="ja-JP" altLang="en-US"/>
+              <a:t>大学の地域活動にかかる指標の作成</a:t>
+            </a:r>
+            <a:endParaRPr lang="en-US" altLang="ja-JP" dirty="0"/>
+          </a:p>
+          <a:p>
+            <a:pPr marL="342900" indent="-342900">
+              <a:buFont typeface="+mj-lt"/>
+              <a:buAutoNum type="arabicPeriod"/>
+            </a:pPr>
+            <a:r>
+              <a:rPr lang="ja-JP" altLang="en-US"/>
+              <a:t>指標を用いた個別の地域活動分析・成果発信</a:t>
+            </a:r>
+            <a:endParaRPr lang="en-US" altLang="ja-JP" dirty="0"/>
+          </a:p>
+          <a:p>
+            <a:pPr marL="342900" indent="-342900">
+              <a:buFont typeface="+mj-lt"/>
+              <a:buAutoNum type="arabicPeriod"/>
+            </a:pPr>
+            <a:r>
+              <a:rPr lang="ja-JP" altLang="en-US"/>
+              <a:t>より統括的な地域活動・研究の発信とフィードバック</a:t>
+            </a:r>
+            <a:endParaRPr lang="en-US" altLang="ja-JP" dirty="0"/>
+          </a:p>
+          <a:p>
+            <a:pPr marL="342900" indent="-342900">
+              <a:buFont typeface="+mj-lt"/>
+              <a:buAutoNum type="arabicPeriod"/>
+            </a:pPr>
+            <a:r>
+              <a:rPr lang="ja-JP" altLang="en-US"/>
+              <a:t>地域活動や地域に関わる研究のさらなる展開</a:t>
+            </a:r>
+            <a:endParaRPr lang="en-US" altLang="ja-JP" dirty="0"/>
           </a:p>
         </p:txBody>
       </p:sp>
@@ -16124,7 +14364,7 @@
 </p:sld>
 </file>
 
-<file path=ppt/slides/slide6.xml><?xml version="1.0" encoding="utf-8"?>
+<file path=ppt/slides/slide4.xml><?xml version="1.0" encoding="utf-8"?>
 <p:sld xmlns:a="http://schemas.openxmlformats.org/drawingml/2006/main" xmlns:r="http://schemas.openxmlformats.org/officeDocument/2006/relationships" xmlns:p="http://schemas.openxmlformats.org/presentationml/2006/main">
   <p:cSld>
     <p:spTree>
@@ -16424,7 +14664,7 @@
 </p:sld>
 </file>
 
-<file path=ppt/slides/slide7.xml><?xml version="1.0" encoding="utf-8"?>
+<file path=ppt/slides/slide5.xml><?xml version="1.0" encoding="utf-8"?>
 <p:sld xmlns:a="http://schemas.openxmlformats.org/drawingml/2006/main" xmlns:r="http://schemas.openxmlformats.org/officeDocument/2006/relationships" xmlns:p="http://schemas.openxmlformats.org/presentationml/2006/main">
   <p:cSld>
     <p:spTree>
@@ -16831,7 +15071,7 @@
 </p:sld>
 </file>
 
-<file path=ppt/slides/slide8.xml><?xml version="1.0" encoding="utf-8"?>
+<file path=ppt/slides/slide6.xml><?xml version="1.0" encoding="utf-8"?>
 <p:sld xmlns:a="http://schemas.openxmlformats.org/drawingml/2006/main" xmlns:r="http://schemas.openxmlformats.org/officeDocument/2006/relationships" xmlns:p="http://schemas.openxmlformats.org/presentationml/2006/main">
   <p:cSld>
     <p:spTree>
@@ -17240,7 +15480,7 @@
 </p:sld>
 </file>
 
-<file path=ppt/slides/slide9.xml><?xml version="1.0" encoding="utf-8"?>
+<file path=ppt/slides/slide7.xml><?xml version="1.0" encoding="utf-8"?>
 <p:sld xmlns:a="http://schemas.openxmlformats.org/drawingml/2006/main" xmlns:r="http://schemas.openxmlformats.org/officeDocument/2006/relationships" xmlns:p="http://schemas.openxmlformats.org/presentationml/2006/main">
   <p:cSld>
     <p:spTree>
@@ -17441,6 +15681,1859 @@
     <p:extLst>
       <p:ext uri="{BB962C8B-B14F-4D97-AF65-F5344CB8AC3E}">
         <p14:creationId xmlns:p14="http://schemas.microsoft.com/office/powerpoint/2010/main" val="2396115686"/>
+      </p:ext>
+    </p:extLst>
+  </p:cSld>
+  <p:clrMapOvr>
+    <a:masterClrMapping/>
+  </p:clrMapOvr>
+</p:sld>
+</file>
+
+<file path=ppt/slides/slide8.xml><?xml version="1.0" encoding="utf-8"?>
+<p:sld xmlns:a="http://schemas.openxmlformats.org/drawingml/2006/main" xmlns:r="http://schemas.openxmlformats.org/officeDocument/2006/relationships" xmlns:p="http://schemas.openxmlformats.org/presentationml/2006/main">
+  <p:cSld>
+    <p:spTree>
+      <p:nvGrpSpPr>
+        <p:cNvPr id="1" name="">
+          <a:extLst>
+            <a:ext uri="{FF2B5EF4-FFF2-40B4-BE49-F238E27FC236}">
+              <a16:creationId xmlns:a16="http://schemas.microsoft.com/office/drawing/2014/main" id="{9B9A69AA-1FF6-E35B-D5AD-EF3CD814455F}"/>
+            </a:ext>
+          </a:extLst>
+        </p:cNvPr>
+        <p:cNvGrpSpPr/>
+        <p:nvPr/>
+      </p:nvGrpSpPr>
+      <p:grpSpPr>
+        <a:xfrm>
+          <a:off x="0" y="0"/>
+          <a:ext cx="0" cy="0"/>
+          <a:chOff x="0" y="0"/>
+          <a:chExt cx="0" cy="0"/>
+        </a:xfrm>
+      </p:grpSpPr>
+      <p:sp>
+        <p:nvSpPr>
+          <p:cNvPr id="2" name="タイトル 1">
+            <a:extLst>
+              <a:ext uri="{FF2B5EF4-FFF2-40B4-BE49-F238E27FC236}">
+                <a16:creationId xmlns:a16="http://schemas.microsoft.com/office/drawing/2014/main" id="{29D666D7-9F06-2E12-DB10-5A1262FC6390}"/>
+              </a:ext>
+            </a:extLst>
+          </p:cNvPr>
+          <p:cNvSpPr>
+            <a:spLocks noGrp="1"/>
+          </p:cNvSpPr>
+          <p:nvPr>
+            <p:ph type="title"/>
+          </p:nvPr>
+        </p:nvSpPr>
+        <p:spPr>
+          <a:xfrm>
+            <a:off x="0" y="1"/>
+            <a:ext cx="12192000" cy="577516"/>
+          </a:xfrm>
+          <a:solidFill>
+            <a:schemeClr val="bg1">
+              <a:lumMod val="85000"/>
+            </a:schemeClr>
+          </a:solidFill>
+        </p:spPr>
+        <p:txBody>
+          <a:bodyPr>
+            <a:normAutofit fontScale="90000"/>
+          </a:bodyPr>
+          <a:lstStyle/>
+          <a:p>
+            <a:r>
+              <a:rPr kumimoji="1" lang="ja-JP" altLang="en-US" sz="3600"/>
+              <a:t>マテリアル・方法（概要）</a:t>
+            </a:r>
+          </a:p>
+        </p:txBody>
+      </p:sp>
+      <p:sp>
+        <p:nvSpPr>
+          <p:cNvPr id="3" name="テキスト ボックス 2">
+            <a:extLst>
+              <a:ext uri="{FF2B5EF4-FFF2-40B4-BE49-F238E27FC236}">
+                <a16:creationId xmlns:a16="http://schemas.microsoft.com/office/drawing/2014/main" id="{6BB50100-A622-8930-2A37-AA9F2F67F023}"/>
+              </a:ext>
+            </a:extLst>
+          </p:cNvPr>
+          <p:cNvSpPr txBox="1"/>
+          <p:nvPr/>
+        </p:nvSpPr>
+        <p:spPr>
+          <a:xfrm>
+            <a:off x="2264575" y="708325"/>
+            <a:ext cx="1364476" cy="369332"/>
+          </a:xfrm>
+          <a:prstGeom prst="rect">
+            <a:avLst/>
+          </a:prstGeom>
+          <a:noFill/>
+          <a:ln>
+            <a:solidFill>
+              <a:schemeClr val="tx1"/>
+            </a:solidFill>
+          </a:ln>
+        </p:spPr>
+        <p:txBody>
+          <a:bodyPr wrap="none" rtlCol="0" anchor="ctr">
+            <a:spAutoFit/>
+          </a:bodyPr>
+          <a:lstStyle/>
+          <a:p>
+            <a:r>
+              <a:rPr kumimoji="1" lang="en-US" altLang="ja-JP" dirty="0"/>
+              <a:t>KAKEN DB</a:t>
+            </a:r>
+            <a:endParaRPr kumimoji="1" lang="ja-JP" altLang="en-US"/>
+          </a:p>
+        </p:txBody>
+      </p:sp>
+      <p:sp>
+        <p:nvSpPr>
+          <p:cNvPr id="4" name="テキスト ボックス 3">
+            <a:extLst>
+              <a:ext uri="{FF2B5EF4-FFF2-40B4-BE49-F238E27FC236}">
+                <a16:creationId xmlns:a16="http://schemas.microsoft.com/office/drawing/2014/main" id="{50B5646A-820F-E60C-8230-4D0E4A410F3A}"/>
+              </a:ext>
+            </a:extLst>
+          </p:cNvPr>
+          <p:cNvSpPr txBox="1"/>
+          <p:nvPr/>
+        </p:nvSpPr>
+        <p:spPr>
+          <a:xfrm>
+            <a:off x="1931151" y="1440873"/>
+            <a:ext cx="2031325" cy="369332"/>
+          </a:xfrm>
+          <a:prstGeom prst="rect">
+            <a:avLst/>
+          </a:prstGeom>
+          <a:noFill/>
+          <a:ln>
+            <a:solidFill>
+              <a:schemeClr val="tx1"/>
+            </a:solidFill>
+          </a:ln>
+        </p:spPr>
+        <p:txBody>
+          <a:bodyPr wrap="none" rtlCol="0" anchor="ctr">
+            <a:spAutoFit/>
+          </a:bodyPr>
+          <a:lstStyle/>
+          <a:p>
+            <a:r>
+              <a:rPr lang="ja-JP" altLang="en-US"/>
+              <a:t>国立大学の報告書</a:t>
+            </a:r>
+            <a:endParaRPr lang="en-US" altLang="ja-JP" dirty="0"/>
+          </a:p>
+        </p:txBody>
+      </p:sp>
+      <p:sp>
+        <p:nvSpPr>
+          <p:cNvPr id="6" name="テキスト ボックス 5">
+            <a:extLst>
+              <a:ext uri="{FF2B5EF4-FFF2-40B4-BE49-F238E27FC236}">
+                <a16:creationId xmlns:a16="http://schemas.microsoft.com/office/drawing/2014/main" id="{4AAEC8DF-7497-1AA4-07B3-498D72BB2882}"/>
+              </a:ext>
+            </a:extLst>
+          </p:cNvPr>
+          <p:cNvSpPr txBox="1"/>
+          <p:nvPr/>
+        </p:nvSpPr>
+        <p:spPr>
+          <a:xfrm>
+            <a:off x="3103267" y="1763449"/>
+            <a:ext cx="1199367" cy="369332"/>
+          </a:xfrm>
+          <a:prstGeom prst="rect">
+            <a:avLst/>
+          </a:prstGeom>
+          <a:noFill/>
+        </p:spPr>
+        <p:txBody>
+          <a:bodyPr wrap="none" rtlCol="0">
+            <a:spAutoFit/>
+          </a:bodyPr>
+          <a:lstStyle/>
+          <a:p>
+            <a:r>
+              <a:rPr kumimoji="1" lang="ja-JP" altLang="en-US"/>
+              <a:t>大学数</a:t>
+            </a:r>
+            <a:r>
+              <a:rPr kumimoji="1" lang="en-US" altLang="ja-JP" dirty="0"/>
+              <a:t>:89</a:t>
+            </a:r>
+            <a:endParaRPr kumimoji="1" lang="ja-JP" altLang="en-US"/>
+          </a:p>
+        </p:txBody>
+      </p:sp>
+      <p:sp>
+        <p:nvSpPr>
+          <p:cNvPr id="7" name="テキスト ボックス 6">
+            <a:extLst>
+              <a:ext uri="{FF2B5EF4-FFF2-40B4-BE49-F238E27FC236}">
+                <a16:creationId xmlns:a16="http://schemas.microsoft.com/office/drawing/2014/main" id="{8E09B076-FFAF-2715-DBD3-50DFFF469A70}"/>
+              </a:ext>
+            </a:extLst>
+          </p:cNvPr>
+          <p:cNvSpPr txBox="1"/>
+          <p:nvPr/>
+        </p:nvSpPr>
+        <p:spPr>
+          <a:xfrm>
+            <a:off x="2559528" y="2173421"/>
+            <a:ext cx="774571" cy="369332"/>
+          </a:xfrm>
+          <a:prstGeom prst="rect">
+            <a:avLst/>
+          </a:prstGeom>
+          <a:noFill/>
+          <a:ln>
+            <a:solidFill>
+              <a:schemeClr val="tx1"/>
+            </a:solidFill>
+          </a:ln>
+        </p:spPr>
+        <p:txBody>
+          <a:bodyPr wrap="none" rtlCol="0" anchor="ctr">
+            <a:spAutoFit/>
+          </a:bodyPr>
+          <a:lstStyle/>
+          <a:p>
+            <a:r>
+              <a:rPr lang="en-US" altLang="ja-JP" dirty="0"/>
+              <a:t>4</a:t>
+            </a:r>
+            <a:r>
+              <a:rPr lang="ja-JP" altLang="en-US"/>
+              <a:t>大学</a:t>
+            </a:r>
+            <a:endParaRPr lang="en-US" altLang="ja-JP" dirty="0"/>
+          </a:p>
+        </p:txBody>
+      </p:sp>
+      <p:sp>
+        <p:nvSpPr>
+          <p:cNvPr id="8" name="テキスト ボックス 7">
+            <a:extLst>
+              <a:ext uri="{FF2B5EF4-FFF2-40B4-BE49-F238E27FC236}">
+                <a16:creationId xmlns:a16="http://schemas.microsoft.com/office/drawing/2014/main" id="{7860D382-58A5-C995-8FE8-E78F8C1B6F65}"/>
+              </a:ext>
+            </a:extLst>
+          </p:cNvPr>
+          <p:cNvSpPr txBox="1"/>
+          <p:nvPr/>
+        </p:nvSpPr>
+        <p:spPr>
+          <a:xfrm>
+            <a:off x="1936761" y="2905969"/>
+            <a:ext cx="2020105" cy="369332"/>
+          </a:xfrm>
+          <a:prstGeom prst="rect">
+            <a:avLst/>
+          </a:prstGeom>
+          <a:noFill/>
+          <a:ln>
+            <a:solidFill>
+              <a:schemeClr val="tx1"/>
+            </a:solidFill>
+          </a:ln>
+        </p:spPr>
+        <p:txBody>
+          <a:bodyPr wrap="none" rtlCol="0" anchor="ctr">
+            <a:spAutoFit/>
+          </a:bodyPr>
+          <a:lstStyle/>
+          <a:p>
+            <a:r>
+              <a:rPr lang="en-US" altLang="ja-JP" dirty="0"/>
+              <a:t>4</a:t>
+            </a:r>
+            <a:r>
+              <a:rPr lang="ja-JP" altLang="en-US"/>
+              <a:t>大学</a:t>
+            </a:r>
+            <a:r>
+              <a:rPr lang="en-US" altLang="ja-JP" dirty="0"/>
+              <a:t> </a:t>
+            </a:r>
+            <a:r>
+              <a:rPr lang="ja-JP" altLang="en-US"/>
+              <a:t>各</a:t>
+            </a:r>
+            <a:r>
+              <a:rPr lang="en-US" altLang="ja-JP" dirty="0"/>
+              <a:t>50</a:t>
+            </a:r>
+            <a:r>
+              <a:rPr lang="ja-JP" altLang="en-US"/>
+              <a:t>報告書</a:t>
+            </a:r>
+            <a:endParaRPr lang="en-US" altLang="ja-JP" dirty="0"/>
+          </a:p>
+        </p:txBody>
+      </p:sp>
+      <p:sp>
+        <p:nvSpPr>
+          <p:cNvPr id="9" name="テキスト ボックス 8">
+            <a:extLst>
+              <a:ext uri="{FF2B5EF4-FFF2-40B4-BE49-F238E27FC236}">
+                <a16:creationId xmlns:a16="http://schemas.microsoft.com/office/drawing/2014/main" id="{F89577F0-2089-00FE-EA03-21ED65B32693}"/>
+              </a:ext>
+            </a:extLst>
+          </p:cNvPr>
+          <p:cNvSpPr txBox="1"/>
+          <p:nvPr/>
+        </p:nvSpPr>
+        <p:spPr>
+          <a:xfrm>
+            <a:off x="892405" y="3638517"/>
+            <a:ext cx="4108817" cy="369332"/>
+          </a:xfrm>
+          <a:prstGeom prst="rect">
+            <a:avLst/>
+          </a:prstGeom>
+          <a:noFill/>
+          <a:ln>
+            <a:solidFill>
+              <a:schemeClr val="tx1"/>
+            </a:solidFill>
+          </a:ln>
+        </p:spPr>
+        <p:txBody>
+          <a:bodyPr wrap="none" rtlCol="0" anchor="ctr">
+            <a:spAutoFit/>
+          </a:bodyPr>
+          <a:lstStyle/>
+          <a:p>
+            <a:r>
+              <a:rPr lang="ja-JP" altLang="en-US" dirty="0"/>
+              <a:t>研究課題名・本文からの地名抽出結果</a:t>
+            </a:r>
+            <a:endParaRPr lang="en-US" altLang="ja-JP" dirty="0"/>
+          </a:p>
+        </p:txBody>
+      </p:sp>
+      <p:sp>
+        <p:nvSpPr>
+          <p:cNvPr id="10" name="テキスト ボックス 9">
+            <a:extLst>
+              <a:ext uri="{FF2B5EF4-FFF2-40B4-BE49-F238E27FC236}">
+                <a16:creationId xmlns:a16="http://schemas.microsoft.com/office/drawing/2014/main" id="{32B48DCF-93FC-2971-C8C3-F07C62E80660}"/>
+              </a:ext>
+            </a:extLst>
+          </p:cNvPr>
+          <p:cNvSpPr txBox="1"/>
+          <p:nvPr/>
+        </p:nvSpPr>
+        <p:spPr>
+          <a:xfrm>
+            <a:off x="784202" y="4371065"/>
+            <a:ext cx="4325223" cy="369332"/>
+          </a:xfrm>
+          <a:prstGeom prst="rect">
+            <a:avLst/>
+          </a:prstGeom>
+          <a:noFill/>
+          <a:ln>
+            <a:solidFill>
+              <a:schemeClr val="tx1"/>
+            </a:solidFill>
+          </a:ln>
+        </p:spPr>
+        <p:txBody>
+          <a:bodyPr wrap="none" rtlCol="0" anchor="ctr">
+            <a:spAutoFit/>
+          </a:bodyPr>
+          <a:lstStyle/>
+          <a:p>
+            <a:r>
+              <a:rPr lang="en-US" altLang="ja-JP" dirty="0"/>
+              <a:t>AI</a:t>
+            </a:r>
+            <a:r>
+              <a:rPr lang="ja-JP" altLang="en-US" dirty="0"/>
+              <a:t>、人による地名抽出に対する判定結果</a:t>
+            </a:r>
+            <a:endParaRPr lang="en-US" altLang="ja-JP" dirty="0"/>
+          </a:p>
+        </p:txBody>
+      </p:sp>
+      <p:sp>
+        <p:nvSpPr>
+          <p:cNvPr id="12" name="テキスト ボックス 11">
+            <a:extLst>
+              <a:ext uri="{FF2B5EF4-FFF2-40B4-BE49-F238E27FC236}">
+                <a16:creationId xmlns:a16="http://schemas.microsoft.com/office/drawing/2014/main" id="{E1C3C056-DB92-8A69-40B4-0B7693A57EB5}"/>
+              </a:ext>
+            </a:extLst>
+          </p:cNvPr>
+          <p:cNvSpPr txBox="1"/>
+          <p:nvPr/>
+        </p:nvSpPr>
+        <p:spPr>
+          <a:xfrm>
+            <a:off x="3103267" y="3213854"/>
+            <a:ext cx="1624163" cy="369332"/>
+          </a:xfrm>
+          <a:prstGeom prst="rect">
+            <a:avLst/>
+          </a:prstGeom>
+          <a:noFill/>
+        </p:spPr>
+        <p:txBody>
+          <a:bodyPr wrap="none" rtlCol="0">
+            <a:spAutoFit/>
+          </a:bodyPr>
+          <a:lstStyle/>
+          <a:p>
+            <a:r>
+              <a:rPr lang="ja-JP" altLang="en-US"/>
+              <a:t>報告書数</a:t>
+            </a:r>
+            <a:r>
+              <a:rPr lang="en-US" altLang="ja-JP" dirty="0"/>
+              <a:t>:</a:t>
+            </a:r>
+            <a:r>
+              <a:rPr kumimoji="1" lang="en-US" altLang="ja-JP" dirty="0"/>
+              <a:t>200 </a:t>
+            </a:r>
+            <a:endParaRPr kumimoji="1" lang="ja-JP" altLang="en-US"/>
+          </a:p>
+        </p:txBody>
+      </p:sp>
+      <p:sp>
+        <p:nvSpPr>
+          <p:cNvPr id="13" name="テキスト ボックス 12">
+            <a:extLst>
+              <a:ext uri="{FF2B5EF4-FFF2-40B4-BE49-F238E27FC236}">
+                <a16:creationId xmlns:a16="http://schemas.microsoft.com/office/drawing/2014/main" id="{69A38594-91FB-000C-4611-09AD2E102CDF}"/>
+              </a:ext>
+            </a:extLst>
+          </p:cNvPr>
+          <p:cNvSpPr txBox="1"/>
+          <p:nvPr/>
+        </p:nvSpPr>
+        <p:spPr>
+          <a:xfrm>
+            <a:off x="1167319" y="5103613"/>
+            <a:ext cx="3558988" cy="369332"/>
+          </a:xfrm>
+          <a:prstGeom prst="rect">
+            <a:avLst/>
+          </a:prstGeom>
+          <a:noFill/>
+          <a:ln>
+            <a:solidFill>
+              <a:schemeClr val="tx1"/>
+            </a:solidFill>
+          </a:ln>
+        </p:spPr>
+        <p:txBody>
+          <a:bodyPr wrap="none" rtlCol="0">
+            <a:spAutoFit/>
+          </a:bodyPr>
+          <a:lstStyle/>
+          <a:p>
+            <a:r>
+              <a:rPr lang="en-US" altLang="ja-JP" dirty="0"/>
+              <a:t>2 AI</a:t>
+            </a:r>
+            <a:r>
+              <a:rPr lang="ja-JP" altLang="en-US" dirty="0"/>
+              <a:t>、</a:t>
+            </a:r>
+            <a:r>
+              <a:rPr lang="en-US" altLang="ja-JP" dirty="0"/>
+              <a:t>3 </a:t>
+            </a:r>
+            <a:r>
+              <a:rPr lang="ja-JP" altLang="en-US" dirty="0"/>
+              <a:t>名による</a:t>
+            </a:r>
+            <a:r>
+              <a:rPr lang="ja-JP" altLang="en-US"/>
+              <a:t>判定結果の選抜</a:t>
+            </a:r>
+            <a:endParaRPr lang="en-US" altLang="ja-JP" dirty="0"/>
+          </a:p>
+        </p:txBody>
+      </p:sp>
+      <p:sp>
+        <p:nvSpPr>
+          <p:cNvPr id="17" name="テキスト ボックス 16">
+            <a:extLst>
+              <a:ext uri="{FF2B5EF4-FFF2-40B4-BE49-F238E27FC236}">
+                <a16:creationId xmlns:a16="http://schemas.microsoft.com/office/drawing/2014/main" id="{0DB18FA9-66C9-A4BF-0B34-3A705D79ED9C}"/>
+              </a:ext>
+            </a:extLst>
+          </p:cNvPr>
+          <p:cNvSpPr txBox="1"/>
+          <p:nvPr/>
+        </p:nvSpPr>
+        <p:spPr>
+          <a:xfrm>
+            <a:off x="3103267" y="4689583"/>
+            <a:ext cx="2175596" cy="369332"/>
+          </a:xfrm>
+          <a:prstGeom prst="rect">
+            <a:avLst/>
+          </a:prstGeom>
+          <a:noFill/>
+        </p:spPr>
+        <p:txBody>
+          <a:bodyPr wrap="none" rtlCol="0">
+            <a:spAutoFit/>
+          </a:bodyPr>
+          <a:lstStyle/>
+          <a:p>
+            <a:r>
+              <a:rPr kumimoji="1" lang="en-US" altLang="ja-JP" dirty="0"/>
+              <a:t>n=1200 </a:t>
+            </a:r>
+            <a:r>
+              <a:rPr kumimoji="1" lang="ja-JP" altLang="en-US" dirty="0"/>
+              <a:t>→</a:t>
+            </a:r>
+            <a:r>
+              <a:rPr kumimoji="1" lang="en-US" altLang="ja-JP" dirty="0"/>
+              <a:t> n=1000</a:t>
+            </a:r>
+            <a:endParaRPr kumimoji="1" lang="ja-JP" altLang="en-US"/>
+          </a:p>
+        </p:txBody>
+      </p:sp>
+      <p:sp>
+        <p:nvSpPr>
+          <p:cNvPr id="18" name="テキスト ボックス 17">
+            <a:extLst>
+              <a:ext uri="{FF2B5EF4-FFF2-40B4-BE49-F238E27FC236}">
+                <a16:creationId xmlns:a16="http://schemas.microsoft.com/office/drawing/2014/main" id="{DC038396-2409-3E57-A5A4-ADDB31A3F81E}"/>
+              </a:ext>
+            </a:extLst>
+          </p:cNvPr>
+          <p:cNvSpPr txBox="1"/>
+          <p:nvPr/>
+        </p:nvSpPr>
+        <p:spPr>
+          <a:xfrm>
+            <a:off x="3103266" y="5422131"/>
+            <a:ext cx="870751" cy="369332"/>
+          </a:xfrm>
+          <a:prstGeom prst="rect">
+            <a:avLst/>
+          </a:prstGeom>
+          <a:noFill/>
+        </p:spPr>
+        <p:txBody>
+          <a:bodyPr wrap="none" rtlCol="0">
+            <a:spAutoFit/>
+          </a:bodyPr>
+          <a:lstStyle/>
+          <a:p>
+            <a:r>
+              <a:rPr kumimoji="1" lang="en-US" altLang="ja-JP" dirty="0"/>
+              <a:t>n=495</a:t>
+            </a:r>
+          </a:p>
+        </p:txBody>
+      </p:sp>
+      <p:sp>
+        <p:nvSpPr>
+          <p:cNvPr id="19" name="テキスト ボックス 18">
+            <a:extLst>
+              <a:ext uri="{FF2B5EF4-FFF2-40B4-BE49-F238E27FC236}">
+                <a16:creationId xmlns:a16="http://schemas.microsoft.com/office/drawing/2014/main" id="{789180A8-A51B-BD41-8770-60FBEF30712F}"/>
+              </a:ext>
+            </a:extLst>
+          </p:cNvPr>
+          <p:cNvSpPr txBox="1"/>
+          <p:nvPr/>
+        </p:nvSpPr>
+        <p:spPr>
+          <a:xfrm>
+            <a:off x="2946813" y="5678743"/>
+            <a:ext cx="3982180" cy="369332"/>
+          </a:xfrm>
+          <a:prstGeom prst="rect">
+            <a:avLst/>
+          </a:prstGeom>
+          <a:noFill/>
+        </p:spPr>
+        <p:txBody>
+          <a:bodyPr wrap="none" rtlCol="0">
+            <a:spAutoFit/>
+          </a:bodyPr>
+          <a:lstStyle/>
+          <a:p>
+            <a:r>
+              <a:rPr lang="ja-JP" altLang="en-US"/>
+              <a:t>（</a:t>
+            </a:r>
+            <a:r>
+              <a:rPr lang="en-US" altLang="ja-JP" dirty="0"/>
+              <a:t>99</a:t>
+            </a:r>
+            <a:r>
+              <a:rPr lang="ja-JP" altLang="en-US"/>
+              <a:t>報告書</a:t>
+            </a:r>
+            <a:r>
+              <a:rPr lang="en-US" altLang="ja-JP" dirty="0"/>
+              <a:t>(</a:t>
+            </a:r>
+            <a:r>
+              <a:rPr lang="ja-JP" altLang="en-US"/>
+              <a:t>判定箇所</a:t>
+            </a:r>
+            <a:r>
+              <a:rPr lang="en-US" altLang="ja-JP" dirty="0"/>
+              <a:t>:415) x 5</a:t>
+            </a:r>
+            <a:r>
+              <a:rPr lang="ja-JP" altLang="en-US"/>
+              <a:t>判定）</a:t>
+            </a:r>
+            <a:endParaRPr kumimoji="1" lang="en-US" altLang="ja-JP" dirty="0"/>
+          </a:p>
+        </p:txBody>
+      </p:sp>
+      <p:cxnSp>
+        <p:nvCxnSpPr>
+          <p:cNvPr id="21" name="直線コネクタ 20">
+            <a:extLst>
+              <a:ext uri="{FF2B5EF4-FFF2-40B4-BE49-F238E27FC236}">
+                <a16:creationId xmlns:a16="http://schemas.microsoft.com/office/drawing/2014/main" id="{30156B95-4ECD-9152-E110-735989CE0A84}"/>
+              </a:ext>
+            </a:extLst>
+          </p:cNvPr>
+          <p:cNvCxnSpPr>
+            <a:stCxn id="3" idx="2"/>
+            <a:endCxn id="4" idx="0"/>
+          </p:cNvCxnSpPr>
+          <p:nvPr/>
+        </p:nvCxnSpPr>
+        <p:spPr>
+          <a:xfrm>
+            <a:off x="2946813" y="1077657"/>
+            <a:ext cx="1" cy="363216"/>
+          </a:xfrm>
+          <a:prstGeom prst="line">
+            <a:avLst/>
+          </a:prstGeom>
+        </p:spPr>
+        <p:style>
+          <a:lnRef idx="2">
+            <a:schemeClr val="dk1"/>
+          </a:lnRef>
+          <a:fillRef idx="0">
+            <a:schemeClr val="dk1"/>
+          </a:fillRef>
+          <a:effectRef idx="1">
+            <a:schemeClr val="dk1"/>
+          </a:effectRef>
+          <a:fontRef idx="minor">
+            <a:schemeClr val="tx1"/>
+          </a:fontRef>
+        </p:style>
+      </p:cxnSp>
+      <p:cxnSp>
+        <p:nvCxnSpPr>
+          <p:cNvPr id="23" name="直線コネクタ 22">
+            <a:extLst>
+              <a:ext uri="{FF2B5EF4-FFF2-40B4-BE49-F238E27FC236}">
+                <a16:creationId xmlns:a16="http://schemas.microsoft.com/office/drawing/2014/main" id="{56F3E1CC-92BA-CA38-599C-064D6BA98C5D}"/>
+              </a:ext>
+            </a:extLst>
+          </p:cNvPr>
+          <p:cNvCxnSpPr>
+            <a:stCxn id="4" idx="2"/>
+            <a:endCxn id="7" idx="0"/>
+          </p:cNvCxnSpPr>
+          <p:nvPr/>
+        </p:nvCxnSpPr>
+        <p:spPr>
+          <a:xfrm>
+            <a:off x="2946814" y="1810205"/>
+            <a:ext cx="0" cy="363216"/>
+          </a:xfrm>
+          <a:prstGeom prst="line">
+            <a:avLst/>
+          </a:prstGeom>
+        </p:spPr>
+        <p:style>
+          <a:lnRef idx="2">
+            <a:schemeClr val="dk1"/>
+          </a:lnRef>
+          <a:fillRef idx="0">
+            <a:schemeClr val="dk1"/>
+          </a:fillRef>
+          <a:effectRef idx="1">
+            <a:schemeClr val="dk1"/>
+          </a:effectRef>
+          <a:fontRef idx="minor">
+            <a:schemeClr val="tx1"/>
+          </a:fontRef>
+        </p:style>
+      </p:cxnSp>
+      <p:cxnSp>
+        <p:nvCxnSpPr>
+          <p:cNvPr id="25" name="直線コネクタ 24">
+            <a:extLst>
+              <a:ext uri="{FF2B5EF4-FFF2-40B4-BE49-F238E27FC236}">
+                <a16:creationId xmlns:a16="http://schemas.microsoft.com/office/drawing/2014/main" id="{49002F55-4D49-BD09-DBCE-6BB2C828947F}"/>
+              </a:ext>
+            </a:extLst>
+          </p:cNvPr>
+          <p:cNvCxnSpPr>
+            <a:stCxn id="7" idx="2"/>
+            <a:endCxn id="8" idx="0"/>
+          </p:cNvCxnSpPr>
+          <p:nvPr/>
+        </p:nvCxnSpPr>
+        <p:spPr>
+          <a:xfrm>
+            <a:off x="2946814" y="2542753"/>
+            <a:ext cx="0" cy="363216"/>
+          </a:xfrm>
+          <a:prstGeom prst="line">
+            <a:avLst/>
+          </a:prstGeom>
+        </p:spPr>
+        <p:style>
+          <a:lnRef idx="2">
+            <a:schemeClr val="dk1"/>
+          </a:lnRef>
+          <a:fillRef idx="0">
+            <a:schemeClr val="dk1"/>
+          </a:fillRef>
+          <a:effectRef idx="1">
+            <a:schemeClr val="dk1"/>
+          </a:effectRef>
+          <a:fontRef idx="minor">
+            <a:schemeClr val="tx1"/>
+          </a:fontRef>
+        </p:style>
+      </p:cxnSp>
+      <p:cxnSp>
+        <p:nvCxnSpPr>
+          <p:cNvPr id="26" name="直線コネクタ 25">
+            <a:extLst>
+              <a:ext uri="{FF2B5EF4-FFF2-40B4-BE49-F238E27FC236}">
+                <a16:creationId xmlns:a16="http://schemas.microsoft.com/office/drawing/2014/main" id="{A3FB6594-FF6C-A8BC-C53A-719D46560A30}"/>
+              </a:ext>
+            </a:extLst>
+          </p:cNvPr>
+          <p:cNvCxnSpPr>
+            <a:cxnSpLocks/>
+            <a:stCxn id="8" idx="2"/>
+            <a:endCxn id="9" idx="0"/>
+          </p:cNvCxnSpPr>
+          <p:nvPr/>
+        </p:nvCxnSpPr>
+        <p:spPr>
+          <a:xfrm>
+            <a:off x="2946814" y="3275301"/>
+            <a:ext cx="0" cy="363216"/>
+          </a:xfrm>
+          <a:prstGeom prst="line">
+            <a:avLst/>
+          </a:prstGeom>
+        </p:spPr>
+        <p:style>
+          <a:lnRef idx="2">
+            <a:schemeClr val="dk1"/>
+          </a:lnRef>
+          <a:fillRef idx="0">
+            <a:schemeClr val="dk1"/>
+          </a:fillRef>
+          <a:effectRef idx="1">
+            <a:schemeClr val="dk1"/>
+          </a:effectRef>
+          <a:fontRef idx="minor">
+            <a:schemeClr val="tx1"/>
+          </a:fontRef>
+        </p:style>
+      </p:cxnSp>
+      <p:cxnSp>
+        <p:nvCxnSpPr>
+          <p:cNvPr id="29" name="直線コネクタ 28">
+            <a:extLst>
+              <a:ext uri="{FF2B5EF4-FFF2-40B4-BE49-F238E27FC236}">
+                <a16:creationId xmlns:a16="http://schemas.microsoft.com/office/drawing/2014/main" id="{80A92EC8-4485-8E05-D2FF-4ACB6682DD13}"/>
+              </a:ext>
+            </a:extLst>
+          </p:cNvPr>
+          <p:cNvCxnSpPr>
+            <a:cxnSpLocks/>
+            <a:stCxn id="9" idx="2"/>
+            <a:endCxn id="10" idx="0"/>
+          </p:cNvCxnSpPr>
+          <p:nvPr/>
+        </p:nvCxnSpPr>
+        <p:spPr>
+          <a:xfrm>
+            <a:off x="2946814" y="4007849"/>
+            <a:ext cx="0" cy="363216"/>
+          </a:xfrm>
+          <a:prstGeom prst="line">
+            <a:avLst/>
+          </a:prstGeom>
+        </p:spPr>
+        <p:style>
+          <a:lnRef idx="2">
+            <a:schemeClr val="dk1"/>
+          </a:lnRef>
+          <a:fillRef idx="0">
+            <a:schemeClr val="dk1"/>
+          </a:fillRef>
+          <a:effectRef idx="1">
+            <a:schemeClr val="dk1"/>
+          </a:effectRef>
+          <a:fontRef idx="minor">
+            <a:schemeClr val="tx1"/>
+          </a:fontRef>
+        </p:style>
+      </p:cxnSp>
+      <p:cxnSp>
+        <p:nvCxnSpPr>
+          <p:cNvPr id="32" name="直線コネクタ 31">
+            <a:extLst>
+              <a:ext uri="{FF2B5EF4-FFF2-40B4-BE49-F238E27FC236}">
+                <a16:creationId xmlns:a16="http://schemas.microsoft.com/office/drawing/2014/main" id="{D1C9201D-8E52-69F1-829D-A5264D734145}"/>
+              </a:ext>
+            </a:extLst>
+          </p:cNvPr>
+          <p:cNvCxnSpPr>
+            <a:cxnSpLocks/>
+            <a:stCxn id="10" idx="2"/>
+            <a:endCxn id="13" idx="0"/>
+          </p:cNvCxnSpPr>
+          <p:nvPr/>
+        </p:nvCxnSpPr>
+        <p:spPr>
+          <a:xfrm flipH="1">
+            <a:off x="2946813" y="4740397"/>
+            <a:ext cx="1" cy="363216"/>
+          </a:xfrm>
+          <a:prstGeom prst="line">
+            <a:avLst/>
+          </a:prstGeom>
+        </p:spPr>
+        <p:style>
+          <a:lnRef idx="2">
+            <a:schemeClr val="dk1"/>
+          </a:lnRef>
+          <a:fillRef idx="0">
+            <a:schemeClr val="dk1"/>
+          </a:fillRef>
+          <a:effectRef idx="1">
+            <a:schemeClr val="dk1"/>
+          </a:effectRef>
+          <a:fontRef idx="minor">
+            <a:schemeClr val="tx1"/>
+          </a:fontRef>
+        </p:style>
+      </p:cxnSp>
+      <p:sp>
+        <p:nvSpPr>
+          <p:cNvPr id="35" name="テキスト ボックス 34">
+            <a:extLst>
+              <a:ext uri="{FF2B5EF4-FFF2-40B4-BE49-F238E27FC236}">
+                <a16:creationId xmlns:a16="http://schemas.microsoft.com/office/drawing/2014/main" id="{29C9CE49-B4EE-88F2-97BF-161E83E4CD9C}"/>
+              </a:ext>
+            </a:extLst>
+          </p:cNvPr>
+          <p:cNvSpPr txBox="1"/>
+          <p:nvPr/>
+        </p:nvSpPr>
+        <p:spPr>
+          <a:xfrm>
+            <a:off x="1301492" y="1868756"/>
+            <a:ext cx="1723549" cy="276999"/>
+          </a:xfrm>
+          <a:prstGeom prst="rect">
+            <a:avLst/>
+          </a:prstGeom>
+          <a:noFill/>
+        </p:spPr>
+        <p:txBody>
+          <a:bodyPr wrap="none" rtlCol="0">
+            <a:spAutoFit/>
+          </a:bodyPr>
+          <a:lstStyle/>
+          <a:p>
+            <a:r>
+              <a:rPr kumimoji="1" lang="ja-JP" altLang="en-US" sz="1200"/>
+              <a:t>ランダムサンプリング</a:t>
+            </a:r>
+          </a:p>
+        </p:txBody>
+      </p:sp>
+      <p:sp>
+        <p:nvSpPr>
+          <p:cNvPr id="36" name="テキスト ボックス 35">
+            <a:extLst>
+              <a:ext uri="{FF2B5EF4-FFF2-40B4-BE49-F238E27FC236}">
+                <a16:creationId xmlns:a16="http://schemas.microsoft.com/office/drawing/2014/main" id="{C6B897F6-20E5-015E-DD53-352FFDEF0FBC}"/>
+              </a:ext>
+            </a:extLst>
+          </p:cNvPr>
+          <p:cNvSpPr txBox="1"/>
+          <p:nvPr/>
+        </p:nvSpPr>
+        <p:spPr>
+          <a:xfrm>
+            <a:off x="1301492" y="2582804"/>
+            <a:ext cx="1723549" cy="276999"/>
+          </a:xfrm>
+          <a:prstGeom prst="rect">
+            <a:avLst/>
+          </a:prstGeom>
+          <a:noFill/>
+        </p:spPr>
+        <p:txBody>
+          <a:bodyPr wrap="none" rtlCol="0">
+            <a:spAutoFit/>
+          </a:bodyPr>
+          <a:lstStyle/>
+          <a:p>
+            <a:r>
+              <a:rPr kumimoji="1" lang="ja-JP" altLang="en-US" sz="1200"/>
+              <a:t>ランダムサンプリング</a:t>
+            </a:r>
+          </a:p>
+        </p:txBody>
+      </p:sp>
+      <p:sp>
+        <p:nvSpPr>
+          <p:cNvPr id="37" name="テキスト ボックス 36">
+            <a:extLst>
+              <a:ext uri="{FF2B5EF4-FFF2-40B4-BE49-F238E27FC236}">
+                <a16:creationId xmlns:a16="http://schemas.microsoft.com/office/drawing/2014/main" id="{C123585A-FEBD-F0DA-5D6F-396CDC39E3B3}"/>
+              </a:ext>
+            </a:extLst>
+          </p:cNvPr>
+          <p:cNvSpPr txBox="1"/>
+          <p:nvPr/>
+        </p:nvSpPr>
+        <p:spPr>
+          <a:xfrm>
+            <a:off x="1917045" y="3333852"/>
+            <a:ext cx="1107996" cy="276999"/>
+          </a:xfrm>
+          <a:prstGeom prst="rect">
+            <a:avLst/>
+          </a:prstGeom>
+          <a:noFill/>
+        </p:spPr>
+        <p:txBody>
+          <a:bodyPr wrap="none" rtlCol="0">
+            <a:spAutoFit/>
+          </a:bodyPr>
+          <a:lstStyle/>
+          <a:p>
+            <a:r>
+              <a:rPr lang="ja-JP" altLang="en-US" sz="1200"/>
+              <a:t>固有表現抽出</a:t>
+            </a:r>
+            <a:endParaRPr kumimoji="1" lang="ja-JP" altLang="en-US" sz="1200"/>
+          </a:p>
+        </p:txBody>
+      </p:sp>
+      <p:sp>
+        <p:nvSpPr>
+          <p:cNvPr id="38" name="テキスト ボックス 37">
+            <a:extLst>
+              <a:ext uri="{FF2B5EF4-FFF2-40B4-BE49-F238E27FC236}">
+                <a16:creationId xmlns:a16="http://schemas.microsoft.com/office/drawing/2014/main" id="{B27C02FB-E947-3DBE-BEEB-E6AE50AC33DC}"/>
+              </a:ext>
+            </a:extLst>
+          </p:cNvPr>
+          <p:cNvSpPr txBox="1"/>
+          <p:nvPr/>
+        </p:nvSpPr>
+        <p:spPr>
+          <a:xfrm>
+            <a:off x="1375346" y="4073642"/>
+            <a:ext cx="1619354" cy="276999"/>
+          </a:xfrm>
+          <a:prstGeom prst="rect">
+            <a:avLst/>
+          </a:prstGeom>
+          <a:noFill/>
+        </p:spPr>
+        <p:txBody>
+          <a:bodyPr wrap="none" rtlCol="0">
+            <a:spAutoFit/>
+          </a:bodyPr>
+          <a:lstStyle/>
+          <a:p>
+            <a:r>
+              <a:rPr kumimoji="1" lang="en-US" altLang="ja-JP" sz="1200" dirty="0"/>
+              <a:t>3 AI</a:t>
+            </a:r>
+            <a:r>
+              <a:rPr kumimoji="1" lang="ja-JP" altLang="en-US" sz="1200"/>
+              <a:t>と</a:t>
+            </a:r>
+            <a:r>
+              <a:rPr kumimoji="1" lang="en-US" altLang="ja-JP" sz="1200" dirty="0"/>
+              <a:t>3</a:t>
+            </a:r>
+            <a:r>
+              <a:rPr kumimoji="1" lang="ja-JP" altLang="en-US" sz="1200"/>
+              <a:t>名による判定</a:t>
+            </a:r>
+          </a:p>
+        </p:txBody>
+      </p:sp>
+      <p:sp>
+        <p:nvSpPr>
+          <p:cNvPr id="39" name="テキスト ボックス 38">
+            <a:extLst>
+              <a:ext uri="{FF2B5EF4-FFF2-40B4-BE49-F238E27FC236}">
+                <a16:creationId xmlns:a16="http://schemas.microsoft.com/office/drawing/2014/main" id="{6C859D4A-5B10-9425-3EF2-3241A55B330C}"/>
+              </a:ext>
+            </a:extLst>
+          </p:cNvPr>
+          <p:cNvSpPr txBox="1"/>
+          <p:nvPr/>
+        </p:nvSpPr>
+        <p:spPr>
+          <a:xfrm>
+            <a:off x="1490647" y="4791014"/>
+            <a:ext cx="1534394" cy="276999"/>
+          </a:xfrm>
+          <a:prstGeom prst="rect">
+            <a:avLst/>
+          </a:prstGeom>
+          <a:noFill/>
+        </p:spPr>
+        <p:txBody>
+          <a:bodyPr wrap="none" rtlCol="0">
+            <a:spAutoFit/>
+          </a:bodyPr>
+          <a:lstStyle/>
+          <a:p>
+            <a:r>
+              <a:rPr lang="en-US" altLang="ja-JP" sz="1200" dirty="0"/>
+              <a:t>1</a:t>
+            </a:r>
+            <a:r>
+              <a:rPr kumimoji="1" lang="en-US" altLang="ja-JP" sz="1200" dirty="0"/>
+              <a:t> AI</a:t>
+            </a:r>
+            <a:r>
+              <a:rPr kumimoji="1" lang="ja-JP" altLang="en-US" sz="1200"/>
+              <a:t>の判定を対象外</a:t>
+            </a:r>
+          </a:p>
+        </p:txBody>
+      </p:sp>
+      <p:sp>
+        <p:nvSpPr>
+          <p:cNvPr id="40" name="テキスト ボックス 39">
+            <a:extLst>
+              <a:ext uri="{FF2B5EF4-FFF2-40B4-BE49-F238E27FC236}">
+                <a16:creationId xmlns:a16="http://schemas.microsoft.com/office/drawing/2014/main" id="{9E908830-F2F3-3057-F8BB-D959F4674191}"/>
+              </a:ext>
+            </a:extLst>
+          </p:cNvPr>
+          <p:cNvSpPr txBox="1"/>
+          <p:nvPr/>
+        </p:nvSpPr>
+        <p:spPr>
+          <a:xfrm>
+            <a:off x="2277399" y="6088715"/>
+            <a:ext cx="1338828" cy="369332"/>
+          </a:xfrm>
+          <a:prstGeom prst="rect">
+            <a:avLst/>
+          </a:prstGeom>
+          <a:noFill/>
+          <a:ln>
+            <a:solidFill>
+              <a:schemeClr val="tx1"/>
+            </a:solidFill>
+          </a:ln>
+        </p:spPr>
+        <p:txBody>
+          <a:bodyPr wrap="none" rtlCol="0">
+            <a:spAutoFit/>
+          </a:bodyPr>
+          <a:lstStyle/>
+          <a:p>
+            <a:r>
+              <a:rPr lang="ja-JP" altLang="en-US" dirty="0"/>
+              <a:t>地名の決定</a:t>
+            </a:r>
+            <a:endParaRPr lang="en-US" altLang="ja-JP" dirty="0"/>
+          </a:p>
+        </p:txBody>
+      </p:sp>
+      <p:cxnSp>
+        <p:nvCxnSpPr>
+          <p:cNvPr id="42" name="直線コネクタ 41">
+            <a:extLst>
+              <a:ext uri="{FF2B5EF4-FFF2-40B4-BE49-F238E27FC236}">
+                <a16:creationId xmlns:a16="http://schemas.microsoft.com/office/drawing/2014/main" id="{295B1CD3-3B9B-D7B5-8EDB-BD5C4216A288}"/>
+              </a:ext>
+            </a:extLst>
+          </p:cNvPr>
+          <p:cNvCxnSpPr>
+            <a:stCxn id="13" idx="2"/>
+            <a:endCxn id="40" idx="0"/>
+          </p:cNvCxnSpPr>
+          <p:nvPr/>
+        </p:nvCxnSpPr>
+        <p:spPr>
+          <a:xfrm>
+            <a:off x="2946813" y="5472945"/>
+            <a:ext cx="0" cy="615770"/>
+          </a:xfrm>
+          <a:prstGeom prst="line">
+            <a:avLst/>
+          </a:prstGeom>
+        </p:spPr>
+        <p:style>
+          <a:lnRef idx="2">
+            <a:schemeClr val="dk1"/>
+          </a:lnRef>
+          <a:fillRef idx="0">
+            <a:schemeClr val="dk1"/>
+          </a:fillRef>
+          <a:effectRef idx="1">
+            <a:schemeClr val="dk1"/>
+          </a:effectRef>
+          <a:fontRef idx="minor">
+            <a:schemeClr val="tx1"/>
+          </a:fontRef>
+        </p:style>
+      </p:cxnSp>
+      <p:sp>
+        <p:nvSpPr>
+          <p:cNvPr id="43" name="テキスト ボックス 42">
+            <a:extLst>
+              <a:ext uri="{FF2B5EF4-FFF2-40B4-BE49-F238E27FC236}">
+                <a16:creationId xmlns:a16="http://schemas.microsoft.com/office/drawing/2014/main" id="{A5FE4797-1CA8-53C0-69E7-FC5ED9495741}"/>
+              </a:ext>
+            </a:extLst>
+          </p:cNvPr>
+          <p:cNvSpPr txBox="1"/>
+          <p:nvPr/>
+        </p:nvSpPr>
+        <p:spPr>
+          <a:xfrm>
+            <a:off x="3602762" y="6340679"/>
+            <a:ext cx="646331" cy="276999"/>
+          </a:xfrm>
+          <a:prstGeom prst="rect">
+            <a:avLst/>
+          </a:prstGeom>
+          <a:noFill/>
+        </p:spPr>
+        <p:txBody>
+          <a:bodyPr wrap="none" rtlCol="0">
+            <a:spAutoFit/>
+          </a:bodyPr>
+          <a:lstStyle/>
+          <a:p>
+            <a:r>
+              <a:rPr kumimoji="1" lang="ja-JP" altLang="en-US" sz="1200"/>
+              <a:t>多数決</a:t>
+            </a:r>
+          </a:p>
+        </p:txBody>
+      </p:sp>
+      <p:sp>
+        <p:nvSpPr>
+          <p:cNvPr id="46" name="テキスト ボックス 45">
+            <a:extLst>
+              <a:ext uri="{FF2B5EF4-FFF2-40B4-BE49-F238E27FC236}">
+                <a16:creationId xmlns:a16="http://schemas.microsoft.com/office/drawing/2014/main" id="{DE99B3DA-7EFF-84DC-119C-EE3965C33116}"/>
+              </a:ext>
+            </a:extLst>
+          </p:cNvPr>
+          <p:cNvSpPr txBox="1"/>
+          <p:nvPr/>
+        </p:nvSpPr>
+        <p:spPr>
+          <a:xfrm>
+            <a:off x="9052559" y="1338244"/>
+            <a:ext cx="2722793" cy="1754326"/>
+          </a:xfrm>
+          <a:prstGeom prst="rect">
+            <a:avLst/>
+          </a:prstGeom>
+          <a:noFill/>
+          <a:ln>
+            <a:solidFill>
+              <a:schemeClr val="dk1"/>
+            </a:solidFill>
+          </a:ln>
+        </p:spPr>
+        <p:txBody>
+          <a:bodyPr wrap="square" rtlCol="0">
+            <a:spAutoFit/>
+          </a:bodyPr>
+          <a:lstStyle/>
+          <a:p>
+            <a:r>
+              <a:rPr lang="ja-JP" altLang="en-US"/>
+              <a:t>判定の差異</a:t>
+            </a:r>
+            <a:endParaRPr kumimoji="1" lang="en-US" altLang="ja-JP" dirty="0"/>
+          </a:p>
+          <a:p>
+            <a:r>
+              <a:rPr lang="ja-JP" altLang="en-US"/>
+              <a:t>・判定者による</a:t>
+            </a:r>
+            <a:endParaRPr lang="en-US" altLang="ja-JP" dirty="0"/>
+          </a:p>
+          <a:p>
+            <a:r>
+              <a:rPr lang="ja-JP" altLang="en-US"/>
+              <a:t>　　・距離行列</a:t>
+            </a:r>
+            <a:endParaRPr lang="en-US" altLang="ja-JP" dirty="0"/>
+          </a:p>
+          <a:p>
+            <a:r>
+              <a:rPr lang="ja-JP" altLang="en-US"/>
+              <a:t>　　・クラスタリング</a:t>
+            </a:r>
+            <a:endParaRPr lang="en-US" altLang="ja-JP" dirty="0"/>
+          </a:p>
+          <a:p>
+            <a:r>
+              <a:rPr kumimoji="1" lang="ja-JP" altLang="en-US"/>
+              <a:t>・大学ごと</a:t>
+            </a:r>
+            <a:endParaRPr kumimoji="1" lang="en-US" altLang="ja-JP" dirty="0"/>
+          </a:p>
+          <a:p>
+            <a:r>
+              <a:rPr lang="ja-JP" altLang="en-US"/>
+              <a:t>　　・検定</a:t>
+            </a:r>
+            <a:endParaRPr kumimoji="1" lang="ja-JP" altLang="en-US"/>
+          </a:p>
+        </p:txBody>
+      </p:sp>
+      <p:sp>
+        <p:nvSpPr>
+          <p:cNvPr id="48" name="テキスト ボックス 47">
+            <a:extLst>
+              <a:ext uri="{FF2B5EF4-FFF2-40B4-BE49-F238E27FC236}">
+                <a16:creationId xmlns:a16="http://schemas.microsoft.com/office/drawing/2014/main" id="{0402A917-F530-F38F-A7F5-55EF0BA1801A}"/>
+              </a:ext>
+            </a:extLst>
+          </p:cNvPr>
+          <p:cNvSpPr txBox="1"/>
+          <p:nvPr/>
+        </p:nvSpPr>
+        <p:spPr>
+          <a:xfrm>
+            <a:off x="9051530" y="4385231"/>
+            <a:ext cx="2723823" cy="923330"/>
+          </a:xfrm>
+          <a:prstGeom prst="rect">
+            <a:avLst/>
+          </a:prstGeom>
+          <a:noFill/>
+          <a:ln>
+            <a:solidFill>
+              <a:schemeClr val="dk1"/>
+            </a:solidFill>
+          </a:ln>
+        </p:spPr>
+        <p:txBody>
+          <a:bodyPr wrap="none" rtlCol="0">
+            <a:spAutoFit/>
+          </a:bodyPr>
+          <a:lstStyle/>
+          <a:p>
+            <a:r>
+              <a:rPr lang="ja-JP" altLang="en-US"/>
+              <a:t>出現（決定）地名の確認</a:t>
+            </a:r>
+            <a:endParaRPr lang="en-US" altLang="ja-JP" dirty="0"/>
+          </a:p>
+          <a:p>
+            <a:r>
+              <a:rPr kumimoji="1" lang="ja-JP" altLang="en-US"/>
+              <a:t>・地名の例</a:t>
+            </a:r>
+            <a:endParaRPr kumimoji="1" lang="en-US" altLang="ja-JP" dirty="0"/>
+          </a:p>
+          <a:p>
+            <a:r>
+              <a:rPr lang="ja-JP" altLang="en-US"/>
+              <a:t>・大学ごとの異なり</a:t>
+            </a:r>
+            <a:endParaRPr kumimoji="1" lang="ja-JP" altLang="en-US"/>
+          </a:p>
+        </p:txBody>
+      </p:sp>
+      <p:cxnSp>
+        <p:nvCxnSpPr>
+          <p:cNvPr id="50" name="カギ線コネクタ 49">
+            <a:extLst>
+              <a:ext uri="{FF2B5EF4-FFF2-40B4-BE49-F238E27FC236}">
+                <a16:creationId xmlns:a16="http://schemas.microsoft.com/office/drawing/2014/main" id="{A28C7C5C-E306-C684-ACDB-E39ACC1F3FAB}"/>
+              </a:ext>
+            </a:extLst>
+          </p:cNvPr>
+          <p:cNvCxnSpPr>
+            <a:cxnSpLocks/>
+            <a:stCxn id="13" idx="3"/>
+            <a:endCxn id="46" idx="1"/>
+          </p:cNvCxnSpPr>
+          <p:nvPr/>
+        </p:nvCxnSpPr>
+        <p:spPr>
+          <a:xfrm flipV="1">
+            <a:off x="4726307" y="2215407"/>
+            <a:ext cx="4326252" cy="3072872"/>
+          </a:xfrm>
+          <a:prstGeom prst="bentConnector3">
+            <a:avLst>
+              <a:gd name="adj1" fmla="val 50000"/>
+            </a:avLst>
+          </a:prstGeom>
+          <a:ln>
+            <a:solidFill>
+              <a:schemeClr val="tx1"/>
+            </a:solidFill>
+          </a:ln>
+        </p:spPr>
+        <p:style>
+          <a:lnRef idx="2">
+            <a:schemeClr val="accent1"/>
+          </a:lnRef>
+          <a:fillRef idx="0">
+            <a:schemeClr val="accent1"/>
+          </a:fillRef>
+          <a:effectRef idx="1">
+            <a:schemeClr val="accent1"/>
+          </a:effectRef>
+          <a:fontRef idx="minor">
+            <a:schemeClr val="tx1"/>
+          </a:fontRef>
+        </p:style>
+      </p:cxnSp>
+      <p:cxnSp>
+        <p:nvCxnSpPr>
+          <p:cNvPr id="52" name="カギ線コネクタ 51">
+            <a:extLst>
+              <a:ext uri="{FF2B5EF4-FFF2-40B4-BE49-F238E27FC236}">
+                <a16:creationId xmlns:a16="http://schemas.microsoft.com/office/drawing/2014/main" id="{6D9D6582-DB29-F9A2-2367-7F6BF897D1FB}"/>
+              </a:ext>
+            </a:extLst>
+          </p:cNvPr>
+          <p:cNvCxnSpPr>
+            <a:stCxn id="40" idx="3"/>
+            <a:endCxn id="48" idx="1"/>
+          </p:cNvCxnSpPr>
+          <p:nvPr/>
+        </p:nvCxnSpPr>
+        <p:spPr>
+          <a:xfrm flipV="1">
+            <a:off x="3616227" y="4846896"/>
+            <a:ext cx="5435303" cy="1426485"/>
+          </a:xfrm>
+          <a:prstGeom prst="bentConnector3">
+            <a:avLst>
+              <a:gd name="adj1" fmla="val 87236"/>
+            </a:avLst>
+          </a:prstGeom>
+          <a:ln>
+            <a:solidFill>
+              <a:schemeClr val="tx1"/>
+            </a:solidFill>
+          </a:ln>
+        </p:spPr>
+        <p:style>
+          <a:lnRef idx="2">
+            <a:schemeClr val="accent1"/>
+          </a:lnRef>
+          <a:fillRef idx="0">
+            <a:schemeClr val="accent1"/>
+          </a:fillRef>
+          <a:effectRef idx="1">
+            <a:schemeClr val="accent1"/>
+          </a:effectRef>
+          <a:fontRef idx="minor">
+            <a:schemeClr val="tx1"/>
+          </a:fontRef>
+        </p:style>
+      </p:cxnSp>
+      <p:sp>
+        <p:nvSpPr>
+          <p:cNvPr id="5" name="テキスト ボックス 4">
+            <a:extLst>
+              <a:ext uri="{FF2B5EF4-FFF2-40B4-BE49-F238E27FC236}">
+                <a16:creationId xmlns:a16="http://schemas.microsoft.com/office/drawing/2014/main" id="{92411725-8F54-F43D-A1EE-674FAF4384B9}"/>
+              </a:ext>
+            </a:extLst>
+          </p:cNvPr>
+          <p:cNvSpPr txBox="1"/>
+          <p:nvPr/>
+        </p:nvSpPr>
+        <p:spPr>
+          <a:xfrm>
+            <a:off x="1455380" y="5515739"/>
+            <a:ext cx="1569660" cy="461665"/>
+          </a:xfrm>
+          <a:prstGeom prst="rect">
+            <a:avLst/>
+          </a:prstGeom>
+          <a:noFill/>
+        </p:spPr>
+        <p:txBody>
+          <a:bodyPr wrap="none" rtlCol="0">
+            <a:spAutoFit/>
+          </a:bodyPr>
+          <a:lstStyle/>
+          <a:p>
+            <a:r>
+              <a:rPr kumimoji="1" lang="ja-JP" altLang="en-US" sz="1200"/>
+              <a:t>コード部分の抽出、</a:t>
+            </a:r>
+            <a:endParaRPr kumimoji="1" lang="en-US" altLang="ja-JP" sz="1200" dirty="0"/>
+          </a:p>
+          <a:p>
+            <a:r>
+              <a:rPr kumimoji="1" lang="en-US" altLang="ja-JP" sz="1200" dirty="0" err="1"/>
+              <a:t>jq</a:t>
+            </a:r>
+            <a:r>
+              <a:rPr kumimoji="1" lang="ja-JP" altLang="en-US" sz="1200"/>
+              <a:t>によるフィルター</a:t>
+            </a:r>
+          </a:p>
+        </p:txBody>
+      </p:sp>
+      <p:sp>
+        <p:nvSpPr>
+          <p:cNvPr id="14" name="テキスト ボックス 13">
+            <a:extLst>
+              <a:ext uri="{FF2B5EF4-FFF2-40B4-BE49-F238E27FC236}">
+                <a16:creationId xmlns:a16="http://schemas.microsoft.com/office/drawing/2014/main" id="{B49311BE-C714-6329-51CC-FF85D8119BDC}"/>
+              </a:ext>
+            </a:extLst>
+          </p:cNvPr>
+          <p:cNvSpPr txBox="1"/>
+          <p:nvPr/>
+        </p:nvSpPr>
+        <p:spPr>
+          <a:xfrm>
+            <a:off x="9654908" y="5324688"/>
+            <a:ext cx="2122697" cy="338554"/>
+          </a:xfrm>
+          <a:prstGeom prst="rect">
+            <a:avLst/>
+          </a:prstGeom>
+          <a:noFill/>
+        </p:spPr>
+        <p:txBody>
+          <a:bodyPr wrap="none" rtlCol="0">
+            <a:spAutoFit/>
+          </a:bodyPr>
+          <a:lstStyle/>
+          <a:p>
+            <a:r>
+              <a:rPr kumimoji="1" lang="ja-JP" altLang="en-US" sz="1600"/>
+              <a:t>地名数</a:t>
+            </a:r>
+            <a:r>
+              <a:rPr kumimoji="1" lang="en-US" altLang="ja-JP" sz="1600" dirty="0"/>
+              <a:t>(</a:t>
+            </a:r>
+            <a:r>
+              <a:rPr lang="ja-JP" altLang="en-US" sz="1600"/>
+              <a:t>ユニーク</a:t>
+            </a:r>
+            <a:r>
+              <a:rPr kumimoji="1" lang="en-US" altLang="ja-JP" sz="1600" dirty="0"/>
+              <a:t>): 99</a:t>
+            </a:r>
+            <a:endParaRPr kumimoji="1" lang="ja-JP" altLang="en-US" sz="1600"/>
+          </a:p>
+        </p:txBody>
+      </p:sp>
+      <p:sp>
+        <p:nvSpPr>
+          <p:cNvPr id="15" name="テキスト ボックス 14">
+            <a:extLst>
+              <a:ext uri="{FF2B5EF4-FFF2-40B4-BE49-F238E27FC236}">
+                <a16:creationId xmlns:a16="http://schemas.microsoft.com/office/drawing/2014/main" id="{874F5013-91B2-5883-A1ED-16F5AE1E67C0}"/>
+              </a:ext>
+            </a:extLst>
+          </p:cNvPr>
+          <p:cNvSpPr txBox="1"/>
+          <p:nvPr/>
+        </p:nvSpPr>
+        <p:spPr>
+          <a:xfrm>
+            <a:off x="9124682" y="3104499"/>
+            <a:ext cx="2646878" cy="338554"/>
+          </a:xfrm>
+          <a:prstGeom prst="rect">
+            <a:avLst/>
+          </a:prstGeom>
+          <a:noFill/>
+        </p:spPr>
+        <p:txBody>
+          <a:bodyPr wrap="none" rtlCol="0">
+            <a:spAutoFit/>
+          </a:bodyPr>
+          <a:lstStyle/>
+          <a:p>
+            <a:r>
+              <a:rPr kumimoji="1" lang="ja-JP" altLang="en-US" sz="1600"/>
+              <a:t>地名候補数</a:t>
+            </a:r>
+            <a:r>
+              <a:rPr kumimoji="1" lang="en-US" altLang="ja-JP" sz="1600" dirty="0"/>
+              <a:t>(</a:t>
+            </a:r>
+            <a:r>
+              <a:rPr lang="ja-JP" altLang="en-US" sz="1600"/>
+              <a:t>ユニーク</a:t>
+            </a:r>
+            <a:r>
+              <a:rPr kumimoji="1" lang="en-US" altLang="ja-JP" sz="1600" dirty="0"/>
+              <a:t>): 141</a:t>
+            </a:r>
+            <a:endParaRPr kumimoji="1" lang="ja-JP" altLang="en-US" sz="1600"/>
+          </a:p>
+        </p:txBody>
+      </p:sp>
+      <p:sp>
+        <p:nvSpPr>
+          <p:cNvPr id="27" name="テキスト ボックス 26">
+            <a:extLst>
+              <a:ext uri="{FF2B5EF4-FFF2-40B4-BE49-F238E27FC236}">
+                <a16:creationId xmlns:a16="http://schemas.microsoft.com/office/drawing/2014/main" id="{9CB31746-755C-0454-679A-07488AFE3972}"/>
+              </a:ext>
+            </a:extLst>
+          </p:cNvPr>
+          <p:cNvSpPr txBox="1"/>
+          <p:nvPr/>
+        </p:nvSpPr>
+        <p:spPr>
+          <a:xfrm>
+            <a:off x="4627491" y="3378450"/>
+            <a:ext cx="851515" cy="338554"/>
+          </a:xfrm>
+          <a:prstGeom prst="rect">
+            <a:avLst/>
+          </a:prstGeom>
+          <a:noFill/>
+        </p:spPr>
+        <p:txBody>
+          <a:bodyPr wrap="none" rtlCol="0">
+            <a:spAutoFit/>
+          </a:bodyPr>
+          <a:lstStyle/>
+          <a:p>
+            <a:r>
+              <a:rPr kumimoji="1" lang="en-US" altLang="ja-JP" sz="1600" b="1" dirty="0" err="1"/>
+              <a:t>mecab</a:t>
+            </a:r>
+            <a:endParaRPr kumimoji="1" lang="ja-JP" altLang="en-US" sz="1600" b="1"/>
+          </a:p>
+        </p:txBody>
+      </p:sp>
+      <p:sp>
+        <p:nvSpPr>
+          <p:cNvPr id="28" name="テキスト ボックス 27">
+            <a:extLst>
+              <a:ext uri="{FF2B5EF4-FFF2-40B4-BE49-F238E27FC236}">
+                <a16:creationId xmlns:a16="http://schemas.microsoft.com/office/drawing/2014/main" id="{36803E7D-B8E9-2CA5-0E54-143269A0D742}"/>
+              </a:ext>
+            </a:extLst>
+          </p:cNvPr>
+          <p:cNvSpPr txBox="1"/>
+          <p:nvPr/>
+        </p:nvSpPr>
+        <p:spPr>
+          <a:xfrm>
+            <a:off x="4562202" y="4125398"/>
+            <a:ext cx="1146468" cy="323165"/>
+          </a:xfrm>
+          <a:prstGeom prst="rect">
+            <a:avLst/>
+          </a:prstGeom>
+          <a:noFill/>
+        </p:spPr>
+        <p:txBody>
+          <a:bodyPr wrap="none" rtlCol="0">
+            <a:spAutoFit/>
+          </a:bodyPr>
+          <a:lstStyle/>
+          <a:p>
+            <a:r>
+              <a:rPr lang="ja-JP" altLang="en-US" sz="1500" b="1"/>
+              <a:t>プロンプト</a:t>
+            </a:r>
+            <a:endParaRPr kumimoji="1" lang="ja-JP" altLang="en-US" sz="1500" b="1"/>
+          </a:p>
+        </p:txBody>
+      </p:sp>
+    </p:spTree>
+    <p:extLst>
+      <p:ext uri="{BB962C8B-B14F-4D97-AF65-F5344CB8AC3E}">
+        <p14:creationId xmlns:p14="http://schemas.microsoft.com/office/powerpoint/2010/main" val="1515609798"/>
+      </p:ext>
+    </p:extLst>
+  </p:cSld>
+  <p:clrMapOvr>
+    <a:masterClrMapping/>
+  </p:clrMapOvr>
+</p:sld>
+</file>
+
+<file path=ppt/slides/slide9.xml><?xml version="1.0" encoding="utf-8"?>
+<p:sld xmlns:a="http://schemas.openxmlformats.org/drawingml/2006/main" xmlns:r="http://schemas.openxmlformats.org/officeDocument/2006/relationships" xmlns:p="http://schemas.openxmlformats.org/presentationml/2006/main">
+  <p:cSld>
+    <p:spTree>
+      <p:nvGrpSpPr>
+        <p:cNvPr id="1" name="">
+          <a:extLst>
+            <a:ext uri="{FF2B5EF4-FFF2-40B4-BE49-F238E27FC236}">
+              <a16:creationId xmlns:a16="http://schemas.microsoft.com/office/drawing/2014/main" id="{45D1EA99-60AA-5390-0D3D-56D4CEB0011F}"/>
+            </a:ext>
+          </a:extLst>
+        </p:cNvPr>
+        <p:cNvGrpSpPr/>
+        <p:nvPr/>
+      </p:nvGrpSpPr>
+      <p:grpSpPr>
+        <a:xfrm>
+          <a:off x="0" y="0"/>
+          <a:ext cx="0" cy="0"/>
+          <a:chOff x="0" y="0"/>
+          <a:chExt cx="0" cy="0"/>
+        </a:xfrm>
+      </p:grpSpPr>
+      <p:sp>
+        <p:nvSpPr>
+          <p:cNvPr id="2" name="タイトル 1">
+            <a:extLst>
+              <a:ext uri="{FF2B5EF4-FFF2-40B4-BE49-F238E27FC236}">
+                <a16:creationId xmlns:a16="http://schemas.microsoft.com/office/drawing/2014/main" id="{5436E73C-C135-9AF7-6D96-1B6566C22C58}"/>
+              </a:ext>
+            </a:extLst>
+          </p:cNvPr>
+          <p:cNvSpPr>
+            <a:spLocks noGrp="1"/>
+          </p:cNvSpPr>
+          <p:nvPr>
+            <p:ph type="title"/>
+          </p:nvPr>
+        </p:nvSpPr>
+        <p:spPr>
+          <a:xfrm>
+            <a:off x="0" y="1"/>
+            <a:ext cx="12192000" cy="577516"/>
+          </a:xfrm>
+          <a:solidFill>
+            <a:schemeClr val="bg1">
+              <a:lumMod val="85000"/>
+            </a:schemeClr>
+          </a:solidFill>
+        </p:spPr>
+        <p:txBody>
+          <a:bodyPr>
+            <a:normAutofit fontScale="90000"/>
+          </a:bodyPr>
+          <a:lstStyle/>
+          <a:p>
+            <a:r>
+              <a:rPr kumimoji="1" lang="ja-JP" altLang="en-US" sz="3600"/>
+              <a:t>マテリアル・方法（</a:t>
+            </a:r>
+            <a:r>
+              <a:rPr kumimoji="1" lang="en-US" altLang="ja-JP" sz="3600"/>
+              <a:t>NER</a:t>
+            </a:r>
+            <a:r>
+              <a:rPr kumimoji="1" lang="ja-JP" altLang="en-US" sz="3600"/>
+              <a:t>）</a:t>
+            </a:r>
+          </a:p>
+        </p:txBody>
+      </p:sp>
+      <p:sp>
+        <p:nvSpPr>
+          <p:cNvPr id="4" name="テキスト ボックス 3">
+            <a:extLst>
+              <a:ext uri="{FF2B5EF4-FFF2-40B4-BE49-F238E27FC236}">
+                <a16:creationId xmlns:a16="http://schemas.microsoft.com/office/drawing/2014/main" id="{5C02DBFA-43A0-570F-85FB-DE2048B43B02}"/>
+              </a:ext>
+            </a:extLst>
+          </p:cNvPr>
+          <p:cNvSpPr txBox="1"/>
+          <p:nvPr/>
+        </p:nvSpPr>
+        <p:spPr>
+          <a:xfrm>
+            <a:off x="0" y="643420"/>
+            <a:ext cx="6705682" cy="2308324"/>
+          </a:xfrm>
+          <a:prstGeom prst="rect">
+            <a:avLst/>
+          </a:prstGeom>
+          <a:noFill/>
+        </p:spPr>
+        <p:txBody>
+          <a:bodyPr wrap="none" rtlCol="0">
+            <a:spAutoFit/>
+          </a:bodyPr>
+          <a:lstStyle/>
+          <a:p>
+            <a:pPr marL="285750" indent="-285750">
+              <a:buFont typeface="Arial" panose="020B0604020202020204" pitchFamily="34" charset="0"/>
+              <a:buChar char="•"/>
+            </a:pPr>
+            <a:r>
+              <a:rPr lang="en-US" altLang="ja-JP"/>
+              <a:t>mecab</a:t>
+            </a:r>
+            <a:r>
+              <a:rPr lang="ja-JP" altLang="en-US"/>
+              <a:t>による形態素解析</a:t>
+            </a:r>
+            <a:endParaRPr lang="en-US" altLang="ja-JP"/>
+          </a:p>
+          <a:p>
+            <a:pPr marL="742950" lvl="1" indent="-285750">
+              <a:buFont typeface="Arial" panose="020B0604020202020204" pitchFamily="34" charset="0"/>
+              <a:buChar char="•"/>
+            </a:pPr>
+            <a:r>
+              <a:rPr kumimoji="1" lang="en-US" altLang="ja-JP"/>
+              <a:t>'</a:t>
+            </a:r>
+            <a:r>
+              <a:rPr kumimoji="1" lang="ja-JP" altLang="en-US"/>
+              <a:t>固有名詞</a:t>
+            </a:r>
+            <a:r>
+              <a:rPr kumimoji="1" lang="en-US" altLang="ja-JP"/>
+              <a:t>'</a:t>
+            </a:r>
+            <a:r>
+              <a:rPr kumimoji="1" lang="ja-JP" altLang="en-US"/>
+              <a:t>、</a:t>
+            </a:r>
+            <a:r>
+              <a:rPr kumimoji="1" lang="en-US" altLang="ja-JP"/>
+              <a:t>'</a:t>
+            </a:r>
+            <a:r>
+              <a:rPr kumimoji="1" lang="ja-JP" altLang="en-US"/>
+              <a:t>地域</a:t>
+            </a:r>
+            <a:r>
+              <a:rPr kumimoji="1" lang="en-US" altLang="ja-JP"/>
+              <a:t>'</a:t>
+            </a:r>
+            <a:r>
+              <a:rPr kumimoji="1" lang="ja-JP" altLang="en-US"/>
+              <a:t>のラベルのあるものを抽出</a:t>
+            </a:r>
+            <a:endParaRPr kumimoji="1" lang="en-US" altLang="ja-JP"/>
+          </a:p>
+          <a:p>
+            <a:pPr marL="742950" lvl="1" indent="-285750">
+              <a:buFont typeface="Arial" panose="020B0604020202020204" pitchFamily="34" charset="0"/>
+              <a:buChar char="•"/>
+            </a:pPr>
+            <a:r>
+              <a:rPr lang="ja-JP" altLang="en-US"/>
+              <a:t>品詞の属性情報を削除し表現部分のみを抽出、リスト化</a:t>
+            </a:r>
+            <a:endParaRPr lang="en-US" altLang="ja-JP"/>
+          </a:p>
+          <a:p>
+            <a:pPr marL="742950" lvl="1" indent="-285750">
+              <a:buFont typeface="Arial" panose="020B0604020202020204" pitchFamily="34" charset="0"/>
+              <a:buChar char="•"/>
+            </a:pPr>
+            <a:r>
+              <a:rPr kumimoji="1" lang="ja-JP" altLang="en-US"/>
+              <a:t>以上を報告書ごとに行う</a:t>
+            </a:r>
+            <a:endParaRPr kumimoji="1" lang="en-US" altLang="ja-JP"/>
+          </a:p>
+          <a:p>
+            <a:pPr marL="285750" indent="-285750">
+              <a:buFont typeface="Arial" panose="020B0604020202020204" pitchFamily="34" charset="0"/>
+              <a:buChar char="•"/>
+            </a:pPr>
+            <a:r>
+              <a:rPr kumimoji="1" lang="ja-JP" altLang="en-US"/>
+              <a:t>作業用ファイルの作成</a:t>
+            </a:r>
+            <a:endParaRPr kumimoji="1" lang="en-US" altLang="ja-JP"/>
+          </a:p>
+          <a:p>
+            <a:pPr marL="742950" lvl="1" indent="-285750">
+              <a:buFont typeface="Arial" panose="020B0604020202020204" pitchFamily="34" charset="0"/>
+              <a:buChar char="•"/>
+            </a:pPr>
+            <a:r>
+              <a:rPr kumimoji="1" lang="ja-JP" altLang="en-US"/>
+              <a:t>報告書のタイトル、本文を抽出</a:t>
+            </a:r>
+            <a:endParaRPr kumimoji="1" lang="en-US" altLang="ja-JP"/>
+          </a:p>
+          <a:p>
+            <a:pPr marL="742950" lvl="1" indent="-285750">
+              <a:buFont typeface="Arial" panose="020B0604020202020204" pitchFamily="34" charset="0"/>
+              <a:buChar char="•"/>
+            </a:pPr>
+            <a:r>
+              <a:rPr lang="en-US" altLang="ja-JP"/>
+              <a:t>NER</a:t>
+            </a:r>
+            <a:r>
+              <a:rPr lang="ja-JP" altLang="en-US"/>
+              <a:t>結果のリストと結合</a:t>
+            </a:r>
+            <a:endParaRPr lang="en-US" altLang="ja-JP"/>
+          </a:p>
+          <a:p>
+            <a:pPr marL="742950" lvl="1" indent="-285750">
+              <a:buFont typeface="Arial" panose="020B0604020202020204" pitchFamily="34" charset="0"/>
+              <a:buChar char="•"/>
+            </a:pPr>
+            <a:r>
+              <a:rPr lang="ja-JP" altLang="en-US"/>
+              <a:t>以上を報告書ごとに行う</a:t>
+            </a:r>
+            <a:endParaRPr lang="en-US" altLang="ja-JP"/>
+          </a:p>
+        </p:txBody>
+      </p:sp>
+    </p:spTree>
+    <p:extLst>
+      <p:ext uri="{BB962C8B-B14F-4D97-AF65-F5344CB8AC3E}">
+        <p14:creationId xmlns:p14="http://schemas.microsoft.com/office/powerpoint/2010/main" val="3715758299"/>
       </p:ext>
     </p:extLst>
   </p:cSld>

--- a/jsik2026taikai_rev.pptx
+++ b/jsik2026taikai_rev.pptx
@@ -14465,7 +14465,7 @@
           <a:p>
             <a:r>
               <a:rPr lang="ja-JP" altLang="en-US"/>
-              <a:t>文書（特に日本語）からの固有表現の抽出・判定に関して、</a:t>
+              <a:t>文書（特に日本語）からの固有表現の抽出・判定に関しての課題</a:t>
             </a:r>
             <a:endParaRPr lang="en-US" altLang="ja-JP" dirty="0"/>
           </a:p>

--- a/jsik2026taikai_rev.pptx
+++ b/jsik2026taikai_rev.pptx
@@ -517,6 +517,121 @@
 </file>
 
 <file path=ppt/notesSlides/notesSlide1.xml><?xml version="1.0" encoding="utf-8"?>
+<p:notes xmlns:a="http://schemas.openxmlformats.org/drawingml/2006/main" xmlns:r="http://schemas.openxmlformats.org/officeDocument/2006/relationships" xmlns:p="http://schemas.openxmlformats.org/presentationml/2006/main">
+  <p:cSld>
+    <p:spTree>
+      <p:nvGrpSpPr>
+        <p:cNvPr id="1" name=""/>
+        <p:cNvGrpSpPr/>
+        <p:nvPr/>
+      </p:nvGrpSpPr>
+      <p:grpSpPr>
+        <a:xfrm>
+          <a:off x="0" y="0"/>
+          <a:ext cx="0" cy="0"/>
+          <a:chOff x="0" y="0"/>
+          <a:chExt cx="0" cy="0"/>
+        </a:xfrm>
+      </p:grpSpPr>
+      <p:sp>
+        <p:nvSpPr>
+          <p:cNvPr id="2" name="スライド イメージ プレースホルダー 1"/>
+          <p:cNvSpPr>
+            <a:spLocks noGrp="1" noRot="1" noChangeAspect="1"/>
+          </p:cNvSpPr>
+          <p:nvPr>
+            <p:ph type="sldImg"/>
+          </p:nvPr>
+        </p:nvSpPr>
+        <p:spPr/>
+      </p:sp>
+      <p:sp>
+        <p:nvSpPr>
+          <p:cNvPr id="3" name="ノート プレースホルダー 2"/>
+          <p:cNvSpPr>
+            <a:spLocks noGrp="1"/>
+          </p:cNvSpPr>
+          <p:nvPr>
+            <p:ph type="body" idx="1"/>
+          </p:nvPr>
+        </p:nvSpPr>
+        <p:spPr/>
+        <p:txBody>
+          <a:bodyPr/>
+          <a:lstStyle/>
+          <a:p>
+            <a:r>
+              <a:rPr kumimoji="1" lang="en-US" altLang="ja-JP"/>
+              <a:t>2026.5.24 </a:t>
+            </a:r>
+            <a:r>
+              <a:rPr kumimoji="1" lang="ja-JP" altLang="en-US"/>
+              <a:t>一般セッション</a:t>
+            </a:r>
+            <a:r>
+              <a:rPr kumimoji="1" lang="en-US" altLang="ja-JP"/>
+              <a:t>2 4</a:t>
+            </a:r>
+            <a:r>
+              <a:rPr kumimoji="1" lang="ja-JP" altLang="en-US"/>
+              <a:t>番目</a:t>
+            </a:r>
+            <a:r>
+              <a:rPr kumimoji="1" lang="en-US" altLang="ja-JP"/>
+              <a:t> </a:t>
+            </a:r>
+            <a:r>
+              <a:rPr kumimoji="1" lang="ja-JP" altLang="en-US"/>
+              <a:t>全</a:t>
+            </a:r>
+            <a:r>
+              <a:rPr kumimoji="1" lang="en-US" altLang="ja-JP"/>
+              <a:t>20</a:t>
+            </a:r>
+            <a:r>
+              <a:rPr kumimoji="1" lang="ja-JP" altLang="en-US"/>
+              <a:t>分</a:t>
+            </a:r>
+          </a:p>
+        </p:txBody>
+      </p:sp>
+      <p:sp>
+        <p:nvSpPr>
+          <p:cNvPr id="4" name="スライド番号プレースホルダー 3"/>
+          <p:cNvSpPr>
+            <a:spLocks noGrp="1"/>
+          </p:cNvSpPr>
+          <p:nvPr>
+            <p:ph type="sldNum" sz="quarter" idx="5"/>
+          </p:nvPr>
+        </p:nvSpPr>
+        <p:spPr/>
+        <p:txBody>
+          <a:bodyPr/>
+          <a:lstStyle/>
+          <a:p>
+            <a:fld id="{AD21AD6E-4550-3C43-945D-BD5179E945F6}" type="slidenum">
+              <a:rPr kumimoji="1" lang="ja-JP" altLang="en-US" smtClean="0"/>
+              <a:t>1</a:t>
+            </a:fld>
+            <a:endParaRPr kumimoji="1" lang="ja-JP" altLang="en-US"/>
+          </a:p>
+        </p:txBody>
+      </p:sp>
+    </p:spTree>
+    <p:extLst>
+      <p:ext uri="{BB962C8B-B14F-4D97-AF65-F5344CB8AC3E}">
+        <p14:creationId xmlns:p14="http://schemas.microsoft.com/office/powerpoint/2010/main" val="2586026709"/>
+      </p:ext>
+    </p:extLst>
+  </p:cSld>
+  <p:clrMapOvr>
+    <a:masterClrMapping/>
+  </p:clrMapOvr>
+</p:notes>
+</file>
+
+<file path=ppt/notesSlides/notesSlide2.xml><?xml version="1.0" encoding="utf-8"?>
 <p:notes xmlns:a="http://schemas.openxmlformats.org/drawingml/2006/main" xmlns:r="http://schemas.openxmlformats.org/officeDocument/2006/relationships" xmlns:p="http://schemas.openxmlformats.org/presentationml/2006/main">
   <p:cSld>
     <p:spTree>
@@ -7373,7 +7488,7 @@
         <p:spPr>
           <a:xfrm>
             <a:off x="0" y="659218"/>
-            <a:ext cx="2723823" cy="369332"/>
+            <a:ext cx="2954655" cy="369332"/>
           </a:xfrm>
           <a:prstGeom prst="rect">
             <a:avLst/>
@@ -7388,7 +7503,7 @@
           <a:p>
             <a:r>
               <a:rPr kumimoji="1" lang="ja-JP" altLang="en-US"/>
-              <a:t>正しい出力形式とした例</a:t>
+              <a:t>正しい出力形式としたもの</a:t>
             </a:r>
           </a:p>
         </p:txBody>
@@ -10376,7 +10491,7 @@
           <a:p>
             <a:r>
               <a:rPr lang="ja-JP" altLang="en-US" dirty="0"/>
-              <a:t>・県内に６総合大学（国立大２（鹿大、鹿屋体育大）、私立大４）</a:t>
+              <a:t>・県内に６大学（国立大２（鹿大、鹿屋体育大）、私立大４）</a:t>
             </a:r>
             <a:endParaRPr lang="en-US" altLang="ja-JP" dirty="0"/>
           </a:p>
@@ -14334,7 +14449,7 @@
             </a:pPr>
             <a:r>
               <a:rPr lang="ja-JP" altLang="en-US"/>
-              <a:t>より統括的な地域活動・研究の発信とフィードバック</a:t>
+              <a:t>より統括的・戦略的な地域活動・研究の発信とフィードバック</a:t>
             </a:r>
             <a:endParaRPr lang="en-US" altLang="ja-JP" dirty="0"/>
           </a:p>
@@ -14450,7 +14565,7 @@
         <p:spPr>
           <a:xfrm>
             <a:off x="-1" y="577517"/>
-            <a:ext cx="12192000" cy="4801314"/>
+            <a:ext cx="12192000" cy="5632311"/>
           </a:xfrm>
           <a:prstGeom prst="rect">
             <a:avLst/>
@@ -14646,6 +14761,39 @@
             <a:r>
               <a:rPr lang="ja-JP" altLang="en-US"/>
               <a:t>人名の同姓同名問題は言わずもがな</a:t>
+            </a:r>
+            <a:endParaRPr lang="en-US" altLang="ja-JP"/>
+          </a:p>
+          <a:p>
+            <a:endParaRPr lang="en-US" altLang="ja-JP"/>
+          </a:p>
+          <a:p>
+            <a:r>
+              <a:rPr lang="ja-JP" altLang="en-US" b="1"/>
+              <a:t>◾️</a:t>
+            </a:r>
+            <a:r>
+              <a:rPr lang="en-US" altLang="ja-JP" b="1"/>
+              <a:t>AI</a:t>
+            </a:r>
+            <a:r>
+              <a:rPr lang="ja-JP" altLang="en-US" b="1"/>
+              <a:t>活用の可能性</a:t>
+            </a:r>
+            <a:endParaRPr lang="en-US" altLang="ja-JP" b="1"/>
+          </a:p>
+          <a:p>
+            <a:pPr marL="285750" indent="-285750">
+              <a:buFont typeface="Arial" panose="020B0604020202020204" pitchFamily="34" charset="0"/>
+              <a:buChar char="•"/>
+            </a:pPr>
+            <a:r>
+              <a:rPr lang="en-US" altLang="ja-JP" dirty="0"/>
+              <a:t>LLM</a:t>
+            </a:r>
+            <a:r>
+              <a:rPr lang="ja-JP" altLang="en-US" dirty="0"/>
+              <a:t>の急激な進化</a:t>
             </a:r>
             <a:endParaRPr lang="en-US" altLang="ja-JP" dirty="0"/>
           </a:p>
@@ -14971,6 +15119,10 @@
               <a:buChar char="•"/>
             </a:pPr>
             <a:r>
+              <a:rPr lang="ja-JP" altLang="en-US" dirty="0"/>
+              <a:t>既存</a:t>
+            </a:r>
+            <a:r>
               <a:rPr lang="en-US" altLang="ja-JP" dirty="0"/>
               <a:t>LLM</a:t>
             </a:r>
@@ -14987,7 +15139,7 @@
             </a:pPr>
             <a:r>
               <a:rPr lang="ja-JP" altLang="en-US"/>
-              <a:t>手法としては本研究に最も近い</a:t>
+              <a:t>手法としては本研究に最も近い？</a:t>
             </a:r>
             <a:endParaRPr lang="en-US" altLang="ja-JP" dirty="0"/>
           </a:p>
@@ -17391,7 +17543,7 @@
         </p:nvSpPr>
         <p:spPr>
           <a:xfrm>
-            <a:off x="0" y="643420"/>
+            <a:off x="0" y="590256"/>
             <a:ext cx="6705682" cy="2308324"/>
           </a:xfrm>
           <a:prstGeom prst="rect">

--- a/jsik2026taikai_rev.pptx
+++ b/jsik2026taikai_rev.pptx
@@ -17,9 +17,9 @@
     <p:sldId id="305" r:id="rId8"/>
     <p:sldId id="307" r:id="rId9"/>
     <p:sldId id="318" r:id="rId10"/>
-    <p:sldId id="309" r:id="rId11"/>
-    <p:sldId id="310" r:id="rId12"/>
-    <p:sldId id="308" r:id="rId13"/>
+    <p:sldId id="308" r:id="rId11"/>
+    <p:sldId id="309" r:id="rId12"/>
+    <p:sldId id="310" r:id="rId13"/>
     <p:sldId id="312" r:id="rId14"/>
     <p:sldId id="317" r:id="rId15"/>
     <p:sldId id="314" r:id="rId16"/>
@@ -217,7 +217,7 @@
           <a:p>
             <a:fld id="{21858D78-C21E-6D4A-8EB0-1034401A7884}" type="datetimeFigureOut">
               <a:rPr kumimoji="1" lang="ja-JP" altLang="en-US" smtClean="0"/>
-              <a:t>2026/5/14</a:t>
+              <a:t>2026/5/19</a:t>
             </a:fld>
             <a:endParaRPr kumimoji="1" lang="ja-JP" altLang="en-US"/>
           </a:p>
@@ -862,7 +862,7 @@
           <a:p>
             <a:fld id="{716789AD-CAC3-AD41-B5C9-BF5C62A1889D}" type="datetimeFigureOut">
               <a:rPr kumimoji="1" lang="ja-JP" altLang="en-US" smtClean="0"/>
-              <a:t>2026/5/14</a:t>
+              <a:t>2026/5/19</a:t>
             </a:fld>
             <a:endParaRPr kumimoji="1" lang="ja-JP" altLang="en-US"/>
           </a:p>
@@ -1092,7 +1092,7 @@
           <a:p>
             <a:fld id="{716789AD-CAC3-AD41-B5C9-BF5C62A1889D}" type="datetimeFigureOut">
               <a:rPr kumimoji="1" lang="ja-JP" altLang="en-US" smtClean="0"/>
-              <a:t>2026/5/14</a:t>
+              <a:t>2026/5/19</a:t>
             </a:fld>
             <a:endParaRPr kumimoji="1" lang="ja-JP" altLang="en-US"/>
           </a:p>
@@ -1332,7 +1332,7 @@
           <a:p>
             <a:fld id="{716789AD-CAC3-AD41-B5C9-BF5C62A1889D}" type="datetimeFigureOut">
               <a:rPr kumimoji="1" lang="ja-JP" altLang="en-US" smtClean="0"/>
-              <a:t>2026/5/14</a:t>
+              <a:t>2026/5/19</a:t>
             </a:fld>
             <a:endParaRPr kumimoji="1" lang="ja-JP" altLang="en-US"/>
           </a:p>
@@ -1562,7 +1562,7 @@
           <a:p>
             <a:fld id="{716789AD-CAC3-AD41-B5C9-BF5C62A1889D}" type="datetimeFigureOut">
               <a:rPr kumimoji="1" lang="ja-JP" altLang="en-US" smtClean="0"/>
-              <a:t>2026/5/14</a:t>
+              <a:t>2026/5/19</a:t>
             </a:fld>
             <a:endParaRPr kumimoji="1" lang="ja-JP" altLang="en-US"/>
           </a:p>
@@ -1837,7 +1837,7 @@
           <a:p>
             <a:fld id="{716789AD-CAC3-AD41-B5C9-BF5C62A1889D}" type="datetimeFigureOut">
               <a:rPr kumimoji="1" lang="ja-JP" altLang="en-US" smtClean="0"/>
-              <a:t>2026/5/14</a:t>
+              <a:t>2026/5/19</a:t>
             </a:fld>
             <a:endParaRPr kumimoji="1" lang="ja-JP" altLang="en-US"/>
           </a:p>
@@ -2166,7 +2166,7 @@
           <a:p>
             <a:fld id="{716789AD-CAC3-AD41-B5C9-BF5C62A1889D}" type="datetimeFigureOut">
               <a:rPr kumimoji="1" lang="ja-JP" altLang="en-US" smtClean="0"/>
-              <a:t>2026/5/14</a:t>
+              <a:t>2026/5/19</a:t>
             </a:fld>
             <a:endParaRPr kumimoji="1" lang="ja-JP" altLang="en-US"/>
           </a:p>
@@ -2642,7 +2642,7 @@
           <a:p>
             <a:fld id="{716789AD-CAC3-AD41-B5C9-BF5C62A1889D}" type="datetimeFigureOut">
               <a:rPr kumimoji="1" lang="ja-JP" altLang="en-US" smtClean="0"/>
-              <a:t>2026/5/14</a:t>
+              <a:t>2026/5/19</a:t>
             </a:fld>
             <a:endParaRPr kumimoji="1" lang="ja-JP" altLang="en-US"/>
           </a:p>
@@ -2783,7 +2783,7 @@
           <a:p>
             <a:fld id="{716789AD-CAC3-AD41-B5C9-BF5C62A1889D}" type="datetimeFigureOut">
               <a:rPr kumimoji="1" lang="ja-JP" altLang="en-US" smtClean="0"/>
-              <a:t>2026/5/14</a:t>
+              <a:t>2026/5/19</a:t>
             </a:fld>
             <a:endParaRPr kumimoji="1" lang="ja-JP" altLang="en-US"/>
           </a:p>
@@ -2896,7 +2896,7 @@
           <a:p>
             <a:fld id="{716789AD-CAC3-AD41-B5C9-BF5C62A1889D}" type="datetimeFigureOut">
               <a:rPr kumimoji="1" lang="ja-JP" altLang="en-US" smtClean="0"/>
-              <a:t>2026/5/14</a:t>
+              <a:t>2026/5/19</a:t>
             </a:fld>
             <a:endParaRPr kumimoji="1" lang="ja-JP" altLang="en-US"/>
           </a:p>
@@ -3239,7 +3239,7 @@
           <a:p>
             <a:fld id="{716789AD-CAC3-AD41-B5C9-BF5C62A1889D}" type="datetimeFigureOut">
               <a:rPr kumimoji="1" lang="ja-JP" altLang="en-US" smtClean="0"/>
-              <a:t>2026/5/14</a:t>
+              <a:t>2026/5/19</a:t>
             </a:fld>
             <a:endParaRPr kumimoji="1" lang="ja-JP" altLang="en-US"/>
           </a:p>
@@ -3527,7 +3527,7 @@
           <a:p>
             <a:fld id="{716789AD-CAC3-AD41-B5C9-BF5C62A1889D}" type="datetimeFigureOut">
               <a:rPr kumimoji="1" lang="ja-JP" altLang="en-US" smtClean="0"/>
-              <a:t>2026/5/14</a:t>
+              <a:t>2026/5/19</a:t>
             </a:fld>
             <a:endParaRPr kumimoji="1" lang="ja-JP" altLang="en-US"/>
           </a:p>
@@ -3800,7 +3800,7 @@
           <a:p>
             <a:fld id="{716789AD-CAC3-AD41-B5C9-BF5C62A1889D}" type="datetimeFigureOut">
               <a:rPr kumimoji="1" lang="ja-JP" altLang="en-US" smtClean="0"/>
-              <a:t>2026/5/14</a:t>
+              <a:t>2026/5/19</a:t>
             </a:fld>
             <a:endParaRPr kumimoji="1" lang="ja-JP" altLang="en-US"/>
           </a:p>
@@ -4537,6 +4537,910 @@
         <p:cNvPr id="1" name="">
           <a:extLst>
             <a:ext uri="{FF2B5EF4-FFF2-40B4-BE49-F238E27FC236}">
+              <a16:creationId xmlns:a16="http://schemas.microsoft.com/office/drawing/2014/main" id="{DC0D387A-1453-95D2-ECE4-F0F5846A713A}"/>
+            </a:ext>
+          </a:extLst>
+        </p:cNvPr>
+        <p:cNvGrpSpPr/>
+        <p:nvPr/>
+      </p:nvGrpSpPr>
+      <p:grpSpPr>
+        <a:xfrm>
+          <a:off x="0" y="0"/>
+          <a:ext cx="0" cy="0"/>
+          <a:chOff x="0" y="0"/>
+          <a:chExt cx="0" cy="0"/>
+        </a:xfrm>
+      </p:grpSpPr>
+      <p:sp>
+        <p:nvSpPr>
+          <p:cNvPr id="2" name="タイトル 1">
+            <a:extLst>
+              <a:ext uri="{FF2B5EF4-FFF2-40B4-BE49-F238E27FC236}">
+                <a16:creationId xmlns:a16="http://schemas.microsoft.com/office/drawing/2014/main" id="{5B2EEC0A-3EFA-7A7C-9D24-A9AAFD07EE0F}"/>
+              </a:ext>
+            </a:extLst>
+          </p:cNvPr>
+          <p:cNvSpPr>
+            <a:spLocks noGrp="1"/>
+          </p:cNvSpPr>
+          <p:nvPr>
+            <p:ph type="title"/>
+          </p:nvPr>
+        </p:nvSpPr>
+        <p:spPr>
+          <a:xfrm>
+            <a:off x="0" y="1"/>
+            <a:ext cx="12192000" cy="577516"/>
+          </a:xfrm>
+          <a:solidFill>
+            <a:schemeClr val="bg1">
+              <a:lumMod val="85000"/>
+            </a:schemeClr>
+          </a:solidFill>
+        </p:spPr>
+        <p:txBody>
+          <a:bodyPr>
+            <a:normAutofit fontScale="90000"/>
+          </a:bodyPr>
+          <a:lstStyle/>
+          <a:p>
+            <a:r>
+              <a:rPr kumimoji="1" lang="ja-JP" altLang="en-US" sz="3600"/>
+              <a:t>マテリアル・方法（</a:t>
+            </a:r>
+            <a:r>
+              <a:rPr lang="ja-JP" altLang="en-US" sz="3600"/>
+              <a:t>作業用ファイル</a:t>
+            </a:r>
+            <a:r>
+              <a:rPr kumimoji="1" lang="ja-JP" altLang="en-US" sz="3600"/>
+              <a:t>の例）</a:t>
+            </a:r>
+          </a:p>
+        </p:txBody>
+      </p:sp>
+      <p:sp>
+        <p:nvSpPr>
+          <p:cNvPr id="4" name="テキスト ボックス 3">
+            <a:extLst>
+              <a:ext uri="{FF2B5EF4-FFF2-40B4-BE49-F238E27FC236}">
+                <a16:creationId xmlns:a16="http://schemas.microsoft.com/office/drawing/2014/main" id="{605A0A9E-028F-F0D6-C3A3-7E6D8D398283}"/>
+              </a:ext>
+            </a:extLst>
+          </p:cNvPr>
+          <p:cNvSpPr txBox="1"/>
+          <p:nvPr/>
+        </p:nvSpPr>
+        <p:spPr>
+          <a:xfrm>
+            <a:off x="1" y="1201740"/>
+            <a:ext cx="12045695" cy="3416320"/>
+          </a:xfrm>
+          <a:prstGeom prst="rect">
+            <a:avLst/>
+          </a:prstGeom>
+          <a:noFill/>
+        </p:spPr>
+        <p:txBody>
+          <a:bodyPr wrap="square" rtlCol="0">
+            <a:spAutoFit/>
+          </a:bodyPr>
+          <a:lstStyle/>
+          <a:p>
+            <a:r>
+              <a:rPr lang="en-US" altLang="ja-JP" dirty="0"/>
+              <a:t>[</a:t>
+            </a:r>
+            <a:r>
+              <a:rPr lang="en-US" altLang="ja-JP" dirty="0">
+                <a:highlight>
+                  <a:srgbClr val="808080"/>
+                </a:highlight>
+              </a:rPr>
+              <a:t>["</a:t>
+            </a:r>
+            <a:r>
+              <a:rPr lang="ja-JP" altLang="en-US">
+                <a:highlight>
+                  <a:srgbClr val="808080"/>
+                </a:highlight>
+              </a:rPr>
+              <a:t>成</a:t>
+            </a:r>
+            <a:r>
+              <a:rPr lang="en-US" altLang="ja-JP" dirty="0">
+                <a:highlight>
+                  <a:srgbClr val="808080"/>
+                </a:highlight>
+              </a:rPr>
+              <a:t>","</a:t>
+            </a:r>
+            <a:r>
+              <a:rPr lang="ja-JP" altLang="en-US">
+                <a:highlight>
+                  <a:srgbClr val="808080"/>
+                </a:highlight>
+              </a:rPr>
+              <a:t>成</a:t>
+            </a:r>
+            <a:r>
+              <a:rPr lang="en-US" altLang="ja-JP" dirty="0">
+                <a:highlight>
+                  <a:srgbClr val="808080"/>
+                </a:highlight>
+              </a:rPr>
+              <a:t>"]</a:t>
+            </a:r>
+            <a:r>
+              <a:rPr lang="en-US" altLang="ja-JP" dirty="0"/>
+              <a:t>,</a:t>
+            </a:r>
+            <a:r>
+              <a:rPr lang="en-US" altLang="ja-JP" u="sng" dirty="0"/>
+              <a:t>["</a:t>
+            </a:r>
+            <a:r>
+              <a:rPr lang="ja-JP" altLang="en-US" u="sng"/>
+              <a:t>成</a:t>
+            </a:r>
+            <a:r>
+              <a:rPr lang="en-US" altLang="ja-JP" u="sng" dirty="0"/>
+              <a:t>","</a:t>
+            </a:r>
+            <a:r>
+              <a:rPr lang="ja-JP" altLang="en-US" u="sng"/>
+              <a:t>成</a:t>
+            </a:r>
+            <a:r>
+              <a:rPr lang="en-US" altLang="ja-JP" u="sng" dirty="0"/>
+              <a:t>"]</a:t>
+            </a:r>
+            <a:r>
+              <a:rPr lang="en-US" altLang="ja-JP" dirty="0"/>
+              <a:t>,</a:t>
+            </a:r>
+            <a:r>
+              <a:rPr lang="en-US" altLang="ja-JP" dirty="0">
+                <a:highlight>
+                  <a:srgbClr val="808080"/>
+                </a:highlight>
+              </a:rPr>
+              <a:t>"</a:t>
+            </a:r>
+            <a:r>
+              <a:rPr lang="ja-JP" altLang="en-US">
+                <a:highlight>
+                  <a:srgbClr val="808080"/>
+                </a:highlight>
+              </a:rPr>
+              <a:t>情報通信工学 </a:t>
+            </a:r>
+            <a:r>
+              <a:rPr lang="en-US" altLang="ja-JP" dirty="0">
+                <a:highlight>
+                  <a:srgbClr val="808080"/>
+                </a:highlight>
+              </a:rPr>
+              <a:t>/ </a:t>
+            </a:r>
+            <a:r>
+              <a:rPr lang="ja-JP" altLang="en-US">
+                <a:highlight>
+                  <a:srgbClr val="808080"/>
+                </a:highlight>
+              </a:rPr>
+              <a:t>電気電子工学 </a:t>
+            </a:r>
+            <a:r>
+              <a:rPr lang="en-US" altLang="ja-JP" dirty="0">
+                <a:highlight>
+                  <a:srgbClr val="808080"/>
+                </a:highlight>
+              </a:rPr>
+              <a:t>/ </a:t>
+            </a:r>
+            <a:r>
+              <a:rPr lang="ja-JP" altLang="en-US">
+                <a:highlight>
+                  <a:srgbClr val="808080"/>
+                </a:highlight>
+              </a:rPr>
+              <a:t>工学</a:t>
+            </a:r>
+            <a:r>
+              <a:rPr lang="en-US" altLang="ja-JP" dirty="0">
+                <a:highlight>
+                  <a:srgbClr val="808080"/>
+                </a:highlight>
+              </a:rPr>
+              <a:t>"</a:t>
+            </a:r>
+            <a:r>
+              <a:rPr lang="en-US" altLang="ja-JP" dirty="0"/>
+              <a:t>,["</a:t>
+            </a:r>
+            <a:r>
+              <a:rPr lang="ja-JP" altLang="en-US"/>
+              <a:t>高品質極薄</a:t>
+            </a:r>
+            <a:r>
+              <a:rPr lang="en" altLang="ja-JP" dirty="0"/>
+              <a:t>Si</a:t>
+            </a:r>
+            <a:r>
+              <a:rPr lang="ja-JP" altLang="en-US"/>
+              <a:t>系絶縁膜の低温形成と機能評価に関する研究</a:t>
+            </a:r>
+            <a:r>
+              <a:rPr lang="en-US" altLang="ja-JP" dirty="0"/>
+              <a:t>","09650363"," ","</a:t>
+            </a:r>
+            <a:r>
+              <a:rPr lang="ja-JP" altLang="en-US"/>
+              <a:t>本研究では、高活性なプラズマの生成が容易に実現できる</a:t>
+            </a:r>
+            <a:r>
+              <a:rPr lang="en" altLang="ja-JP" dirty="0"/>
+              <a:t>ECR(Electron Cyclotron Resonance)</a:t>
+            </a:r>
+            <a:r>
+              <a:rPr lang="ja-JP" altLang="en-US"/>
+              <a:t>マイクロ波プラズマと</a:t>
+            </a:r>
+            <a:r>
+              <a:rPr lang="en" altLang="ja-JP" dirty="0"/>
+              <a:t>Si</a:t>
+            </a:r>
+            <a:r>
+              <a:rPr lang="ja-JP" altLang="en-US"/>
+              <a:t>ターゲットからのスパッタリングを組み合わせた</a:t>
+            </a:r>
+            <a:r>
+              <a:rPr lang="en" altLang="ja-JP" dirty="0"/>
+              <a:t>ECR</a:t>
+            </a:r>
+            <a:r>
+              <a:rPr lang="ja-JP" altLang="en-US"/>
+              <a:t>スパッタ法を用いて、</a:t>
+            </a:r>
+            <a:r>
+              <a:rPr lang="en" altLang="ja-JP" dirty="0"/>
+              <a:t>Si</a:t>
+            </a:r>
+            <a:r>
+              <a:rPr lang="ja-JP" altLang="en-US"/>
+              <a:t>系絶縁膜を低温で堆積するプロセス技術を確立し、堆積された膜の機能性を発現させることを目的としている。この研究で得られた成果は、以下の通りである。 </a:t>
+            </a:r>
+            <a:r>
+              <a:rPr lang="en-US" altLang="ja-JP" dirty="0"/>
+              <a:t>(1) </a:t>
+            </a:r>
+            <a:r>
+              <a:rPr lang="ja-JP" altLang="en-US"/>
+              <a:t>プラズマ条件を最適化することにより、</a:t>
+            </a:r>
+            <a:r>
+              <a:rPr lang="en-US" altLang="ja-JP" dirty="0"/>
+              <a:t>130℃</a:t>
+            </a:r>
+            <a:r>
+              <a:rPr lang="ja-JP" altLang="en-US"/>
+              <a:t>の低温で成膜速度</a:t>
+            </a:r>
+            <a:r>
+              <a:rPr lang="en-US" altLang="ja-JP" dirty="0"/>
+              <a:t>23</a:t>
+            </a:r>
+            <a:r>
+              <a:rPr lang="en" altLang="ja-JP" dirty="0"/>
+              <a:t>nm/min</a:t>
+            </a:r>
+            <a:r>
+              <a:rPr lang="ja-JP" altLang="en"/>
+              <a:t>、</a:t>
+            </a:r>
+            <a:r>
+              <a:rPr lang="ja-JP" altLang="en-US"/>
+              <a:t>絶縁破壊電界</a:t>
+            </a:r>
+            <a:r>
+              <a:rPr lang="en-US" altLang="ja-JP" dirty="0"/>
+              <a:t>10</a:t>
+            </a:r>
+            <a:r>
+              <a:rPr lang="en" altLang="ja-JP" dirty="0"/>
+              <a:t>MV/cm</a:t>
+            </a:r>
+            <a:r>
+              <a:rPr lang="ja-JP" altLang="en-US"/>
+              <a:t>を有する</a:t>
+            </a:r>
+            <a:r>
+              <a:rPr lang="en" altLang="ja-JP" dirty="0"/>
+              <a:t>Si</a:t>
+            </a:r>
+            <a:r>
+              <a:rPr lang="ja-JP" altLang="en-US"/>
+              <a:t>酸化膜を形成する技術を確立した。 </a:t>
+            </a:r>
+            <a:r>
+              <a:rPr lang="en-US" altLang="ja-JP" dirty="0"/>
+              <a:t>(2) </a:t>
+            </a:r>
+            <a:r>
+              <a:rPr lang="en" altLang="ja-JP" dirty="0"/>
+              <a:t>Si</a:t>
+            </a:r>
+            <a:r>
+              <a:rPr lang="ja-JP" altLang="en-US"/>
+              <a:t>酸化膜堆積前にプラズマ酸化処理を行い、それに続く</a:t>
+            </a:r>
+            <a:r>
+              <a:rPr lang="en-US" altLang="ja-JP" dirty="0"/>
+              <a:t>130℃</a:t>
+            </a:r>
+            <a:r>
+              <a:rPr lang="ja-JP" altLang="en-US"/>
+              <a:t>での低温堆積と</a:t>
+            </a:r>
+            <a:r>
+              <a:rPr lang="en-US" altLang="ja-JP" dirty="0"/>
+              <a:t>450℃</a:t>
+            </a:r>
+            <a:r>
+              <a:rPr lang="ja-JP" altLang="en-US"/>
+              <a:t>でのアニールにより、</a:t>
+            </a:r>
+            <a:r>
+              <a:rPr lang="en-US" altLang="ja-JP" dirty="0"/>
+              <a:t>9</a:t>
+            </a:r>
+            <a:r>
+              <a:rPr lang="en" altLang="ja-JP" dirty="0"/>
+              <a:t>nm</a:t>
+            </a:r>
+            <a:r>
+              <a:rPr lang="ja-JP" altLang="en-US"/>
+              <a:t>の極薄</a:t>
+            </a:r>
+            <a:r>
+              <a:rPr lang="en" altLang="ja-JP" dirty="0"/>
+              <a:t>Si</a:t>
+            </a:r>
+            <a:r>
+              <a:rPr lang="ja-JP" altLang="en-US"/>
+              <a:t>酸化膜の低温形成プロセスを確立した。この</a:t>
+            </a:r>
+            <a:r>
+              <a:rPr lang="en" altLang="ja-JP" dirty="0"/>
+              <a:t>Si</a:t>
+            </a:r>
+            <a:r>
+              <a:rPr lang="ja-JP" altLang="en-US"/>
+              <a:t>酸化膜は、絶縁破壊電界</a:t>
+            </a:r>
+            <a:r>
+              <a:rPr lang="en-US" altLang="ja-JP" dirty="0"/>
+              <a:t>9</a:t>
+            </a:r>
+            <a:r>
+              <a:rPr lang="en" altLang="ja-JP" dirty="0"/>
+              <a:t>MV/cm</a:t>
+            </a:r>
+            <a:r>
+              <a:rPr lang="ja-JP" altLang="en"/>
+              <a:t>、</a:t>
+            </a:r>
+            <a:r>
+              <a:rPr lang="ja-JP" altLang="en-US"/>
+              <a:t>界面準位密度</a:t>
+            </a:r>
+            <a:r>
+              <a:rPr lang="en-US" altLang="ja-JP" dirty="0"/>
+              <a:t>1</a:t>
+            </a:r>
+            <a:r>
+              <a:rPr lang="en" altLang="ja-JP" dirty="0"/>
+              <a:t>x10^&lt;11&gt;cm^&lt;-2&gt;eV^&lt;-1&gt;</a:t>
+            </a:r>
+            <a:r>
+              <a:rPr lang="ja-JP" altLang="en-US"/>
+              <a:t>以下、固定電荷密度</a:t>
+            </a:r>
+            <a:r>
+              <a:rPr lang="en-US" altLang="ja-JP" dirty="0"/>
+              <a:t>1</a:t>
+            </a:r>
+            <a:r>
+              <a:rPr lang="en" altLang="ja-JP" dirty="0"/>
+              <a:t>x10^&lt;11&gt;cm^&lt;-2&gt;</a:t>
+            </a:r>
+            <a:r>
+              <a:rPr lang="ja-JP" altLang="en-US"/>
+              <a:t>以下の機能を有する。 </a:t>
+            </a:r>
+            <a:r>
+              <a:rPr lang="en-US" altLang="ja-JP" dirty="0"/>
+              <a:t>(3) </a:t>
+            </a:r>
+            <a:r>
+              <a:rPr lang="ja-JP" altLang="en-US"/>
+              <a:t>酸素と窒素の混合プラズマを用いてプラズマ条件を最適化することにより、</a:t>
+            </a:r>
+            <a:r>
+              <a:rPr lang="en-US" altLang="ja-JP" dirty="0"/>
+              <a:t>130℃</a:t>
+            </a:r>
+            <a:r>
+              <a:rPr lang="ja-JP" altLang="en-US"/>
+              <a:t>の低温で、絶縁破壊電界</a:t>
+            </a:r>
+            <a:r>
+              <a:rPr lang="en-US" altLang="ja-JP" dirty="0"/>
+              <a:t>13</a:t>
+            </a:r>
+            <a:r>
+              <a:rPr lang="en" altLang="ja-JP" dirty="0"/>
+              <a:t>MV/cm</a:t>
+            </a:r>
+            <a:r>
+              <a:rPr lang="ja-JP" altLang="en-US"/>
+              <a:t>を有する</a:t>
+            </a:r>
+            <a:r>
+              <a:rPr lang="en" altLang="ja-JP" dirty="0"/>
+              <a:t>Si</a:t>
+            </a:r>
+            <a:r>
+              <a:rPr lang="ja-JP" altLang="en-US"/>
+              <a:t>酸窒化膜が形成できることを明らかにした。 </a:t>
+            </a:r>
+            <a:r>
+              <a:rPr lang="en-US" altLang="ja-JP" dirty="0"/>
+              <a:t>(4) </a:t>
+            </a:r>
+            <a:r>
+              <a:rPr lang="ja-JP" altLang="en-US"/>
+              <a:t>緻密な</a:t>
+            </a:r>
+            <a:r>
+              <a:rPr lang="en" altLang="ja-JP" dirty="0" err="1"/>
+              <a:t>SiN</a:t>
+            </a:r>
+            <a:r>
+              <a:rPr lang="ja-JP" altLang="en-US"/>
+              <a:t>膜が</a:t>
+            </a:r>
+            <a:r>
+              <a:rPr lang="en" altLang="ja-JP" dirty="0"/>
+              <a:t>ECR</a:t>
+            </a:r>
+            <a:r>
+              <a:rPr lang="ja-JP" altLang="en-US"/>
+              <a:t>スパッター法を用いて室温で堆積された。この窒化膜は、屈折率、赤外吸収、化学エッチングレイト等の特性は高温</a:t>
+            </a:r>
+            <a:r>
+              <a:rPr lang="en" altLang="ja-JP" dirty="0"/>
+              <a:t>CVD</a:t>
+            </a:r>
+            <a:r>
+              <a:rPr lang="ja-JP" altLang="en-US"/>
+              <a:t>で成膜したものと同等であることが明らかとなった。</a:t>
+            </a:r>
+            <a:r>
+              <a:rPr lang="en-US" altLang="ja-JP" dirty="0"/>
+              <a:t>"," "," "]]</a:t>
+            </a:r>
+          </a:p>
+        </p:txBody>
+      </p:sp>
+      <p:sp>
+        <p:nvSpPr>
+          <p:cNvPr id="5" name="テキスト ボックス 4">
+            <a:extLst>
+              <a:ext uri="{FF2B5EF4-FFF2-40B4-BE49-F238E27FC236}">
+                <a16:creationId xmlns:a16="http://schemas.microsoft.com/office/drawing/2014/main" id="{9C24996B-F6F7-4C7A-D224-CBE1D5484A48}"/>
+              </a:ext>
+            </a:extLst>
+          </p:cNvPr>
+          <p:cNvSpPr txBox="1"/>
+          <p:nvPr/>
+        </p:nvSpPr>
+        <p:spPr>
+          <a:xfrm>
+            <a:off x="-1" y="577517"/>
+            <a:ext cx="803425" cy="369332"/>
+          </a:xfrm>
+          <a:prstGeom prst="rect">
+            <a:avLst/>
+          </a:prstGeom>
+          <a:noFill/>
+        </p:spPr>
+        <p:txBody>
+          <a:bodyPr wrap="none" rtlCol="0">
+            <a:spAutoFit/>
+          </a:bodyPr>
+          <a:lstStyle/>
+          <a:p>
+            <a:r>
+              <a:rPr kumimoji="1" lang="en-US" altLang="ja-JP"/>
+              <a:t>Input:</a:t>
+            </a:r>
+            <a:endParaRPr kumimoji="1" lang="ja-JP" altLang="en-US"/>
+          </a:p>
+        </p:txBody>
+      </p:sp>
+      <p:sp>
+        <p:nvSpPr>
+          <p:cNvPr id="6" name="テキスト ボックス 5">
+            <a:extLst>
+              <a:ext uri="{FF2B5EF4-FFF2-40B4-BE49-F238E27FC236}">
+                <a16:creationId xmlns:a16="http://schemas.microsoft.com/office/drawing/2014/main" id="{D998F3A7-0629-53CA-682F-82B5E7A90C5E}"/>
+              </a:ext>
+            </a:extLst>
+          </p:cNvPr>
+          <p:cNvSpPr txBox="1"/>
+          <p:nvPr/>
+        </p:nvSpPr>
+        <p:spPr>
+          <a:xfrm>
+            <a:off x="0" y="4988381"/>
+            <a:ext cx="2880917" cy="369332"/>
+          </a:xfrm>
+          <a:prstGeom prst="rect">
+            <a:avLst/>
+          </a:prstGeom>
+          <a:noFill/>
+        </p:spPr>
+        <p:txBody>
+          <a:bodyPr wrap="none" rtlCol="0">
+            <a:spAutoFit/>
+          </a:bodyPr>
+          <a:lstStyle/>
+          <a:p>
+            <a:r>
+              <a:rPr lang="en-US" altLang="ja-JP"/>
+              <a:t>Out</a:t>
+            </a:r>
+            <a:r>
+              <a:rPr kumimoji="1" lang="en-US" altLang="ja-JP"/>
+              <a:t>put</a:t>
+            </a:r>
+            <a:r>
+              <a:rPr kumimoji="1" lang="ja-JP" altLang="en-US"/>
+              <a:t>（想定する形式）</a:t>
+            </a:r>
+            <a:r>
+              <a:rPr kumimoji="1" lang="en-US" altLang="ja-JP"/>
+              <a:t>:</a:t>
+            </a:r>
+            <a:endParaRPr kumimoji="1" lang="ja-JP" altLang="en-US"/>
+          </a:p>
+        </p:txBody>
+      </p:sp>
+      <p:sp>
+        <p:nvSpPr>
+          <p:cNvPr id="7" name="テキスト ボックス 6">
+            <a:extLst>
+              <a:ext uri="{FF2B5EF4-FFF2-40B4-BE49-F238E27FC236}">
+                <a16:creationId xmlns:a16="http://schemas.microsoft.com/office/drawing/2014/main" id="{25003854-6FEC-4B77-4547-707EDD47058A}"/>
+              </a:ext>
+            </a:extLst>
+          </p:cNvPr>
+          <p:cNvSpPr txBox="1"/>
+          <p:nvPr/>
+        </p:nvSpPr>
+        <p:spPr>
+          <a:xfrm>
+            <a:off x="-1" y="5357713"/>
+            <a:ext cx="971741" cy="369332"/>
+          </a:xfrm>
+          <a:prstGeom prst="rect">
+            <a:avLst/>
+          </a:prstGeom>
+          <a:noFill/>
+        </p:spPr>
+        <p:txBody>
+          <a:bodyPr wrap="none" rtlCol="0">
+            <a:spAutoFit/>
+          </a:bodyPr>
+          <a:lstStyle/>
+          <a:p>
+            <a:r>
+              <a:rPr lang="en-US" altLang="ja-JP"/>
+              <a:t>["</a:t>
+            </a:r>
+            <a:r>
+              <a:rPr lang="ja-JP" altLang="en-US"/>
+              <a:t>成</a:t>
+            </a:r>
+            <a:r>
+              <a:rPr lang="en-US" altLang="ja-JP"/>
+              <a:t>",0]</a:t>
+            </a:r>
+            <a:endParaRPr kumimoji="1" lang="ja-JP" altLang="en-US"/>
+          </a:p>
+        </p:txBody>
+      </p:sp>
+      <p:sp>
+        <p:nvSpPr>
+          <p:cNvPr id="8" name="テキスト ボックス 7">
+            <a:extLst>
+              <a:ext uri="{FF2B5EF4-FFF2-40B4-BE49-F238E27FC236}">
+                <a16:creationId xmlns:a16="http://schemas.microsoft.com/office/drawing/2014/main" id="{DA8703AE-573B-9728-A3C3-997C4B6E8C7F}"/>
+              </a:ext>
+            </a:extLst>
+          </p:cNvPr>
+          <p:cNvSpPr txBox="1"/>
+          <p:nvPr/>
+        </p:nvSpPr>
+        <p:spPr>
+          <a:xfrm>
+            <a:off x="1856114" y="6034822"/>
+            <a:ext cx="3057247" cy="307777"/>
+          </a:xfrm>
+          <a:prstGeom prst="rect">
+            <a:avLst/>
+          </a:prstGeom>
+          <a:noFill/>
+        </p:spPr>
+        <p:txBody>
+          <a:bodyPr wrap="none" rtlCol="0">
+            <a:spAutoFit/>
+          </a:bodyPr>
+          <a:lstStyle/>
+          <a:p>
+            <a:r>
+              <a:rPr kumimoji="1" lang="ja-JP" altLang="en-US" sz="1400"/>
+              <a:t>地名と判定したものはそのまま残す</a:t>
+            </a:r>
+          </a:p>
+        </p:txBody>
+      </p:sp>
+      <p:sp>
+        <p:nvSpPr>
+          <p:cNvPr id="9" name="テキスト ボックス 8">
+            <a:extLst>
+              <a:ext uri="{FF2B5EF4-FFF2-40B4-BE49-F238E27FC236}">
+                <a16:creationId xmlns:a16="http://schemas.microsoft.com/office/drawing/2014/main" id="{6E3ED00A-3E53-034E-8909-DCE8C51D38E8}"/>
+              </a:ext>
+            </a:extLst>
+          </p:cNvPr>
+          <p:cNvSpPr txBox="1"/>
+          <p:nvPr/>
+        </p:nvSpPr>
+        <p:spPr>
+          <a:xfrm>
+            <a:off x="1669936" y="5727045"/>
+            <a:ext cx="3695242" cy="307777"/>
+          </a:xfrm>
+          <a:prstGeom prst="rect">
+            <a:avLst/>
+          </a:prstGeom>
+          <a:noFill/>
+        </p:spPr>
+        <p:txBody>
+          <a:bodyPr wrap="none" rtlCol="0">
+            <a:spAutoFit/>
+          </a:bodyPr>
+          <a:lstStyle/>
+          <a:p>
+            <a:r>
+              <a:rPr kumimoji="1" lang="ja-JP" altLang="en-US" sz="1400"/>
+              <a:t>地名でないと判定したものは</a:t>
+            </a:r>
+            <a:r>
+              <a:rPr kumimoji="1" lang="en-US" altLang="ja-JP" sz="1400"/>
+              <a:t>0</a:t>
+            </a:r>
+            <a:r>
+              <a:rPr kumimoji="1" lang="ja-JP" altLang="en-US" sz="1400"/>
+              <a:t>に置き換える</a:t>
+            </a:r>
+          </a:p>
+        </p:txBody>
+      </p:sp>
+      <p:sp>
+        <p:nvSpPr>
+          <p:cNvPr id="10" name="テキスト ボックス 9">
+            <a:extLst>
+              <a:ext uri="{FF2B5EF4-FFF2-40B4-BE49-F238E27FC236}">
+                <a16:creationId xmlns:a16="http://schemas.microsoft.com/office/drawing/2014/main" id="{B16125B5-381B-C4FD-2940-07DA429F3706}"/>
+              </a:ext>
+            </a:extLst>
+          </p:cNvPr>
+          <p:cNvSpPr txBox="1"/>
+          <p:nvPr/>
+        </p:nvSpPr>
+        <p:spPr>
+          <a:xfrm>
+            <a:off x="2660822" y="820811"/>
+            <a:ext cx="1806905" cy="307777"/>
+          </a:xfrm>
+          <a:prstGeom prst="rect">
+            <a:avLst/>
+          </a:prstGeom>
+          <a:noFill/>
+        </p:spPr>
+        <p:txBody>
+          <a:bodyPr wrap="none" rtlCol="0">
+            <a:spAutoFit/>
+          </a:bodyPr>
+          <a:lstStyle/>
+          <a:p>
+            <a:r>
+              <a:rPr kumimoji="1" lang="en-US" altLang="ja-JP" sz="1400" dirty="0"/>
+              <a:t>NER</a:t>
+            </a:r>
+            <a:r>
+              <a:rPr kumimoji="1" lang="ja-JP" altLang="en-US" sz="1400"/>
+              <a:t>による抽出結果</a:t>
+            </a:r>
+          </a:p>
+        </p:txBody>
+      </p:sp>
+      <p:cxnSp>
+        <p:nvCxnSpPr>
+          <p:cNvPr id="12" name="カギ線コネクタ 11">
+            <a:extLst>
+              <a:ext uri="{FF2B5EF4-FFF2-40B4-BE49-F238E27FC236}">
+                <a16:creationId xmlns:a16="http://schemas.microsoft.com/office/drawing/2014/main" id="{4CC0870C-CAFC-BCD1-A478-9144D0E96817}"/>
+              </a:ext>
+            </a:extLst>
+          </p:cNvPr>
+          <p:cNvCxnSpPr>
+            <a:cxnSpLocks/>
+            <a:stCxn id="10" idx="1"/>
+          </p:cNvCxnSpPr>
+          <p:nvPr/>
+        </p:nvCxnSpPr>
+        <p:spPr>
+          <a:xfrm rot="10800000" flipV="1">
+            <a:off x="1856114" y="974700"/>
+            <a:ext cx="804708" cy="227040"/>
+          </a:xfrm>
+          <a:prstGeom prst="bentConnector3">
+            <a:avLst>
+              <a:gd name="adj1" fmla="val 99620"/>
+            </a:avLst>
+          </a:prstGeom>
+          <a:ln w="12700">
+            <a:solidFill>
+              <a:schemeClr val="tx1"/>
+            </a:solidFill>
+            <a:tailEnd type="triangle"/>
+          </a:ln>
+        </p:spPr>
+        <p:style>
+          <a:lnRef idx="2">
+            <a:schemeClr val="accent1"/>
+          </a:lnRef>
+          <a:fillRef idx="0">
+            <a:schemeClr val="accent1"/>
+          </a:fillRef>
+          <a:effectRef idx="1">
+            <a:schemeClr val="accent1"/>
+          </a:effectRef>
+          <a:fontRef idx="minor">
+            <a:schemeClr val="tx1"/>
+          </a:fontRef>
+        </p:style>
+      </p:cxnSp>
+      <p:cxnSp>
+        <p:nvCxnSpPr>
+          <p:cNvPr id="15" name="カギ線コネクタ 14">
+            <a:extLst>
+              <a:ext uri="{FF2B5EF4-FFF2-40B4-BE49-F238E27FC236}">
+                <a16:creationId xmlns:a16="http://schemas.microsoft.com/office/drawing/2014/main" id="{BC8931FA-6C64-64C4-5D8D-9F0DD8164590}"/>
+              </a:ext>
+            </a:extLst>
+          </p:cNvPr>
+          <p:cNvCxnSpPr>
+            <a:stCxn id="9" idx="1"/>
+          </p:cNvCxnSpPr>
+          <p:nvPr/>
+        </p:nvCxnSpPr>
+        <p:spPr>
+          <a:xfrm rot="10800000">
+            <a:off x="706582" y="5727046"/>
+            <a:ext cx="963354" cy="153889"/>
+          </a:xfrm>
+          <a:prstGeom prst="bentConnector3">
+            <a:avLst>
+              <a:gd name="adj1" fmla="val 99616"/>
+            </a:avLst>
+          </a:prstGeom>
+          <a:ln w="12700">
+            <a:solidFill>
+              <a:schemeClr val="tx1"/>
+            </a:solidFill>
+            <a:tailEnd type="triangle"/>
+          </a:ln>
+        </p:spPr>
+        <p:style>
+          <a:lnRef idx="2">
+            <a:schemeClr val="accent1"/>
+          </a:lnRef>
+          <a:fillRef idx="0">
+            <a:schemeClr val="accent1"/>
+          </a:fillRef>
+          <a:effectRef idx="1">
+            <a:schemeClr val="accent1"/>
+          </a:effectRef>
+          <a:fontRef idx="minor">
+            <a:schemeClr val="tx1"/>
+          </a:fontRef>
+        </p:style>
+      </p:cxnSp>
+      <p:cxnSp>
+        <p:nvCxnSpPr>
+          <p:cNvPr id="18" name="カギ線コネクタ 17">
+            <a:extLst>
+              <a:ext uri="{FF2B5EF4-FFF2-40B4-BE49-F238E27FC236}">
+                <a16:creationId xmlns:a16="http://schemas.microsoft.com/office/drawing/2014/main" id="{B64DC262-5C37-8FCC-BC2B-71EB33CC94EE}"/>
+              </a:ext>
+            </a:extLst>
+          </p:cNvPr>
+          <p:cNvCxnSpPr>
+            <a:cxnSpLocks/>
+            <a:stCxn id="8" idx="1"/>
+          </p:cNvCxnSpPr>
+          <p:nvPr/>
+        </p:nvCxnSpPr>
+        <p:spPr>
+          <a:xfrm rot="10800000">
+            <a:off x="396974" y="5727045"/>
+            <a:ext cx="1459140" cy="461666"/>
+          </a:xfrm>
+          <a:prstGeom prst="bentConnector3">
+            <a:avLst>
+              <a:gd name="adj1" fmla="val 99849"/>
+            </a:avLst>
+          </a:prstGeom>
+          <a:ln w="12700">
+            <a:solidFill>
+              <a:schemeClr val="tx1"/>
+            </a:solidFill>
+            <a:tailEnd type="triangle"/>
+          </a:ln>
+        </p:spPr>
+        <p:style>
+          <a:lnRef idx="2">
+            <a:schemeClr val="accent1"/>
+          </a:lnRef>
+          <a:fillRef idx="0">
+            <a:schemeClr val="accent1"/>
+          </a:fillRef>
+          <a:effectRef idx="1">
+            <a:schemeClr val="accent1"/>
+          </a:effectRef>
+          <a:fontRef idx="minor">
+            <a:schemeClr val="tx1"/>
+          </a:fontRef>
+        </p:style>
+      </p:cxnSp>
+    </p:spTree>
+    <p:extLst>
+      <p:ext uri="{BB962C8B-B14F-4D97-AF65-F5344CB8AC3E}">
+        <p14:creationId xmlns:p14="http://schemas.microsoft.com/office/powerpoint/2010/main" val="2951289915"/>
+      </p:ext>
+    </p:extLst>
+  </p:cSld>
+  <p:clrMapOvr>
+    <a:masterClrMapping/>
+  </p:clrMapOvr>
+</p:sld>
+</file>
+
+<file path=ppt/slides/slide11.xml><?xml version="1.0" encoding="utf-8"?>
+<p:sld xmlns:a="http://schemas.openxmlformats.org/drawingml/2006/main" xmlns:r="http://schemas.openxmlformats.org/officeDocument/2006/relationships" xmlns:p="http://schemas.openxmlformats.org/presentationml/2006/main">
+  <p:cSld>
+    <p:spTree>
+      <p:nvGrpSpPr>
+        <p:cNvPr id="1" name="">
+          <a:extLst>
+            <a:ext uri="{FF2B5EF4-FFF2-40B4-BE49-F238E27FC236}">
               <a16:creationId xmlns:a16="http://schemas.microsoft.com/office/drawing/2014/main" id="{27B622E3-1D88-097D-0343-32872DBECF48}"/>
             </a:ext>
           </a:extLst>
@@ -4986,7 +5890,7 @@
 </p:sld>
 </file>
 
-<file path=ppt/slides/slide11.xml><?xml version="1.0" encoding="utf-8"?>
+<file path=ppt/slides/slide12.xml><?xml version="1.0" encoding="utf-8"?>
 <p:sld xmlns:a="http://schemas.openxmlformats.org/drawingml/2006/main" xmlns:r="http://schemas.openxmlformats.org/officeDocument/2006/relationships" xmlns:p="http://schemas.openxmlformats.org/presentationml/2006/main">
   <p:cSld>
     <p:spTree>
@@ -5370,910 +6274,6 @@
     <p:extLst>
       <p:ext uri="{BB962C8B-B14F-4D97-AF65-F5344CB8AC3E}">
         <p14:creationId xmlns:p14="http://schemas.microsoft.com/office/powerpoint/2010/main" val="3135446820"/>
-      </p:ext>
-    </p:extLst>
-  </p:cSld>
-  <p:clrMapOvr>
-    <a:masterClrMapping/>
-  </p:clrMapOvr>
-</p:sld>
-</file>
-
-<file path=ppt/slides/slide12.xml><?xml version="1.0" encoding="utf-8"?>
-<p:sld xmlns:a="http://schemas.openxmlformats.org/drawingml/2006/main" xmlns:r="http://schemas.openxmlformats.org/officeDocument/2006/relationships" xmlns:p="http://schemas.openxmlformats.org/presentationml/2006/main">
-  <p:cSld>
-    <p:spTree>
-      <p:nvGrpSpPr>
-        <p:cNvPr id="1" name="">
-          <a:extLst>
-            <a:ext uri="{FF2B5EF4-FFF2-40B4-BE49-F238E27FC236}">
-              <a16:creationId xmlns:a16="http://schemas.microsoft.com/office/drawing/2014/main" id="{DC0D387A-1453-95D2-ECE4-F0F5846A713A}"/>
-            </a:ext>
-          </a:extLst>
-        </p:cNvPr>
-        <p:cNvGrpSpPr/>
-        <p:nvPr/>
-      </p:nvGrpSpPr>
-      <p:grpSpPr>
-        <a:xfrm>
-          <a:off x="0" y="0"/>
-          <a:ext cx="0" cy="0"/>
-          <a:chOff x="0" y="0"/>
-          <a:chExt cx="0" cy="0"/>
-        </a:xfrm>
-      </p:grpSpPr>
-      <p:sp>
-        <p:nvSpPr>
-          <p:cNvPr id="2" name="タイトル 1">
-            <a:extLst>
-              <a:ext uri="{FF2B5EF4-FFF2-40B4-BE49-F238E27FC236}">
-                <a16:creationId xmlns:a16="http://schemas.microsoft.com/office/drawing/2014/main" id="{5B2EEC0A-3EFA-7A7C-9D24-A9AAFD07EE0F}"/>
-              </a:ext>
-            </a:extLst>
-          </p:cNvPr>
-          <p:cNvSpPr>
-            <a:spLocks noGrp="1"/>
-          </p:cNvSpPr>
-          <p:nvPr>
-            <p:ph type="title"/>
-          </p:nvPr>
-        </p:nvSpPr>
-        <p:spPr>
-          <a:xfrm>
-            <a:off x="0" y="1"/>
-            <a:ext cx="12192000" cy="577516"/>
-          </a:xfrm>
-          <a:solidFill>
-            <a:schemeClr val="bg1">
-              <a:lumMod val="85000"/>
-            </a:schemeClr>
-          </a:solidFill>
-        </p:spPr>
-        <p:txBody>
-          <a:bodyPr>
-            <a:normAutofit fontScale="90000"/>
-          </a:bodyPr>
-          <a:lstStyle/>
-          <a:p>
-            <a:r>
-              <a:rPr kumimoji="1" lang="ja-JP" altLang="en-US" sz="3600"/>
-              <a:t>マテリアル・方法（</a:t>
-            </a:r>
-            <a:r>
-              <a:rPr kumimoji="1" lang="en-US" altLang="ja-JP" sz="3600"/>
-              <a:t>JSON</a:t>
-            </a:r>
-            <a:r>
-              <a:rPr kumimoji="1" lang="ja-JP" altLang="en-US" sz="3600"/>
-              <a:t>形式の例）</a:t>
-            </a:r>
-          </a:p>
-        </p:txBody>
-      </p:sp>
-      <p:sp>
-        <p:nvSpPr>
-          <p:cNvPr id="4" name="テキスト ボックス 3">
-            <a:extLst>
-              <a:ext uri="{FF2B5EF4-FFF2-40B4-BE49-F238E27FC236}">
-                <a16:creationId xmlns:a16="http://schemas.microsoft.com/office/drawing/2014/main" id="{605A0A9E-028F-F0D6-C3A3-7E6D8D398283}"/>
-              </a:ext>
-            </a:extLst>
-          </p:cNvPr>
-          <p:cNvSpPr txBox="1"/>
-          <p:nvPr/>
-        </p:nvSpPr>
-        <p:spPr>
-          <a:xfrm>
-            <a:off x="1" y="1201740"/>
-            <a:ext cx="12045695" cy="3416320"/>
-          </a:xfrm>
-          <a:prstGeom prst="rect">
-            <a:avLst/>
-          </a:prstGeom>
-          <a:noFill/>
-        </p:spPr>
-        <p:txBody>
-          <a:bodyPr wrap="square" rtlCol="0">
-            <a:spAutoFit/>
-          </a:bodyPr>
-          <a:lstStyle/>
-          <a:p>
-            <a:r>
-              <a:rPr lang="en-US" altLang="ja-JP" dirty="0"/>
-              <a:t>[</a:t>
-            </a:r>
-            <a:r>
-              <a:rPr lang="en-US" altLang="ja-JP" dirty="0">
-                <a:highlight>
-                  <a:srgbClr val="808080"/>
-                </a:highlight>
-              </a:rPr>
-              <a:t>["</a:t>
-            </a:r>
-            <a:r>
-              <a:rPr lang="ja-JP" altLang="en-US">
-                <a:highlight>
-                  <a:srgbClr val="808080"/>
-                </a:highlight>
-              </a:rPr>
-              <a:t>成</a:t>
-            </a:r>
-            <a:r>
-              <a:rPr lang="en-US" altLang="ja-JP" dirty="0">
-                <a:highlight>
-                  <a:srgbClr val="808080"/>
-                </a:highlight>
-              </a:rPr>
-              <a:t>","</a:t>
-            </a:r>
-            <a:r>
-              <a:rPr lang="ja-JP" altLang="en-US">
-                <a:highlight>
-                  <a:srgbClr val="808080"/>
-                </a:highlight>
-              </a:rPr>
-              <a:t>成</a:t>
-            </a:r>
-            <a:r>
-              <a:rPr lang="en-US" altLang="ja-JP" dirty="0">
-                <a:highlight>
-                  <a:srgbClr val="808080"/>
-                </a:highlight>
-              </a:rPr>
-              <a:t>"]</a:t>
-            </a:r>
-            <a:r>
-              <a:rPr lang="en-US" altLang="ja-JP" dirty="0"/>
-              <a:t>,</a:t>
-            </a:r>
-            <a:r>
-              <a:rPr lang="en-US" altLang="ja-JP" u="sng" dirty="0"/>
-              <a:t>["</a:t>
-            </a:r>
-            <a:r>
-              <a:rPr lang="ja-JP" altLang="en-US" u="sng"/>
-              <a:t>成</a:t>
-            </a:r>
-            <a:r>
-              <a:rPr lang="en-US" altLang="ja-JP" u="sng" dirty="0"/>
-              <a:t>","</a:t>
-            </a:r>
-            <a:r>
-              <a:rPr lang="ja-JP" altLang="en-US" u="sng"/>
-              <a:t>成</a:t>
-            </a:r>
-            <a:r>
-              <a:rPr lang="en-US" altLang="ja-JP" u="sng" dirty="0"/>
-              <a:t>"]</a:t>
-            </a:r>
-            <a:r>
-              <a:rPr lang="en-US" altLang="ja-JP" dirty="0"/>
-              <a:t>,</a:t>
-            </a:r>
-            <a:r>
-              <a:rPr lang="en-US" altLang="ja-JP" dirty="0">
-                <a:highlight>
-                  <a:srgbClr val="808080"/>
-                </a:highlight>
-              </a:rPr>
-              <a:t>"</a:t>
-            </a:r>
-            <a:r>
-              <a:rPr lang="ja-JP" altLang="en-US">
-                <a:highlight>
-                  <a:srgbClr val="808080"/>
-                </a:highlight>
-              </a:rPr>
-              <a:t>情報通信工学 </a:t>
-            </a:r>
-            <a:r>
-              <a:rPr lang="en-US" altLang="ja-JP" dirty="0">
-                <a:highlight>
-                  <a:srgbClr val="808080"/>
-                </a:highlight>
-              </a:rPr>
-              <a:t>/ </a:t>
-            </a:r>
-            <a:r>
-              <a:rPr lang="ja-JP" altLang="en-US">
-                <a:highlight>
-                  <a:srgbClr val="808080"/>
-                </a:highlight>
-              </a:rPr>
-              <a:t>電気電子工学 </a:t>
-            </a:r>
-            <a:r>
-              <a:rPr lang="en-US" altLang="ja-JP" dirty="0">
-                <a:highlight>
-                  <a:srgbClr val="808080"/>
-                </a:highlight>
-              </a:rPr>
-              <a:t>/ </a:t>
-            </a:r>
-            <a:r>
-              <a:rPr lang="ja-JP" altLang="en-US">
-                <a:highlight>
-                  <a:srgbClr val="808080"/>
-                </a:highlight>
-              </a:rPr>
-              <a:t>工学</a:t>
-            </a:r>
-            <a:r>
-              <a:rPr lang="en-US" altLang="ja-JP" dirty="0">
-                <a:highlight>
-                  <a:srgbClr val="808080"/>
-                </a:highlight>
-              </a:rPr>
-              <a:t>"</a:t>
-            </a:r>
-            <a:r>
-              <a:rPr lang="en-US" altLang="ja-JP" dirty="0"/>
-              <a:t>,["</a:t>
-            </a:r>
-            <a:r>
-              <a:rPr lang="ja-JP" altLang="en-US"/>
-              <a:t>高品質極薄</a:t>
-            </a:r>
-            <a:r>
-              <a:rPr lang="en" altLang="ja-JP" dirty="0"/>
-              <a:t>Si</a:t>
-            </a:r>
-            <a:r>
-              <a:rPr lang="ja-JP" altLang="en-US"/>
-              <a:t>系絶縁膜の低温形成と機能評価に関する研究</a:t>
-            </a:r>
-            <a:r>
-              <a:rPr lang="en-US" altLang="ja-JP" dirty="0"/>
-              <a:t>","09650363"," ","</a:t>
-            </a:r>
-            <a:r>
-              <a:rPr lang="ja-JP" altLang="en-US"/>
-              <a:t>本研究では、高活性なプラズマの生成が容易に実現できる</a:t>
-            </a:r>
-            <a:r>
-              <a:rPr lang="en" altLang="ja-JP" dirty="0"/>
-              <a:t>ECR(Electron Cyclotron Resonance)</a:t>
-            </a:r>
-            <a:r>
-              <a:rPr lang="ja-JP" altLang="en-US"/>
-              <a:t>マイクロ波プラズマと</a:t>
-            </a:r>
-            <a:r>
-              <a:rPr lang="en" altLang="ja-JP" dirty="0"/>
-              <a:t>Si</a:t>
-            </a:r>
-            <a:r>
-              <a:rPr lang="ja-JP" altLang="en-US"/>
-              <a:t>ターゲットからのスパッタリングを組み合わせた</a:t>
-            </a:r>
-            <a:r>
-              <a:rPr lang="en" altLang="ja-JP" dirty="0"/>
-              <a:t>ECR</a:t>
-            </a:r>
-            <a:r>
-              <a:rPr lang="ja-JP" altLang="en-US"/>
-              <a:t>スパッタ法を用いて、</a:t>
-            </a:r>
-            <a:r>
-              <a:rPr lang="en" altLang="ja-JP" dirty="0"/>
-              <a:t>Si</a:t>
-            </a:r>
-            <a:r>
-              <a:rPr lang="ja-JP" altLang="en-US"/>
-              <a:t>系絶縁膜を低温で堆積するプロセス技術を確立し、堆積された膜の機能性を発現させることを目的としている。この研究で得られた成果は、以下の通りである。 </a:t>
-            </a:r>
-            <a:r>
-              <a:rPr lang="en-US" altLang="ja-JP" dirty="0"/>
-              <a:t>(1) </a:t>
-            </a:r>
-            <a:r>
-              <a:rPr lang="ja-JP" altLang="en-US"/>
-              <a:t>プラズマ条件を最適化することにより、</a:t>
-            </a:r>
-            <a:r>
-              <a:rPr lang="en-US" altLang="ja-JP" dirty="0"/>
-              <a:t>130℃</a:t>
-            </a:r>
-            <a:r>
-              <a:rPr lang="ja-JP" altLang="en-US"/>
-              <a:t>の低温で成膜速度</a:t>
-            </a:r>
-            <a:r>
-              <a:rPr lang="en-US" altLang="ja-JP" dirty="0"/>
-              <a:t>23</a:t>
-            </a:r>
-            <a:r>
-              <a:rPr lang="en" altLang="ja-JP" dirty="0"/>
-              <a:t>nm/min</a:t>
-            </a:r>
-            <a:r>
-              <a:rPr lang="ja-JP" altLang="en"/>
-              <a:t>、</a:t>
-            </a:r>
-            <a:r>
-              <a:rPr lang="ja-JP" altLang="en-US"/>
-              <a:t>絶縁破壊電界</a:t>
-            </a:r>
-            <a:r>
-              <a:rPr lang="en-US" altLang="ja-JP" dirty="0"/>
-              <a:t>10</a:t>
-            </a:r>
-            <a:r>
-              <a:rPr lang="en" altLang="ja-JP" dirty="0"/>
-              <a:t>MV/cm</a:t>
-            </a:r>
-            <a:r>
-              <a:rPr lang="ja-JP" altLang="en-US"/>
-              <a:t>を有する</a:t>
-            </a:r>
-            <a:r>
-              <a:rPr lang="en" altLang="ja-JP" dirty="0"/>
-              <a:t>Si</a:t>
-            </a:r>
-            <a:r>
-              <a:rPr lang="ja-JP" altLang="en-US"/>
-              <a:t>酸化膜を形成する技術を確立した。 </a:t>
-            </a:r>
-            <a:r>
-              <a:rPr lang="en-US" altLang="ja-JP" dirty="0"/>
-              <a:t>(2) </a:t>
-            </a:r>
-            <a:r>
-              <a:rPr lang="en" altLang="ja-JP" dirty="0"/>
-              <a:t>Si</a:t>
-            </a:r>
-            <a:r>
-              <a:rPr lang="ja-JP" altLang="en-US"/>
-              <a:t>酸化膜堆積前にプラズマ酸化処理を行い、それに続く</a:t>
-            </a:r>
-            <a:r>
-              <a:rPr lang="en-US" altLang="ja-JP" dirty="0"/>
-              <a:t>130℃</a:t>
-            </a:r>
-            <a:r>
-              <a:rPr lang="ja-JP" altLang="en-US"/>
-              <a:t>での低温堆積と</a:t>
-            </a:r>
-            <a:r>
-              <a:rPr lang="en-US" altLang="ja-JP" dirty="0"/>
-              <a:t>450℃</a:t>
-            </a:r>
-            <a:r>
-              <a:rPr lang="ja-JP" altLang="en-US"/>
-              <a:t>でのアニールにより、</a:t>
-            </a:r>
-            <a:r>
-              <a:rPr lang="en-US" altLang="ja-JP" dirty="0"/>
-              <a:t>9</a:t>
-            </a:r>
-            <a:r>
-              <a:rPr lang="en" altLang="ja-JP" dirty="0"/>
-              <a:t>nm</a:t>
-            </a:r>
-            <a:r>
-              <a:rPr lang="ja-JP" altLang="en-US"/>
-              <a:t>の極薄</a:t>
-            </a:r>
-            <a:r>
-              <a:rPr lang="en" altLang="ja-JP" dirty="0"/>
-              <a:t>Si</a:t>
-            </a:r>
-            <a:r>
-              <a:rPr lang="ja-JP" altLang="en-US"/>
-              <a:t>酸化膜の低温形成プロセスを確立した。この</a:t>
-            </a:r>
-            <a:r>
-              <a:rPr lang="en" altLang="ja-JP" dirty="0"/>
-              <a:t>Si</a:t>
-            </a:r>
-            <a:r>
-              <a:rPr lang="ja-JP" altLang="en-US"/>
-              <a:t>酸化膜は、絶縁破壊電界</a:t>
-            </a:r>
-            <a:r>
-              <a:rPr lang="en-US" altLang="ja-JP" dirty="0"/>
-              <a:t>9</a:t>
-            </a:r>
-            <a:r>
-              <a:rPr lang="en" altLang="ja-JP" dirty="0"/>
-              <a:t>MV/cm</a:t>
-            </a:r>
-            <a:r>
-              <a:rPr lang="ja-JP" altLang="en"/>
-              <a:t>、</a:t>
-            </a:r>
-            <a:r>
-              <a:rPr lang="ja-JP" altLang="en-US"/>
-              <a:t>界面準位密度</a:t>
-            </a:r>
-            <a:r>
-              <a:rPr lang="en-US" altLang="ja-JP" dirty="0"/>
-              <a:t>1</a:t>
-            </a:r>
-            <a:r>
-              <a:rPr lang="en" altLang="ja-JP" dirty="0"/>
-              <a:t>x10^&lt;11&gt;cm^&lt;-2&gt;eV^&lt;-1&gt;</a:t>
-            </a:r>
-            <a:r>
-              <a:rPr lang="ja-JP" altLang="en-US"/>
-              <a:t>以下、固定電荷密度</a:t>
-            </a:r>
-            <a:r>
-              <a:rPr lang="en-US" altLang="ja-JP" dirty="0"/>
-              <a:t>1</a:t>
-            </a:r>
-            <a:r>
-              <a:rPr lang="en" altLang="ja-JP" dirty="0"/>
-              <a:t>x10^&lt;11&gt;cm^&lt;-2&gt;</a:t>
-            </a:r>
-            <a:r>
-              <a:rPr lang="ja-JP" altLang="en-US"/>
-              <a:t>以下の機能を有する。 </a:t>
-            </a:r>
-            <a:r>
-              <a:rPr lang="en-US" altLang="ja-JP" dirty="0"/>
-              <a:t>(3) </a:t>
-            </a:r>
-            <a:r>
-              <a:rPr lang="ja-JP" altLang="en-US"/>
-              <a:t>酸素と窒素の混合プラズマを用いてプラズマ条件を最適化することにより、</a:t>
-            </a:r>
-            <a:r>
-              <a:rPr lang="en-US" altLang="ja-JP" dirty="0"/>
-              <a:t>130℃</a:t>
-            </a:r>
-            <a:r>
-              <a:rPr lang="ja-JP" altLang="en-US"/>
-              <a:t>の低温で、絶縁破壊電界</a:t>
-            </a:r>
-            <a:r>
-              <a:rPr lang="en-US" altLang="ja-JP" dirty="0"/>
-              <a:t>13</a:t>
-            </a:r>
-            <a:r>
-              <a:rPr lang="en" altLang="ja-JP" dirty="0"/>
-              <a:t>MV/cm</a:t>
-            </a:r>
-            <a:r>
-              <a:rPr lang="ja-JP" altLang="en-US"/>
-              <a:t>を有する</a:t>
-            </a:r>
-            <a:r>
-              <a:rPr lang="en" altLang="ja-JP" dirty="0"/>
-              <a:t>Si</a:t>
-            </a:r>
-            <a:r>
-              <a:rPr lang="ja-JP" altLang="en-US"/>
-              <a:t>酸窒化膜が形成できることを明らかにした。 </a:t>
-            </a:r>
-            <a:r>
-              <a:rPr lang="en-US" altLang="ja-JP" dirty="0"/>
-              <a:t>(4) </a:t>
-            </a:r>
-            <a:r>
-              <a:rPr lang="ja-JP" altLang="en-US"/>
-              <a:t>緻密な</a:t>
-            </a:r>
-            <a:r>
-              <a:rPr lang="en" altLang="ja-JP" dirty="0" err="1"/>
-              <a:t>SiN</a:t>
-            </a:r>
-            <a:r>
-              <a:rPr lang="ja-JP" altLang="en-US"/>
-              <a:t>膜が</a:t>
-            </a:r>
-            <a:r>
-              <a:rPr lang="en" altLang="ja-JP" dirty="0"/>
-              <a:t>ECR</a:t>
-            </a:r>
-            <a:r>
-              <a:rPr lang="ja-JP" altLang="en-US"/>
-              <a:t>スパッター法を用いて室温で堆積された。この窒化膜は、屈折率、赤外吸収、化学エッチングレイト等の特性は高温</a:t>
-            </a:r>
-            <a:r>
-              <a:rPr lang="en" altLang="ja-JP" dirty="0"/>
-              <a:t>CVD</a:t>
-            </a:r>
-            <a:r>
-              <a:rPr lang="ja-JP" altLang="en-US"/>
-              <a:t>で成膜したものと同等であることが明らかとなった。</a:t>
-            </a:r>
-            <a:r>
-              <a:rPr lang="en-US" altLang="ja-JP" dirty="0"/>
-              <a:t>"," "," "]]</a:t>
-            </a:r>
-          </a:p>
-        </p:txBody>
-      </p:sp>
-      <p:sp>
-        <p:nvSpPr>
-          <p:cNvPr id="5" name="テキスト ボックス 4">
-            <a:extLst>
-              <a:ext uri="{FF2B5EF4-FFF2-40B4-BE49-F238E27FC236}">
-                <a16:creationId xmlns:a16="http://schemas.microsoft.com/office/drawing/2014/main" id="{9C24996B-F6F7-4C7A-D224-CBE1D5484A48}"/>
-              </a:ext>
-            </a:extLst>
-          </p:cNvPr>
-          <p:cNvSpPr txBox="1"/>
-          <p:nvPr/>
-        </p:nvSpPr>
-        <p:spPr>
-          <a:xfrm>
-            <a:off x="-1" y="577517"/>
-            <a:ext cx="803425" cy="369332"/>
-          </a:xfrm>
-          <a:prstGeom prst="rect">
-            <a:avLst/>
-          </a:prstGeom>
-          <a:noFill/>
-        </p:spPr>
-        <p:txBody>
-          <a:bodyPr wrap="none" rtlCol="0">
-            <a:spAutoFit/>
-          </a:bodyPr>
-          <a:lstStyle/>
-          <a:p>
-            <a:r>
-              <a:rPr kumimoji="1" lang="en-US" altLang="ja-JP"/>
-              <a:t>Input:</a:t>
-            </a:r>
-            <a:endParaRPr kumimoji="1" lang="ja-JP" altLang="en-US"/>
-          </a:p>
-        </p:txBody>
-      </p:sp>
-      <p:sp>
-        <p:nvSpPr>
-          <p:cNvPr id="6" name="テキスト ボックス 5">
-            <a:extLst>
-              <a:ext uri="{FF2B5EF4-FFF2-40B4-BE49-F238E27FC236}">
-                <a16:creationId xmlns:a16="http://schemas.microsoft.com/office/drawing/2014/main" id="{D998F3A7-0629-53CA-682F-82B5E7A90C5E}"/>
-              </a:ext>
-            </a:extLst>
-          </p:cNvPr>
-          <p:cNvSpPr txBox="1"/>
-          <p:nvPr/>
-        </p:nvSpPr>
-        <p:spPr>
-          <a:xfrm>
-            <a:off x="0" y="4988381"/>
-            <a:ext cx="2880917" cy="369332"/>
-          </a:xfrm>
-          <a:prstGeom prst="rect">
-            <a:avLst/>
-          </a:prstGeom>
-          <a:noFill/>
-        </p:spPr>
-        <p:txBody>
-          <a:bodyPr wrap="none" rtlCol="0">
-            <a:spAutoFit/>
-          </a:bodyPr>
-          <a:lstStyle/>
-          <a:p>
-            <a:r>
-              <a:rPr lang="en-US" altLang="ja-JP"/>
-              <a:t>Out</a:t>
-            </a:r>
-            <a:r>
-              <a:rPr kumimoji="1" lang="en-US" altLang="ja-JP"/>
-              <a:t>put</a:t>
-            </a:r>
-            <a:r>
-              <a:rPr kumimoji="1" lang="ja-JP" altLang="en-US"/>
-              <a:t>（想定する形式）</a:t>
-            </a:r>
-            <a:r>
-              <a:rPr kumimoji="1" lang="en-US" altLang="ja-JP"/>
-              <a:t>:</a:t>
-            </a:r>
-            <a:endParaRPr kumimoji="1" lang="ja-JP" altLang="en-US"/>
-          </a:p>
-        </p:txBody>
-      </p:sp>
-      <p:sp>
-        <p:nvSpPr>
-          <p:cNvPr id="7" name="テキスト ボックス 6">
-            <a:extLst>
-              <a:ext uri="{FF2B5EF4-FFF2-40B4-BE49-F238E27FC236}">
-                <a16:creationId xmlns:a16="http://schemas.microsoft.com/office/drawing/2014/main" id="{25003854-6FEC-4B77-4547-707EDD47058A}"/>
-              </a:ext>
-            </a:extLst>
-          </p:cNvPr>
-          <p:cNvSpPr txBox="1"/>
-          <p:nvPr/>
-        </p:nvSpPr>
-        <p:spPr>
-          <a:xfrm>
-            <a:off x="-1" y="5357713"/>
-            <a:ext cx="971741" cy="369332"/>
-          </a:xfrm>
-          <a:prstGeom prst="rect">
-            <a:avLst/>
-          </a:prstGeom>
-          <a:noFill/>
-        </p:spPr>
-        <p:txBody>
-          <a:bodyPr wrap="none" rtlCol="0">
-            <a:spAutoFit/>
-          </a:bodyPr>
-          <a:lstStyle/>
-          <a:p>
-            <a:r>
-              <a:rPr lang="en-US" altLang="ja-JP"/>
-              <a:t>["</a:t>
-            </a:r>
-            <a:r>
-              <a:rPr lang="ja-JP" altLang="en-US"/>
-              <a:t>成</a:t>
-            </a:r>
-            <a:r>
-              <a:rPr lang="en-US" altLang="ja-JP"/>
-              <a:t>",0]</a:t>
-            </a:r>
-            <a:endParaRPr kumimoji="1" lang="ja-JP" altLang="en-US"/>
-          </a:p>
-        </p:txBody>
-      </p:sp>
-      <p:sp>
-        <p:nvSpPr>
-          <p:cNvPr id="8" name="テキスト ボックス 7">
-            <a:extLst>
-              <a:ext uri="{FF2B5EF4-FFF2-40B4-BE49-F238E27FC236}">
-                <a16:creationId xmlns:a16="http://schemas.microsoft.com/office/drawing/2014/main" id="{DA8703AE-573B-9728-A3C3-997C4B6E8C7F}"/>
-              </a:ext>
-            </a:extLst>
-          </p:cNvPr>
-          <p:cNvSpPr txBox="1"/>
-          <p:nvPr/>
-        </p:nvSpPr>
-        <p:spPr>
-          <a:xfrm>
-            <a:off x="1856114" y="6034822"/>
-            <a:ext cx="3057247" cy="307777"/>
-          </a:xfrm>
-          <a:prstGeom prst="rect">
-            <a:avLst/>
-          </a:prstGeom>
-          <a:noFill/>
-        </p:spPr>
-        <p:txBody>
-          <a:bodyPr wrap="none" rtlCol="0">
-            <a:spAutoFit/>
-          </a:bodyPr>
-          <a:lstStyle/>
-          <a:p>
-            <a:r>
-              <a:rPr kumimoji="1" lang="ja-JP" altLang="en-US" sz="1400"/>
-              <a:t>地名と判定したものはそのまま残す</a:t>
-            </a:r>
-          </a:p>
-        </p:txBody>
-      </p:sp>
-      <p:sp>
-        <p:nvSpPr>
-          <p:cNvPr id="9" name="テキスト ボックス 8">
-            <a:extLst>
-              <a:ext uri="{FF2B5EF4-FFF2-40B4-BE49-F238E27FC236}">
-                <a16:creationId xmlns:a16="http://schemas.microsoft.com/office/drawing/2014/main" id="{6E3ED00A-3E53-034E-8909-DCE8C51D38E8}"/>
-              </a:ext>
-            </a:extLst>
-          </p:cNvPr>
-          <p:cNvSpPr txBox="1"/>
-          <p:nvPr/>
-        </p:nvSpPr>
-        <p:spPr>
-          <a:xfrm>
-            <a:off x="1669936" y="5727045"/>
-            <a:ext cx="3695242" cy="307777"/>
-          </a:xfrm>
-          <a:prstGeom prst="rect">
-            <a:avLst/>
-          </a:prstGeom>
-          <a:noFill/>
-        </p:spPr>
-        <p:txBody>
-          <a:bodyPr wrap="none" rtlCol="0">
-            <a:spAutoFit/>
-          </a:bodyPr>
-          <a:lstStyle/>
-          <a:p>
-            <a:r>
-              <a:rPr kumimoji="1" lang="ja-JP" altLang="en-US" sz="1400"/>
-              <a:t>地名でないと判定したものは</a:t>
-            </a:r>
-            <a:r>
-              <a:rPr kumimoji="1" lang="en-US" altLang="ja-JP" sz="1400"/>
-              <a:t>0</a:t>
-            </a:r>
-            <a:r>
-              <a:rPr kumimoji="1" lang="ja-JP" altLang="en-US" sz="1400"/>
-              <a:t>に置き換える</a:t>
-            </a:r>
-          </a:p>
-        </p:txBody>
-      </p:sp>
-      <p:sp>
-        <p:nvSpPr>
-          <p:cNvPr id="10" name="テキスト ボックス 9">
-            <a:extLst>
-              <a:ext uri="{FF2B5EF4-FFF2-40B4-BE49-F238E27FC236}">
-                <a16:creationId xmlns:a16="http://schemas.microsoft.com/office/drawing/2014/main" id="{B16125B5-381B-C4FD-2940-07DA429F3706}"/>
-              </a:ext>
-            </a:extLst>
-          </p:cNvPr>
-          <p:cNvSpPr txBox="1"/>
-          <p:nvPr/>
-        </p:nvSpPr>
-        <p:spPr>
-          <a:xfrm>
-            <a:off x="2660822" y="820811"/>
-            <a:ext cx="1806905" cy="307777"/>
-          </a:xfrm>
-          <a:prstGeom prst="rect">
-            <a:avLst/>
-          </a:prstGeom>
-          <a:noFill/>
-        </p:spPr>
-        <p:txBody>
-          <a:bodyPr wrap="none" rtlCol="0">
-            <a:spAutoFit/>
-          </a:bodyPr>
-          <a:lstStyle/>
-          <a:p>
-            <a:r>
-              <a:rPr kumimoji="1" lang="en-US" altLang="ja-JP" sz="1400" dirty="0"/>
-              <a:t>NER</a:t>
-            </a:r>
-            <a:r>
-              <a:rPr kumimoji="1" lang="ja-JP" altLang="en-US" sz="1400"/>
-              <a:t>による抽出結果</a:t>
-            </a:r>
-          </a:p>
-        </p:txBody>
-      </p:sp>
-      <p:cxnSp>
-        <p:nvCxnSpPr>
-          <p:cNvPr id="12" name="カギ線コネクタ 11">
-            <a:extLst>
-              <a:ext uri="{FF2B5EF4-FFF2-40B4-BE49-F238E27FC236}">
-                <a16:creationId xmlns:a16="http://schemas.microsoft.com/office/drawing/2014/main" id="{4CC0870C-CAFC-BCD1-A478-9144D0E96817}"/>
-              </a:ext>
-            </a:extLst>
-          </p:cNvPr>
-          <p:cNvCxnSpPr>
-            <a:cxnSpLocks/>
-            <a:stCxn id="10" idx="1"/>
-          </p:cNvCxnSpPr>
-          <p:nvPr/>
-        </p:nvCxnSpPr>
-        <p:spPr>
-          <a:xfrm rot="10800000" flipV="1">
-            <a:off x="1856114" y="974700"/>
-            <a:ext cx="804708" cy="227040"/>
-          </a:xfrm>
-          <a:prstGeom prst="bentConnector3">
-            <a:avLst>
-              <a:gd name="adj1" fmla="val 99620"/>
-            </a:avLst>
-          </a:prstGeom>
-          <a:ln w="12700">
-            <a:solidFill>
-              <a:schemeClr val="tx1"/>
-            </a:solidFill>
-            <a:tailEnd type="triangle"/>
-          </a:ln>
-        </p:spPr>
-        <p:style>
-          <a:lnRef idx="2">
-            <a:schemeClr val="accent1"/>
-          </a:lnRef>
-          <a:fillRef idx="0">
-            <a:schemeClr val="accent1"/>
-          </a:fillRef>
-          <a:effectRef idx="1">
-            <a:schemeClr val="accent1"/>
-          </a:effectRef>
-          <a:fontRef idx="minor">
-            <a:schemeClr val="tx1"/>
-          </a:fontRef>
-        </p:style>
-      </p:cxnSp>
-      <p:cxnSp>
-        <p:nvCxnSpPr>
-          <p:cNvPr id="15" name="カギ線コネクタ 14">
-            <a:extLst>
-              <a:ext uri="{FF2B5EF4-FFF2-40B4-BE49-F238E27FC236}">
-                <a16:creationId xmlns:a16="http://schemas.microsoft.com/office/drawing/2014/main" id="{BC8931FA-6C64-64C4-5D8D-9F0DD8164590}"/>
-              </a:ext>
-            </a:extLst>
-          </p:cNvPr>
-          <p:cNvCxnSpPr>
-            <a:stCxn id="9" idx="1"/>
-          </p:cNvCxnSpPr>
-          <p:nvPr/>
-        </p:nvCxnSpPr>
-        <p:spPr>
-          <a:xfrm rot="10800000">
-            <a:off x="706582" y="5727046"/>
-            <a:ext cx="963354" cy="153889"/>
-          </a:xfrm>
-          <a:prstGeom prst="bentConnector3">
-            <a:avLst>
-              <a:gd name="adj1" fmla="val 99616"/>
-            </a:avLst>
-          </a:prstGeom>
-          <a:ln w="12700">
-            <a:solidFill>
-              <a:schemeClr val="tx1"/>
-            </a:solidFill>
-            <a:tailEnd type="triangle"/>
-          </a:ln>
-        </p:spPr>
-        <p:style>
-          <a:lnRef idx="2">
-            <a:schemeClr val="accent1"/>
-          </a:lnRef>
-          <a:fillRef idx="0">
-            <a:schemeClr val="accent1"/>
-          </a:fillRef>
-          <a:effectRef idx="1">
-            <a:schemeClr val="accent1"/>
-          </a:effectRef>
-          <a:fontRef idx="minor">
-            <a:schemeClr val="tx1"/>
-          </a:fontRef>
-        </p:style>
-      </p:cxnSp>
-      <p:cxnSp>
-        <p:nvCxnSpPr>
-          <p:cNvPr id="18" name="カギ線コネクタ 17">
-            <a:extLst>
-              <a:ext uri="{FF2B5EF4-FFF2-40B4-BE49-F238E27FC236}">
-                <a16:creationId xmlns:a16="http://schemas.microsoft.com/office/drawing/2014/main" id="{B64DC262-5C37-8FCC-BC2B-71EB33CC94EE}"/>
-              </a:ext>
-            </a:extLst>
-          </p:cNvPr>
-          <p:cNvCxnSpPr>
-            <a:cxnSpLocks/>
-            <a:stCxn id="8" idx="1"/>
-          </p:cNvCxnSpPr>
-          <p:nvPr/>
-        </p:nvCxnSpPr>
-        <p:spPr>
-          <a:xfrm rot="10800000">
-            <a:off x="396974" y="5727045"/>
-            <a:ext cx="1459140" cy="461666"/>
-          </a:xfrm>
-          <a:prstGeom prst="bentConnector3">
-            <a:avLst>
-              <a:gd name="adj1" fmla="val 99849"/>
-            </a:avLst>
-          </a:prstGeom>
-          <a:ln w="12700">
-            <a:solidFill>
-              <a:schemeClr val="tx1"/>
-            </a:solidFill>
-            <a:tailEnd type="triangle"/>
-          </a:ln>
-        </p:spPr>
-        <p:style>
-          <a:lnRef idx="2">
-            <a:schemeClr val="accent1"/>
-          </a:lnRef>
-          <a:fillRef idx="0">
-            <a:schemeClr val="accent1"/>
-          </a:fillRef>
-          <a:effectRef idx="1">
-            <a:schemeClr val="accent1"/>
-          </a:effectRef>
-          <a:fontRef idx="minor">
-            <a:schemeClr val="tx1"/>
-          </a:fontRef>
-        </p:style>
-      </p:cxnSp>
-    </p:spTree>
-    <p:extLst>
-      <p:ext uri="{BB962C8B-B14F-4D97-AF65-F5344CB8AC3E}">
-        <p14:creationId xmlns:p14="http://schemas.microsoft.com/office/powerpoint/2010/main" val="2951289915"/>
       </p:ext>
     </p:extLst>
   </p:cSld>
@@ -8368,7 +8368,7 @@
         <p:spPr>
           <a:xfrm>
             <a:off x="0" y="577517"/>
-            <a:ext cx="2954655" cy="369332"/>
+            <a:ext cx="4163319" cy="369332"/>
           </a:xfrm>
           <a:prstGeom prst="rect">
             <a:avLst/>
@@ -8383,7 +8383,15 @@
           <a:p>
             <a:r>
               <a:rPr kumimoji="1" lang="ja-JP" altLang="en-US"/>
-              <a:t>距離行列（ハミング距離）</a:t>
+              <a:t>距離行列（ハミング距離</a:t>
+            </a:r>
+            <a:r>
+              <a:rPr kumimoji="1" lang="en-US" altLang="ja-JP"/>
+              <a:t>: 415</a:t>
+            </a:r>
+            <a:r>
+              <a:rPr kumimoji="1" lang="ja-JP" altLang="en-US"/>
+              <a:t>サイト）</a:t>
             </a:r>
           </a:p>
         </p:txBody>
@@ -8936,71 +8944,12 @@
           <a:chExt cx="0" cy="0"/>
         </a:xfrm>
       </p:grpSpPr>
-      <p:sp>
-        <p:nvSpPr>
-          <p:cNvPr id="2" name="タイトル 1">
-            <a:extLst>
-              <a:ext uri="{FF2B5EF4-FFF2-40B4-BE49-F238E27FC236}">
-                <a16:creationId xmlns:a16="http://schemas.microsoft.com/office/drawing/2014/main" id="{8AC87057-C932-90B2-F7E7-6BA387992F48}"/>
-              </a:ext>
-            </a:extLst>
-          </p:cNvPr>
-          <p:cNvSpPr>
-            <a:spLocks noGrp="1"/>
-          </p:cNvSpPr>
-          <p:nvPr>
-            <p:ph type="title"/>
-          </p:nvPr>
-        </p:nvSpPr>
-        <p:spPr>
-          <a:xfrm>
-            <a:off x="0" y="1"/>
-            <a:ext cx="12192000" cy="577516"/>
-          </a:xfrm>
-          <a:solidFill>
-            <a:schemeClr val="bg1">
-              <a:lumMod val="85000"/>
-            </a:schemeClr>
-          </a:solidFill>
-        </p:spPr>
-        <p:txBody>
-          <a:bodyPr>
-            <a:normAutofit fontScale="90000"/>
-          </a:bodyPr>
-          <a:lstStyle/>
-          <a:p>
-            <a:r>
-              <a:rPr lang="ja-JP" altLang="en-US" sz="3600"/>
-              <a:t>結果</a:t>
-            </a:r>
-            <a:r>
-              <a:rPr lang="en-US" altLang="ja-JP" sz="3600" dirty="0">
-                <a:sym typeface="Wingdings" pitchFamily="2" charset="2"/>
-              </a:rPr>
-              <a:t>(</a:t>
-            </a:r>
-            <a:r>
-              <a:rPr lang="ja-JP" altLang="en-US" sz="3600">
-                <a:sym typeface="Wingdings" pitchFamily="2" charset="2"/>
-              </a:rPr>
-              <a:t>決定された地名について</a:t>
-            </a:r>
-            <a:r>
-              <a:rPr lang="en-US" altLang="ja-JP" sz="3600" dirty="0">
-                <a:sym typeface="Wingdings" pitchFamily="2" charset="2"/>
-              </a:rPr>
-              <a:t>)</a:t>
-            </a:r>
-            <a:endParaRPr kumimoji="1" lang="ja-JP" altLang="en-US" sz="3600"/>
-          </a:p>
-        </p:txBody>
-      </p:sp>
       <p:pic>
         <p:nvPicPr>
-          <p:cNvPr id="4" name="図 3">
-            <a:extLst>
-              <a:ext uri="{FF2B5EF4-FFF2-40B4-BE49-F238E27FC236}">
-                <a16:creationId xmlns:a16="http://schemas.microsoft.com/office/drawing/2014/main" id="{3F13B2AF-A565-AEE8-9550-E535F476209B}"/>
+          <p:cNvPr id="11" name="図 10">
+            <a:extLst>
+              <a:ext uri="{FF2B5EF4-FFF2-40B4-BE49-F238E27FC236}">
+                <a16:creationId xmlns:a16="http://schemas.microsoft.com/office/drawing/2014/main" id="{7C1030FB-51E8-CF9A-F259-85703BF964B9}"/>
               </a:ext>
             </a:extLst>
           </p:cNvPr>
@@ -9017,8 +8966,8 @@
         </p:blipFill>
         <p:spPr>
           <a:xfrm>
-            <a:off x="1485628" y="1095419"/>
-            <a:ext cx="3951064" cy="5185064"/>
+            <a:off x="1312020" y="869669"/>
+            <a:ext cx="4212667" cy="5582689"/>
           </a:xfrm>
           <a:prstGeom prst="rect">
             <a:avLst/>
@@ -9027,6 +8976,65 @@
       </p:pic>
       <p:sp>
         <p:nvSpPr>
+          <p:cNvPr id="2" name="タイトル 1">
+            <a:extLst>
+              <a:ext uri="{FF2B5EF4-FFF2-40B4-BE49-F238E27FC236}">
+                <a16:creationId xmlns:a16="http://schemas.microsoft.com/office/drawing/2014/main" id="{8AC87057-C932-90B2-F7E7-6BA387992F48}"/>
+              </a:ext>
+            </a:extLst>
+          </p:cNvPr>
+          <p:cNvSpPr>
+            <a:spLocks noGrp="1"/>
+          </p:cNvSpPr>
+          <p:nvPr>
+            <p:ph type="title"/>
+          </p:nvPr>
+        </p:nvSpPr>
+        <p:spPr>
+          <a:xfrm>
+            <a:off x="0" y="1"/>
+            <a:ext cx="12192000" cy="577516"/>
+          </a:xfrm>
+          <a:solidFill>
+            <a:schemeClr val="bg1">
+              <a:lumMod val="85000"/>
+            </a:schemeClr>
+          </a:solidFill>
+        </p:spPr>
+        <p:txBody>
+          <a:bodyPr>
+            <a:normAutofit fontScale="90000"/>
+          </a:bodyPr>
+          <a:lstStyle/>
+          <a:p>
+            <a:r>
+              <a:rPr lang="ja-JP" altLang="en-US" sz="3600"/>
+              <a:t>結果</a:t>
+            </a:r>
+            <a:r>
+              <a:rPr lang="en-US" altLang="ja-JP" sz="3600" dirty="0">
+                <a:sym typeface="Wingdings" pitchFamily="2" charset="2"/>
+              </a:rPr>
+              <a:t>(</a:t>
+            </a:r>
+            <a:r>
+              <a:rPr lang="ja-JP" altLang="en-US" sz="3600">
+                <a:sym typeface="Wingdings" pitchFamily="2" charset="2"/>
+              </a:rPr>
+              <a:t>決定された地名について</a:t>
+            </a:r>
+            <a:r>
+              <a:rPr lang="en-US" altLang="ja-JP" sz="3600" dirty="0">
+                <a:sym typeface="Wingdings" pitchFamily="2" charset="2"/>
+              </a:rPr>
+              <a:t>)</a:t>
+            </a:r>
+            <a:endParaRPr kumimoji="1" lang="ja-JP" altLang="en-US" sz="3600"/>
+          </a:p>
+        </p:txBody>
+      </p:sp>
+      <p:sp>
+        <p:nvSpPr>
           <p:cNvPr id="5" name="テキスト ボックス 4">
             <a:extLst>
               <a:ext uri="{FF2B5EF4-FFF2-40B4-BE49-F238E27FC236}">
@@ -9039,7 +9047,7 @@
         </p:nvSpPr>
         <p:spPr>
           <a:xfrm>
-            <a:off x="1155214" y="566389"/>
+            <a:off x="1059517" y="566389"/>
             <a:ext cx="2723823" cy="369332"/>
           </a:xfrm>
           <a:prstGeom prst="rect">
@@ -9153,8 +9161,8 @@
         </p:nvCxnSpPr>
         <p:spPr>
           <a:xfrm>
-            <a:off x="1442454" y="1244942"/>
-            <a:ext cx="3980312" cy="0"/>
+            <a:off x="1312020" y="1021654"/>
+            <a:ext cx="4212667" cy="0"/>
           </a:xfrm>
           <a:prstGeom prst="line">
             <a:avLst/>
@@ -15726,7 +15734,7 @@
           <a:p>
             <a:r>
               <a:rPr lang="ja-JP" altLang="en-US" b="1"/>
-              <a:t>◾️文書からの地名の抽出に関して、技術的な課題を検討する</a:t>
+              <a:t>◾️文書からの地名の抽出に関して、精度に関する課題を検討する</a:t>
             </a:r>
             <a:endParaRPr lang="en-US" altLang="ja-JP" b="1" dirty="0"/>
           </a:p>
@@ -16277,8 +16285,8 @@
         </p:nvSpPr>
         <p:spPr>
           <a:xfrm>
-            <a:off x="1167319" y="5103613"/>
-            <a:ext cx="3558988" cy="369332"/>
+            <a:off x="1112016" y="5103613"/>
+            <a:ext cx="3669594" cy="369332"/>
           </a:xfrm>
           <a:prstGeom prst="rect">
             <a:avLst/>
@@ -16315,6 +16323,10 @@
             <a:r>
               <a:rPr lang="ja-JP" altLang="en-US"/>
               <a:t>判定結果の選抜</a:t>
+            </a:r>
+            <a:r>
+              <a:rPr lang="en-US" altLang="ja-JP"/>
+              <a:t>*</a:t>
             </a:r>
             <a:endParaRPr lang="en-US" altLang="ja-JP" dirty="0"/>
           </a:p>
@@ -17156,8 +17168,8 @@
         </p:nvCxnSpPr>
         <p:spPr>
           <a:xfrm flipV="1">
-            <a:off x="4726307" y="2215407"/>
-            <a:ext cx="4326252" cy="3072872"/>
+            <a:off x="4781610" y="2215407"/>
+            <a:ext cx="4270949" cy="3072872"/>
           </a:xfrm>
           <a:prstGeom prst="bentConnector3">
             <a:avLst>
@@ -17442,6 +17454,54 @@
               <a:t>プロンプト</a:t>
             </a:r>
             <a:endParaRPr kumimoji="1" lang="ja-JP" altLang="en-US" sz="1500" b="1"/>
+          </a:p>
+        </p:txBody>
+      </p:sp>
+      <p:sp>
+        <p:nvSpPr>
+          <p:cNvPr id="22" name="テキスト ボックス 21">
+            <a:extLst>
+              <a:ext uri="{FF2B5EF4-FFF2-40B4-BE49-F238E27FC236}">
+                <a16:creationId xmlns:a16="http://schemas.microsoft.com/office/drawing/2014/main" id="{C541E95B-2E19-D8D5-E5B9-E75FDCFF4F76}"/>
+              </a:ext>
+            </a:extLst>
+          </p:cNvPr>
+          <p:cNvSpPr txBox="1"/>
+          <p:nvPr/>
+        </p:nvSpPr>
+        <p:spPr>
+          <a:xfrm>
+            <a:off x="9335387" y="6549656"/>
+            <a:ext cx="2803973" cy="276999"/>
+          </a:xfrm>
+          <a:prstGeom prst="rect">
+            <a:avLst/>
+          </a:prstGeom>
+          <a:noFill/>
+        </p:spPr>
+        <p:txBody>
+          <a:bodyPr wrap="none" rtlCol="0">
+            <a:spAutoFit/>
+          </a:bodyPr>
+          <a:lstStyle/>
+          <a:p>
+            <a:r>
+              <a:rPr kumimoji="1" lang="en-US" altLang="ja-JP" sz="1200"/>
+              <a:t>*3 AI</a:t>
+            </a:r>
+            <a:r>
+              <a:rPr kumimoji="1" lang="ja-JP" altLang="en-US" sz="1200"/>
+              <a:t>のうち</a:t>
+            </a:r>
+            <a:r>
+              <a:rPr kumimoji="1" lang="en-US" altLang="ja-JP" sz="1200"/>
+              <a:t>1 AI</a:t>
+            </a:r>
+            <a:r>
+              <a:rPr lang="ja-JP" altLang="en-US" sz="1200"/>
+              <a:t>の結果を対象外とした</a:t>
+            </a:r>
+            <a:endParaRPr kumimoji="1" lang="ja-JP" altLang="en-US" sz="1200"/>
           </a:p>
         </p:txBody>
       </p:sp>
